--- a/S1-CL1-Cloud-Design-Build/delivery/topic_14/Topic_14_Slides.pptx
+++ b/S1-CL1-Cloud-Design-Build/delivery/topic_14/Topic_14_Slides.pptx
@@ -5,27 +5,27 @@
     <p:sldMasterId id="2147483648" r:id="rId1"/>
   </p:sldMasterIdLst>
   <p:sldIdLst>
-    <p:sldId id="256" r:id="rId2"/>
-    <p:sldId id="257" r:id="rId3"/>
-    <p:sldId id="258" r:id="rId4"/>
-    <p:sldId id="259" r:id="rId5"/>
-    <p:sldId id="260" r:id="rId6"/>
-    <p:sldId id="261" r:id="rId7"/>
-    <p:sldId id="262" r:id="rId8"/>
-    <p:sldId id="263" r:id="rId9"/>
-    <p:sldId id="264" r:id="rId10"/>
-    <p:sldId id="265" r:id="rId11"/>
-    <p:sldId id="266" r:id="rId12"/>
-    <p:sldId id="267" r:id="rId13"/>
-    <p:sldId id="268" r:id="rId14"/>
-    <p:sldId id="269" r:id="rId15"/>
-    <p:sldId id="270" r:id="rId16"/>
-    <p:sldId id="271" r:id="rId17"/>
-    <p:sldId id="272" r:id="rId18"/>
-    <p:sldId id="273" r:id="rId19"/>
-    <p:sldId id="274" r:id="rId20"/>
+    <p:sldId id="256" r:id="rId7"/>
+    <p:sldId id="257" r:id="rId8"/>
+    <p:sldId id="258" r:id="rId9"/>
+    <p:sldId id="259" r:id="rId10"/>
+    <p:sldId id="260" r:id="rId11"/>
+    <p:sldId id="261" r:id="rId12"/>
+    <p:sldId id="262" r:id="rId13"/>
+    <p:sldId id="263" r:id="rId14"/>
+    <p:sldId id="264" r:id="rId15"/>
+    <p:sldId id="265" r:id="rId16"/>
+    <p:sldId id="266" r:id="rId17"/>
+    <p:sldId id="267" r:id="rId18"/>
+    <p:sldId id="268" r:id="rId19"/>
+    <p:sldId id="269" r:id="rId20"/>
+    <p:sldId id="270" r:id="rId21"/>
+    <p:sldId id="271" r:id="rId22"/>
+    <p:sldId id="272" r:id="rId23"/>
+    <p:sldId id="273" r:id="rId24"/>
+    <p:sldId id="274" r:id="rId25"/>
   </p:sldIdLst>
-  <p:sldSz cx="12192000" cy="6858000"/>
+  <p:sldSz cx="12191695" cy="6858000" type="screen4x3"/>
   <p:notesSz cx="6858000" cy="9144000"/>
   <p:defaultTextStyle>
     <a:defPPr>
@@ -122,22 +122,6 @@
       </a:defRPr>
     </a:lvl9pPr>
   </p:defaultTextStyle>
-  <p:extLst>
-    <p:ext uri="{EFAFB233-063F-42B5-8137-9DF3F51BA10A}">
-      <p15:sldGuideLst xmlns:p15="http://schemas.microsoft.com/office/powerpoint/2012/main">
-        <p15:guide id="1" orient="horz" pos="2160">
-          <p15:clr>
-            <a:srgbClr val="A4A3A4"/>
-          </p15:clr>
-        </p15:guide>
-        <p15:guide id="2" pos="2880">
-          <p15:clr>
-            <a:srgbClr val="A4A3A4"/>
-          </p15:clr>
-        </p15:guide>
-      </p15:sldGuideLst>
-    </p:ext>
-  </p:extLst>
 </p:presentation>
 </file>
 
@@ -179,9 +163,10 @@
           <a:lstStyle/>
           <a:p>
             <a:r>
-              <a:rPr lang="en-US"/>
+              <a:rPr lang="en-US" smtClean="0"/>
               <a:t>Click to edit Master title style</a:t>
             </a:r>
+            <a:endParaRPr lang="en-US"/>
           </a:p>
         </p:txBody>
       </p:sp>
@@ -297,9 +282,10 @@
           </a:lstStyle>
           <a:p>
             <a:r>
-              <a:rPr lang="en-US"/>
+              <a:rPr lang="en-US" smtClean="0"/>
               <a:t>Click to edit Master subtitle style</a:t>
             </a:r>
+            <a:endParaRPr lang="en-US"/>
           </a:p>
         </p:txBody>
       </p:sp>
@@ -320,7 +306,7 @@
           <a:p>
             <a:fld id="{5BCAD085-E8A6-8845-BD4E-CB4CCA059FC4}" type="datetimeFigureOut">
               <a:rPr lang="en-US" smtClean="0"/>
-              <a:t>6/4/2026</a:t>
+              <a:t>1/27/13</a:t>
             </a:fld>
             <a:endParaRPr lang="en-US"/>
           </a:p>
@@ -414,9 +400,10 @@
           <a:lstStyle/>
           <a:p>
             <a:r>
-              <a:rPr lang="en-US"/>
+              <a:rPr lang="en-US" smtClean="0"/>
               <a:t>Click to edit Master title style</a:t>
             </a:r>
+            <a:endParaRPr lang="en-US"/>
           </a:p>
         </p:txBody>
       </p:sp>
@@ -437,37 +424,38 @@
           <a:p>
             <a:pPr lvl="0"/>
             <a:r>
-              <a:rPr lang="en-US"/>
+              <a:rPr lang="en-US" smtClean="0"/>
               <a:t>Click to edit Master text styles</a:t>
             </a:r>
           </a:p>
           <a:p>
             <a:pPr lvl="1"/>
             <a:r>
-              <a:rPr lang="en-US"/>
+              <a:rPr lang="en-US" smtClean="0"/>
               <a:t>Second level</a:t>
             </a:r>
           </a:p>
           <a:p>
             <a:pPr lvl="2"/>
             <a:r>
-              <a:rPr lang="en-US"/>
+              <a:rPr lang="en-US" smtClean="0"/>
               <a:t>Third level</a:t>
             </a:r>
           </a:p>
           <a:p>
             <a:pPr lvl="3"/>
             <a:r>
-              <a:rPr lang="en-US"/>
+              <a:rPr lang="en-US" smtClean="0"/>
               <a:t>Fourth level</a:t>
             </a:r>
           </a:p>
           <a:p>
             <a:pPr lvl="4"/>
             <a:r>
-              <a:rPr lang="en-US"/>
+              <a:rPr lang="en-US" smtClean="0"/>
               <a:t>Fifth level</a:t>
             </a:r>
+            <a:endParaRPr lang="en-US"/>
           </a:p>
         </p:txBody>
       </p:sp>
@@ -488,7 +476,7 @@
           <a:p>
             <a:fld id="{5BCAD085-E8A6-8845-BD4E-CB4CCA059FC4}" type="datetimeFigureOut">
               <a:rPr lang="en-US" smtClean="0"/>
-              <a:t>6/4/2026</a:t>
+              <a:t>1/27/13</a:t>
             </a:fld>
             <a:endParaRPr lang="en-US"/>
           </a:p>
@@ -587,9 +575,10 @@
           <a:lstStyle/>
           <a:p>
             <a:r>
-              <a:rPr lang="en-US"/>
+              <a:rPr lang="en-US" smtClean="0"/>
               <a:t>Click to edit Master title style</a:t>
             </a:r>
+            <a:endParaRPr lang="en-US"/>
           </a:p>
         </p:txBody>
       </p:sp>
@@ -615,37 +604,38 @@
           <a:p>
             <a:pPr lvl="0"/>
             <a:r>
-              <a:rPr lang="en-US"/>
+              <a:rPr lang="en-US" smtClean="0"/>
               <a:t>Click to edit Master text styles</a:t>
             </a:r>
           </a:p>
           <a:p>
             <a:pPr lvl="1"/>
             <a:r>
-              <a:rPr lang="en-US"/>
+              <a:rPr lang="en-US" smtClean="0"/>
               <a:t>Second level</a:t>
             </a:r>
           </a:p>
           <a:p>
             <a:pPr lvl="2"/>
             <a:r>
-              <a:rPr lang="en-US"/>
+              <a:rPr lang="en-US" smtClean="0"/>
               <a:t>Third level</a:t>
             </a:r>
           </a:p>
           <a:p>
             <a:pPr lvl="3"/>
             <a:r>
-              <a:rPr lang="en-US"/>
+              <a:rPr lang="en-US" smtClean="0"/>
               <a:t>Fourth level</a:t>
             </a:r>
           </a:p>
           <a:p>
             <a:pPr lvl="4"/>
             <a:r>
-              <a:rPr lang="en-US"/>
+              <a:rPr lang="en-US" smtClean="0"/>
               <a:t>Fifth level</a:t>
             </a:r>
+            <a:endParaRPr lang="en-US"/>
           </a:p>
         </p:txBody>
       </p:sp>
@@ -666,7 +656,7 @@
           <a:p>
             <a:fld id="{5BCAD085-E8A6-8845-BD4E-CB4CCA059FC4}" type="datetimeFigureOut">
               <a:rPr lang="en-US" smtClean="0"/>
-              <a:t>6/4/2026</a:t>
+              <a:t>1/27/13</a:t>
             </a:fld>
             <a:endParaRPr lang="en-US"/>
           </a:p>
@@ -760,9 +750,10 @@
           <a:lstStyle/>
           <a:p>
             <a:r>
-              <a:rPr lang="en-US"/>
+              <a:rPr lang="en-US" smtClean="0"/>
               <a:t>Click to edit Master title style</a:t>
             </a:r>
+            <a:endParaRPr lang="en-US"/>
           </a:p>
         </p:txBody>
       </p:sp>
@@ -783,37 +774,38 @@
           <a:p>
             <a:pPr lvl="0"/>
             <a:r>
-              <a:rPr lang="en-US"/>
+              <a:rPr lang="en-US" smtClean="0"/>
               <a:t>Click to edit Master text styles</a:t>
             </a:r>
           </a:p>
           <a:p>
             <a:pPr lvl="1"/>
             <a:r>
-              <a:rPr lang="en-US"/>
+              <a:rPr lang="en-US" smtClean="0"/>
               <a:t>Second level</a:t>
             </a:r>
           </a:p>
           <a:p>
             <a:pPr lvl="2"/>
             <a:r>
-              <a:rPr lang="en-US"/>
+              <a:rPr lang="en-US" smtClean="0"/>
               <a:t>Third level</a:t>
             </a:r>
           </a:p>
           <a:p>
             <a:pPr lvl="3"/>
             <a:r>
-              <a:rPr lang="en-US"/>
+              <a:rPr lang="en-US" smtClean="0"/>
               <a:t>Fourth level</a:t>
             </a:r>
           </a:p>
           <a:p>
             <a:pPr lvl="4"/>
             <a:r>
-              <a:rPr lang="en-US"/>
+              <a:rPr lang="en-US" smtClean="0"/>
               <a:t>Fifth level</a:t>
             </a:r>
+            <a:endParaRPr lang="en-US"/>
           </a:p>
         </p:txBody>
       </p:sp>
@@ -834,7 +826,7 @@
           <a:p>
             <a:fld id="{5BCAD085-E8A6-8845-BD4E-CB4CCA059FC4}" type="datetimeFigureOut">
               <a:rPr lang="en-US" smtClean="0"/>
-              <a:t>6/4/2026</a:t>
+              <a:t>1/27/13</a:t>
             </a:fld>
             <a:endParaRPr lang="en-US"/>
           </a:p>
@@ -937,9 +929,10 @@
           </a:lstStyle>
           <a:p>
             <a:r>
-              <a:rPr lang="en-US"/>
+              <a:rPr lang="en-US" smtClean="0"/>
               <a:t>Click to edit Master title style</a:t>
             </a:r>
+            <a:endParaRPr lang="en-US"/>
           </a:p>
         </p:txBody>
       </p:sp>
@@ -1056,7 +1049,7 @@
           <a:p>
             <a:pPr lvl="0"/>
             <a:r>
-              <a:rPr lang="en-US"/>
+              <a:rPr lang="en-US" smtClean="0"/>
               <a:t>Click to edit Master text styles</a:t>
             </a:r>
           </a:p>
@@ -1079,7 +1072,7 @@
           <a:p>
             <a:fld id="{5BCAD085-E8A6-8845-BD4E-CB4CCA059FC4}" type="datetimeFigureOut">
               <a:rPr lang="en-US" smtClean="0"/>
-              <a:t>6/4/2026</a:t>
+              <a:t>1/27/13</a:t>
             </a:fld>
             <a:endParaRPr lang="en-US"/>
           </a:p>
@@ -1173,9 +1166,10 @@
           <a:lstStyle/>
           <a:p>
             <a:r>
-              <a:rPr lang="en-US"/>
+              <a:rPr lang="en-US" smtClean="0"/>
               <a:t>Click to edit Master title style</a:t>
             </a:r>
+            <a:endParaRPr lang="en-US"/>
           </a:p>
         </p:txBody>
       </p:sp>
@@ -1229,37 +1223,38 @@
           <a:p>
             <a:pPr lvl="0"/>
             <a:r>
-              <a:rPr lang="en-US"/>
+              <a:rPr lang="en-US" smtClean="0"/>
               <a:t>Click to edit Master text styles</a:t>
             </a:r>
           </a:p>
           <a:p>
             <a:pPr lvl="1"/>
             <a:r>
-              <a:rPr lang="en-US"/>
+              <a:rPr lang="en-US" smtClean="0"/>
               <a:t>Second level</a:t>
             </a:r>
           </a:p>
           <a:p>
             <a:pPr lvl="2"/>
             <a:r>
-              <a:rPr lang="en-US"/>
+              <a:rPr lang="en-US" smtClean="0"/>
               <a:t>Third level</a:t>
             </a:r>
           </a:p>
           <a:p>
             <a:pPr lvl="3"/>
             <a:r>
-              <a:rPr lang="en-US"/>
+              <a:rPr lang="en-US" smtClean="0"/>
               <a:t>Fourth level</a:t>
             </a:r>
           </a:p>
           <a:p>
             <a:pPr lvl="4"/>
             <a:r>
-              <a:rPr lang="en-US"/>
+              <a:rPr lang="en-US" smtClean="0"/>
               <a:t>Fifth level</a:t>
             </a:r>
+            <a:endParaRPr lang="en-US"/>
           </a:p>
         </p:txBody>
       </p:sp>
@@ -1313,37 +1308,38 @@
           <a:p>
             <a:pPr lvl="0"/>
             <a:r>
-              <a:rPr lang="en-US"/>
+              <a:rPr lang="en-US" smtClean="0"/>
               <a:t>Click to edit Master text styles</a:t>
             </a:r>
           </a:p>
           <a:p>
             <a:pPr lvl="1"/>
             <a:r>
-              <a:rPr lang="en-US"/>
+              <a:rPr lang="en-US" smtClean="0"/>
               <a:t>Second level</a:t>
             </a:r>
           </a:p>
           <a:p>
             <a:pPr lvl="2"/>
             <a:r>
-              <a:rPr lang="en-US"/>
+              <a:rPr lang="en-US" smtClean="0"/>
               <a:t>Third level</a:t>
             </a:r>
           </a:p>
           <a:p>
             <a:pPr lvl="3"/>
             <a:r>
-              <a:rPr lang="en-US"/>
+              <a:rPr lang="en-US" smtClean="0"/>
               <a:t>Fourth level</a:t>
             </a:r>
           </a:p>
           <a:p>
             <a:pPr lvl="4"/>
             <a:r>
-              <a:rPr lang="en-US"/>
+              <a:rPr lang="en-US" smtClean="0"/>
               <a:t>Fifth level</a:t>
             </a:r>
+            <a:endParaRPr lang="en-US"/>
           </a:p>
         </p:txBody>
       </p:sp>
@@ -1364,7 +1360,7 @@
           <a:p>
             <a:fld id="{5BCAD085-E8A6-8845-BD4E-CB4CCA059FC4}" type="datetimeFigureOut">
               <a:rPr lang="en-US" smtClean="0"/>
-              <a:t>6/4/2026</a:t>
+              <a:t>1/27/13</a:t>
             </a:fld>
             <a:endParaRPr lang="en-US"/>
           </a:p>
@@ -1462,9 +1458,10 @@
           </a:lstStyle>
           <a:p>
             <a:r>
-              <a:rPr lang="en-US"/>
+              <a:rPr lang="en-US" smtClean="0"/>
               <a:t>Click to edit Master title style</a:t>
             </a:r>
+            <a:endParaRPr lang="en-US"/>
           </a:p>
         </p:txBody>
       </p:sp>
@@ -1527,7 +1524,7 @@
           <a:p>
             <a:pPr lvl="0"/>
             <a:r>
-              <a:rPr lang="en-US"/>
+              <a:rPr lang="en-US" smtClean="0"/>
               <a:t>Click to edit Master text styles</a:t>
             </a:r>
           </a:p>
@@ -1583,37 +1580,38 @@
           <a:p>
             <a:pPr lvl="0"/>
             <a:r>
-              <a:rPr lang="en-US"/>
+              <a:rPr lang="en-US" smtClean="0"/>
               <a:t>Click to edit Master text styles</a:t>
             </a:r>
           </a:p>
           <a:p>
             <a:pPr lvl="1"/>
             <a:r>
-              <a:rPr lang="en-US"/>
+              <a:rPr lang="en-US" smtClean="0"/>
               <a:t>Second level</a:t>
             </a:r>
           </a:p>
           <a:p>
             <a:pPr lvl="2"/>
             <a:r>
-              <a:rPr lang="en-US"/>
+              <a:rPr lang="en-US" smtClean="0"/>
               <a:t>Third level</a:t>
             </a:r>
           </a:p>
           <a:p>
             <a:pPr lvl="3"/>
             <a:r>
-              <a:rPr lang="en-US"/>
+              <a:rPr lang="en-US" smtClean="0"/>
               <a:t>Fourth level</a:t>
             </a:r>
           </a:p>
           <a:p>
             <a:pPr lvl="4"/>
             <a:r>
-              <a:rPr lang="en-US"/>
+              <a:rPr lang="en-US" smtClean="0"/>
               <a:t>Fifth level</a:t>
             </a:r>
+            <a:endParaRPr lang="en-US"/>
           </a:p>
         </p:txBody>
       </p:sp>
@@ -1676,7 +1674,7 @@
           <a:p>
             <a:pPr lvl="0"/>
             <a:r>
-              <a:rPr lang="en-US"/>
+              <a:rPr lang="en-US" smtClean="0"/>
               <a:t>Click to edit Master text styles</a:t>
             </a:r>
           </a:p>
@@ -1732,37 +1730,38 @@
           <a:p>
             <a:pPr lvl="0"/>
             <a:r>
-              <a:rPr lang="en-US"/>
+              <a:rPr lang="en-US" smtClean="0"/>
               <a:t>Click to edit Master text styles</a:t>
             </a:r>
           </a:p>
           <a:p>
             <a:pPr lvl="1"/>
             <a:r>
-              <a:rPr lang="en-US"/>
+              <a:rPr lang="en-US" smtClean="0"/>
               <a:t>Second level</a:t>
             </a:r>
           </a:p>
           <a:p>
             <a:pPr lvl="2"/>
             <a:r>
-              <a:rPr lang="en-US"/>
+              <a:rPr lang="en-US" smtClean="0"/>
               <a:t>Third level</a:t>
             </a:r>
           </a:p>
           <a:p>
             <a:pPr lvl="3"/>
             <a:r>
-              <a:rPr lang="en-US"/>
+              <a:rPr lang="en-US" smtClean="0"/>
               <a:t>Fourth level</a:t>
             </a:r>
           </a:p>
           <a:p>
             <a:pPr lvl="4"/>
             <a:r>
-              <a:rPr lang="en-US"/>
+              <a:rPr lang="en-US" smtClean="0"/>
               <a:t>Fifth level</a:t>
             </a:r>
+            <a:endParaRPr lang="en-US"/>
           </a:p>
         </p:txBody>
       </p:sp>
@@ -1783,7 +1782,7 @@
           <a:p>
             <a:fld id="{5BCAD085-E8A6-8845-BD4E-CB4CCA059FC4}" type="datetimeFigureOut">
               <a:rPr lang="en-US" smtClean="0"/>
-              <a:t>6/4/2026</a:t>
+              <a:t>1/27/13</a:t>
             </a:fld>
             <a:endParaRPr lang="en-US"/>
           </a:p>
@@ -1877,9 +1876,10 @@
           <a:lstStyle/>
           <a:p>
             <a:r>
-              <a:rPr lang="en-US"/>
+              <a:rPr lang="en-US" smtClean="0"/>
               <a:t>Click to edit Master title style</a:t>
             </a:r>
+            <a:endParaRPr lang="en-US"/>
           </a:p>
         </p:txBody>
       </p:sp>
@@ -1900,7 +1900,7 @@
           <a:p>
             <a:fld id="{5BCAD085-E8A6-8845-BD4E-CB4CCA059FC4}" type="datetimeFigureOut">
               <a:rPr lang="en-US" smtClean="0"/>
-              <a:t>6/4/2026</a:t>
+              <a:t>1/27/13</a:t>
             </a:fld>
             <a:endParaRPr lang="en-US"/>
           </a:p>
@@ -1995,7 +1995,7 @@
           <a:p>
             <a:fld id="{5BCAD085-E8A6-8845-BD4E-CB4CCA059FC4}" type="datetimeFigureOut">
               <a:rPr lang="en-US" smtClean="0"/>
-              <a:t>6/4/2026</a:t>
+              <a:t>1/27/13</a:t>
             </a:fld>
             <a:endParaRPr lang="en-US"/>
           </a:p>
@@ -2098,9 +2098,10 @@
           </a:lstStyle>
           <a:p>
             <a:r>
-              <a:rPr lang="en-US"/>
+              <a:rPr lang="en-US" smtClean="0"/>
               <a:t>Click to edit Master title style</a:t>
             </a:r>
+            <a:endParaRPr lang="en-US"/>
           </a:p>
         </p:txBody>
       </p:sp>
@@ -2154,37 +2155,38 @@
           <a:p>
             <a:pPr lvl="0"/>
             <a:r>
-              <a:rPr lang="en-US"/>
+              <a:rPr lang="en-US" smtClean="0"/>
               <a:t>Click to edit Master text styles</a:t>
             </a:r>
           </a:p>
           <a:p>
             <a:pPr lvl="1"/>
             <a:r>
-              <a:rPr lang="en-US"/>
+              <a:rPr lang="en-US" smtClean="0"/>
               <a:t>Second level</a:t>
             </a:r>
           </a:p>
           <a:p>
             <a:pPr lvl="2"/>
             <a:r>
-              <a:rPr lang="en-US"/>
+              <a:rPr lang="en-US" smtClean="0"/>
               <a:t>Third level</a:t>
             </a:r>
           </a:p>
           <a:p>
             <a:pPr lvl="3"/>
             <a:r>
-              <a:rPr lang="en-US"/>
+              <a:rPr lang="en-US" smtClean="0"/>
               <a:t>Fourth level</a:t>
             </a:r>
           </a:p>
           <a:p>
             <a:pPr lvl="4"/>
             <a:r>
-              <a:rPr lang="en-US"/>
+              <a:rPr lang="en-US" smtClean="0"/>
               <a:t>Fifth level</a:t>
             </a:r>
+            <a:endParaRPr lang="en-US"/>
           </a:p>
         </p:txBody>
       </p:sp>
@@ -2247,7 +2249,7 @@
           <a:p>
             <a:pPr lvl="0"/>
             <a:r>
-              <a:rPr lang="en-US"/>
+              <a:rPr lang="en-US" smtClean="0"/>
               <a:t>Click to edit Master text styles</a:t>
             </a:r>
           </a:p>
@@ -2270,7 +2272,7 @@
           <a:p>
             <a:fld id="{5BCAD085-E8A6-8845-BD4E-CB4CCA059FC4}" type="datetimeFigureOut">
               <a:rPr lang="en-US" smtClean="0"/>
-              <a:t>6/4/2026</a:t>
+              <a:t>1/27/13</a:t>
             </a:fld>
             <a:endParaRPr lang="en-US"/>
           </a:p>
@@ -2373,9 +2375,10 @@
           </a:lstStyle>
           <a:p>
             <a:r>
-              <a:rPr lang="en-US"/>
+              <a:rPr lang="en-US" smtClean="0"/>
               <a:t>Click to edit Master title style</a:t>
             </a:r>
+            <a:endParaRPr lang="en-US"/>
           </a:p>
         </p:txBody>
       </p:sp>
@@ -2499,7 +2502,7 @@
           <a:p>
             <a:pPr lvl="0"/>
             <a:r>
-              <a:rPr lang="en-US"/>
+              <a:rPr lang="en-US" smtClean="0"/>
               <a:t>Click to edit Master text styles</a:t>
             </a:r>
           </a:p>
@@ -2522,7 +2525,7 @@
           <a:p>
             <a:fld id="{5BCAD085-E8A6-8845-BD4E-CB4CCA059FC4}" type="datetimeFigureOut">
               <a:rPr lang="en-US" smtClean="0"/>
-              <a:t>6/4/2026</a:t>
+              <a:t>1/27/13</a:t>
             </a:fld>
             <a:endParaRPr lang="en-US"/>
           </a:p>
@@ -2631,9 +2634,10 @@
           <a:lstStyle/>
           <a:p>
             <a:r>
-              <a:rPr lang="en-US"/>
+              <a:rPr lang="en-US" smtClean="0"/>
               <a:t>Click to edit Master title style</a:t>
             </a:r>
+            <a:endParaRPr lang="en-US"/>
           </a:p>
         </p:txBody>
       </p:sp>
@@ -2664,37 +2668,38 @@
           <a:p>
             <a:pPr lvl="0"/>
             <a:r>
-              <a:rPr lang="en-US"/>
+              <a:rPr lang="en-US" smtClean="0"/>
               <a:t>Click to edit Master text styles</a:t>
             </a:r>
           </a:p>
           <a:p>
             <a:pPr lvl="1"/>
             <a:r>
-              <a:rPr lang="en-US"/>
+              <a:rPr lang="en-US" smtClean="0"/>
               <a:t>Second level</a:t>
             </a:r>
           </a:p>
           <a:p>
             <a:pPr lvl="2"/>
             <a:r>
-              <a:rPr lang="en-US"/>
+              <a:rPr lang="en-US" smtClean="0"/>
               <a:t>Third level</a:t>
             </a:r>
           </a:p>
           <a:p>
             <a:pPr lvl="3"/>
             <a:r>
-              <a:rPr lang="en-US"/>
+              <a:rPr lang="en-US" smtClean="0"/>
               <a:t>Fourth level</a:t>
             </a:r>
           </a:p>
           <a:p>
             <a:pPr lvl="4"/>
             <a:r>
-              <a:rPr lang="en-US"/>
+              <a:rPr lang="en-US" smtClean="0"/>
               <a:t>Fifth level</a:t>
             </a:r>
+            <a:endParaRPr lang="en-US"/>
           </a:p>
         </p:txBody>
       </p:sp>
@@ -2733,7 +2738,7 @@
           <a:p>
             <a:fld id="{5BCAD085-E8A6-8845-BD4E-CB4CCA059FC4}" type="datetimeFigureOut">
               <a:rPr lang="en-US" smtClean="0"/>
-              <a:t>6/4/2026</a:t>
+              <a:t>1/27/13</a:t>
             </a:fld>
             <a:endParaRPr lang="en-US"/>
           </a:p>
@@ -3092,7 +3097,7 @@
 </file>
 
 <file path=ppt/slides/slide1.xml><?xml version="1.0" encoding="utf-8"?>
-<p:sld xmlns:a="http://schemas.openxmlformats.org/drawingml/2006/main" xmlns:r="http://schemas.openxmlformats.org/officeDocument/2006/relationships" xmlns:p="http://schemas.openxmlformats.org/presentationml/2006/main">
+<p:sld xmlns:a="http://schemas.openxmlformats.org/drawingml/2006/main" xmlns:p="http://schemas.openxmlformats.org/presentationml/2006/main" xmlns:r="http://schemas.openxmlformats.org/officeDocument/2006/relationships">
   <p:cSld>
     <p:bg>
       <p:bgPr>
@@ -3108,14 +3113,7 @@
         <p:cNvGrpSpPr/>
         <p:nvPr/>
       </p:nvGrpSpPr>
-      <p:grpSpPr>
-        <a:xfrm>
-          <a:off x="0" y="0"/>
-          <a:ext cx="0" cy="0"/>
-          <a:chOff x="0" y="0"/>
-          <a:chExt cx="0" cy="0"/>
-        </a:xfrm>
-      </p:grpSpPr>
+      <p:grpSpPr/>
       <p:sp>
         <p:nvSpPr>
           <p:cNvPr id="2" name="Rectangle 1"/>
@@ -3157,7 +3155,6 @@
           <a:lstStyle/>
           <a:p>
             <a:pPr algn="ctr"/>
-            <a:endParaRPr/>
           </a:p>
         </p:txBody>
       </p:sp>
@@ -3178,7 +3175,7 @@
           <a:noFill/>
         </p:spPr>
         <p:txBody>
-          <a:bodyPr wrap="square" lIns="0" tIns="0" rIns="0" bIns="0" anchor="t">
+          <a:bodyPr wrap="square" anchor="t" lIns="0" rIns="0" tIns="0" bIns="0">
             <a:spAutoFit/>
           </a:bodyPr>
           <a:lstStyle/>
@@ -3244,7 +3241,7 @@
           <a:noFill/>
         </p:spPr>
         <p:txBody>
-          <a:bodyPr wrap="square" lIns="0" tIns="0" rIns="0" bIns="0" anchor="t">
+          <a:bodyPr wrap="square" anchor="t" lIns="0" rIns="0" tIns="0" bIns="0">
             <a:spAutoFit/>
           </a:bodyPr>
           <a:lstStyle/>
@@ -3279,7 +3276,7 @@
 </file>
 
 <file path=ppt/slides/slide10.xml><?xml version="1.0" encoding="utf-8"?>
-<p:sld xmlns:a="http://schemas.openxmlformats.org/drawingml/2006/main" xmlns:r="http://schemas.openxmlformats.org/officeDocument/2006/relationships" xmlns:p="http://schemas.openxmlformats.org/presentationml/2006/main">
+<p:sld xmlns:a="http://schemas.openxmlformats.org/drawingml/2006/main" xmlns:p="http://schemas.openxmlformats.org/presentationml/2006/main" xmlns:r="http://schemas.openxmlformats.org/officeDocument/2006/relationships">
   <p:cSld>
     <p:bg>
       <p:bgPr>
@@ -3295,14 +3292,7 @@
         <p:cNvGrpSpPr/>
         <p:nvPr/>
       </p:nvGrpSpPr>
-      <p:grpSpPr>
-        <a:xfrm>
-          <a:off x="0" y="0"/>
-          <a:ext cx="0" cy="0"/>
-          <a:chOff x="0" y="0"/>
-          <a:chExt cx="0" cy="0"/>
-        </a:xfrm>
-      </p:grpSpPr>
+      <p:grpSpPr/>
       <p:sp>
         <p:nvSpPr>
           <p:cNvPr id="2" name="Rectangle 1"/>
@@ -3344,7 +3334,6 @@
           <a:lstStyle/>
           <a:p>
             <a:pPr algn="ctr"/>
-            <a:endParaRPr/>
           </a:p>
         </p:txBody>
       </p:sp>
@@ -3365,7 +3354,7 @@
           <a:noFill/>
         </p:spPr>
         <p:txBody>
-          <a:bodyPr wrap="square" lIns="0" tIns="0" rIns="0" bIns="0" anchor="t">
+          <a:bodyPr wrap="square" anchor="t" lIns="0" rIns="0" tIns="0" bIns="0">
             <a:spAutoFit/>
           </a:bodyPr>
           <a:lstStyle/>
@@ -3399,7 +3388,7 @@
           <a:noFill/>
         </p:spPr>
         <p:txBody>
-          <a:bodyPr wrap="square" lIns="0" tIns="0" rIns="0" bIns="0" anchor="t">
+          <a:bodyPr wrap="square" anchor="t" lIns="0" rIns="0" tIns="0" bIns="0">
             <a:spAutoFit/>
           </a:bodyPr>
           <a:lstStyle/>
@@ -3489,7 +3478,6 @@
           <a:lstStyle/>
           <a:p>
             <a:pPr algn="ctr"/>
-            <a:endParaRPr/>
           </a:p>
         </p:txBody>
       </p:sp>
@@ -3510,7 +3498,7 @@
           <a:noFill/>
         </p:spPr>
         <p:txBody>
-          <a:bodyPr wrap="square" lIns="0" tIns="0" rIns="0" bIns="0" anchor="t">
+          <a:bodyPr wrap="square" anchor="t" lIns="0" rIns="0" tIns="0" bIns="0">
             <a:spAutoFit/>
           </a:bodyPr>
           <a:lstStyle/>
@@ -3553,13 +3541,21 @@
           <a:noFill/>
         </p:spPr>
         <p:txBody>
-          <a:bodyPr wrap="square" lIns="0" tIns="0" rIns="0" bIns="0" anchor="t">
+          <a:bodyPr wrap="square" anchor="t" lIns="0" rIns="0" tIns="0" bIns="0">
             <a:spAutoFit/>
           </a:bodyPr>
           <a:lstStyle/>
           <a:p>
             <a:pPr algn="r"/>
-            <a:endParaRPr/>
+            <a:r>
+              <a:rPr sz="1100" b="0" i="0">
+                <a:solidFill>
+                  <a:srgbClr val="7A7A7A"/>
+                </a:solidFill>
+                <a:latin typeface="Roboto"/>
+              </a:rPr>
+              <a:t/>
+            </a:r>
           </a:p>
         </p:txBody>
       </p:sp>
@@ -3572,7 +3568,7 @@
 </file>
 
 <file path=ppt/slides/slide11.xml><?xml version="1.0" encoding="utf-8"?>
-<p:sld xmlns:a="http://schemas.openxmlformats.org/drawingml/2006/main" xmlns:r="http://schemas.openxmlformats.org/officeDocument/2006/relationships" xmlns:p="http://schemas.openxmlformats.org/presentationml/2006/main">
+<p:sld xmlns:a="http://schemas.openxmlformats.org/drawingml/2006/main" xmlns:p="http://schemas.openxmlformats.org/presentationml/2006/main" xmlns:r="http://schemas.openxmlformats.org/officeDocument/2006/relationships">
   <p:cSld>
     <p:bg>
       <p:bgPr>
@@ -3588,14 +3584,7 @@
         <p:cNvGrpSpPr/>
         <p:nvPr/>
       </p:nvGrpSpPr>
-      <p:grpSpPr>
-        <a:xfrm>
-          <a:off x="0" y="0"/>
-          <a:ext cx="0" cy="0"/>
-          <a:chOff x="0" y="0"/>
-          <a:chExt cx="0" cy="0"/>
-        </a:xfrm>
-      </p:grpSpPr>
+      <p:grpSpPr/>
       <p:sp>
         <p:nvSpPr>
           <p:cNvPr id="2" name="TextBox 1"/>
@@ -3613,7 +3602,7 @@
           <a:noFill/>
         </p:spPr>
         <p:txBody>
-          <a:bodyPr wrap="square" lIns="0" tIns="0" rIns="0" bIns="0" anchor="t">
+          <a:bodyPr wrap="square" anchor="t" lIns="0" rIns="0" tIns="0" bIns="0">
             <a:spAutoFit/>
           </a:bodyPr>
           <a:lstStyle/>
@@ -3687,7 +3676,6 @@
           <a:lstStyle/>
           <a:p>
             <a:pPr algn="ctr"/>
-            <a:endParaRPr/>
           </a:p>
         </p:txBody>
       </p:sp>
@@ -3708,7 +3696,7 @@
           <a:noFill/>
         </p:spPr>
         <p:txBody>
-          <a:bodyPr wrap="square" lIns="0" tIns="0" rIns="0" bIns="0" anchor="t">
+          <a:bodyPr wrap="square" anchor="ctr" lIns="0" rIns="0" tIns="0" bIns="0">
             <a:spAutoFit/>
           </a:bodyPr>
           <a:lstStyle/>
@@ -3725,7 +3713,7 @@
               </a:spcAft>
             </a:pPr>
             <a:r>
-              <a:rPr sz="1800" b="1" i="0">
+              <a:rPr sz="2400" b="1" i="0">
                 <a:solidFill>
                   <a:srgbClr val="EDAB0C"/>
                 </a:solidFill>
@@ -3734,7 +3722,7 @@
               <a:t>■  </a:t>
             </a:r>
             <a:r>
-              <a:rPr sz="1800" b="0" i="0">
+              <a:rPr sz="2400" b="0" i="0">
                 <a:solidFill>
                   <a:srgbClr val="2A2929"/>
                 </a:solidFill>
@@ -3756,13 +3744,22 @@
               </a:spcAft>
             </a:pPr>
             <a:r>
-              <a:rPr sz="1800" b="1" i="0">
+              <a:rPr sz="2400" b="1" i="0">
                 <a:solidFill>
                   <a:srgbClr val="27B5CE"/>
                 </a:solidFill>
                 <a:latin typeface="Roboto"/>
               </a:rPr>
-              <a:t>■  Ground every answer in your own HA work: cite your design and your simulation findings.</a:t>
+              <a:t>■  </a:t>
+            </a:r>
+            <a:r>
+              <a:rPr sz="2400" b="1" i="0">
+                <a:solidFill>
+                  <a:srgbClr val="27B5CE"/>
+                </a:solidFill>
+                <a:latin typeface="Roboto"/>
+              </a:rPr>
+              <a:t>Ground every answer in your own HA work: cite your design and your simulation findings.</a:t>
             </a:r>
           </a:p>
           <a:p>
@@ -3778,7 +3775,7 @@
               </a:spcAft>
             </a:pPr>
             <a:r>
-              <a:rPr sz="1800" b="1" i="0">
+              <a:rPr sz="2400" b="1" i="0">
                 <a:solidFill>
                   <a:srgbClr val="EDAB0C"/>
                 </a:solidFill>
@@ -3787,7 +3784,7 @@
               <a:t>■  </a:t>
             </a:r>
             <a:r>
-              <a:rPr sz="1800" b="0" i="0">
+              <a:rPr sz="2400" b="0" i="0">
                 <a:solidFill>
                   <a:srgbClr val="2A2929"/>
                 </a:solidFill>
@@ -3839,7 +3836,6 @@
           <a:lstStyle/>
           <a:p>
             <a:pPr algn="ctr"/>
-            <a:endParaRPr/>
           </a:p>
         </p:txBody>
       </p:sp>
@@ -3860,7 +3856,7 @@
           <a:noFill/>
         </p:spPr>
         <p:txBody>
-          <a:bodyPr wrap="square" lIns="0" tIns="0" rIns="0" bIns="0" anchor="t">
+          <a:bodyPr wrap="square" anchor="t" lIns="0" rIns="0" tIns="0" bIns="0">
             <a:spAutoFit/>
           </a:bodyPr>
           <a:lstStyle/>
@@ -3903,7 +3899,7 @@
           <a:noFill/>
         </p:spPr>
         <p:txBody>
-          <a:bodyPr wrap="square" lIns="0" tIns="0" rIns="0" bIns="0" anchor="t">
+          <a:bodyPr wrap="square" anchor="t" lIns="0" rIns="0" tIns="0" bIns="0">
             <a:spAutoFit/>
           </a:bodyPr>
           <a:lstStyle/>
@@ -3930,7 +3926,7 @@
 </file>
 
 <file path=ppt/slides/slide12.xml><?xml version="1.0" encoding="utf-8"?>
-<p:sld xmlns:a="http://schemas.openxmlformats.org/drawingml/2006/main" xmlns:r="http://schemas.openxmlformats.org/officeDocument/2006/relationships" xmlns:p="http://schemas.openxmlformats.org/presentationml/2006/main">
+<p:sld xmlns:a="http://schemas.openxmlformats.org/drawingml/2006/main" xmlns:p="http://schemas.openxmlformats.org/presentationml/2006/main" xmlns:r="http://schemas.openxmlformats.org/officeDocument/2006/relationships">
   <p:cSld>
     <p:bg>
       <p:bgPr>
@@ -3946,14 +3942,7 @@
         <p:cNvGrpSpPr/>
         <p:nvPr/>
       </p:nvGrpSpPr>
-      <p:grpSpPr>
-        <a:xfrm>
-          <a:off x="0" y="0"/>
-          <a:ext cx="0" cy="0"/>
-          <a:chOff x="0" y="0"/>
-          <a:chExt cx="0" cy="0"/>
-        </a:xfrm>
-      </p:grpSpPr>
+      <p:grpSpPr/>
       <p:sp>
         <p:nvSpPr>
           <p:cNvPr id="2" name="Rectangle 1"/>
@@ -3995,7 +3984,6 @@
           <a:lstStyle/>
           <a:p>
             <a:pPr algn="ctr"/>
-            <a:endParaRPr/>
           </a:p>
         </p:txBody>
       </p:sp>
@@ -4069,7 +4057,7 @@
           <a:noFill/>
         </p:spPr>
         <p:txBody>
-          <a:bodyPr wrap="square" lIns="0" tIns="0" rIns="0" bIns="0" anchor="ctr">
+          <a:bodyPr wrap="square" anchor="ctr" lIns="0" rIns="0" tIns="0" bIns="0">
             <a:spAutoFit/>
           </a:bodyPr>
           <a:lstStyle/>
@@ -4103,7 +4091,7 @@
           <a:noFill/>
         </p:spPr>
         <p:txBody>
-          <a:bodyPr wrap="square" lIns="0" tIns="0" rIns="0" bIns="0" anchor="t">
+          <a:bodyPr wrap="square" anchor="t" lIns="0" rIns="0" tIns="0" bIns="0">
             <a:spAutoFit/>
           </a:bodyPr>
           <a:lstStyle/>
@@ -4219,7 +4207,16 @@
                 </a:solidFill>
                 <a:latin typeface="Roboto"/>
               </a:rPr>
-              <a:t>■  Specific to your system — not generic best practice.</a:t>
+              <a:t>■  </a:t>
+            </a:r>
+            <a:r>
+              <a:rPr sz="1700" b="1" i="0">
+                <a:solidFill>
+                  <a:srgbClr val="27B5CE"/>
+                </a:solidFill>
+                <a:latin typeface="Roboto"/>
+              </a:rPr>
+              <a:t>Specific to your system — not generic best practice.</a:t>
             </a:r>
           </a:p>
         </p:txBody>
@@ -4267,7 +4264,6 @@
           <a:lstStyle/>
           <a:p>
             <a:pPr algn="ctr"/>
-            <a:endParaRPr/>
           </a:p>
         </p:txBody>
       </p:sp>
@@ -4288,7 +4284,7 @@
           <a:noFill/>
         </p:spPr>
         <p:txBody>
-          <a:bodyPr wrap="square" lIns="0" tIns="0" rIns="0" bIns="0" anchor="ctr">
+          <a:bodyPr wrap="square" anchor="ctr" lIns="0" rIns="0" tIns="0" bIns="0">
             <a:spAutoFit/>
           </a:bodyPr>
           <a:lstStyle/>
@@ -4346,7 +4342,6 @@
           <a:lstStyle/>
           <a:p>
             <a:pPr algn="ctr"/>
-            <a:endParaRPr/>
           </a:p>
         </p:txBody>
       </p:sp>
@@ -4367,7 +4362,7 @@
           <a:noFill/>
         </p:spPr>
         <p:txBody>
-          <a:bodyPr wrap="square" lIns="0" tIns="0" rIns="0" bIns="0" anchor="t">
+          <a:bodyPr wrap="square" anchor="t" lIns="0" rIns="0" tIns="0" bIns="0">
             <a:spAutoFit/>
           </a:bodyPr>
           <a:lstStyle/>
@@ -4410,7 +4405,7 @@
           <a:noFill/>
         </p:spPr>
         <p:txBody>
-          <a:bodyPr wrap="square" lIns="0" tIns="0" rIns="0" bIns="0" anchor="t">
+          <a:bodyPr wrap="square" anchor="t" lIns="0" rIns="0" tIns="0" bIns="0">
             <a:spAutoFit/>
           </a:bodyPr>
           <a:lstStyle/>
@@ -4437,7 +4432,7 @@
 </file>
 
 <file path=ppt/slides/slide13.xml><?xml version="1.0" encoding="utf-8"?>
-<p:sld xmlns:a="http://schemas.openxmlformats.org/drawingml/2006/main" xmlns:r="http://schemas.openxmlformats.org/officeDocument/2006/relationships" xmlns:p="http://schemas.openxmlformats.org/presentationml/2006/main">
+<p:sld xmlns:a="http://schemas.openxmlformats.org/drawingml/2006/main" xmlns:p="http://schemas.openxmlformats.org/presentationml/2006/main" xmlns:r="http://schemas.openxmlformats.org/officeDocument/2006/relationships">
   <p:cSld>
     <p:bg>
       <p:bgPr>
@@ -4453,14 +4448,7 @@
         <p:cNvGrpSpPr/>
         <p:nvPr/>
       </p:nvGrpSpPr>
-      <p:grpSpPr>
-        <a:xfrm>
-          <a:off x="0" y="0"/>
-          <a:ext cx="0" cy="0"/>
-          <a:chOff x="0" y="0"/>
-          <a:chExt cx="0" cy="0"/>
-        </a:xfrm>
-      </p:grpSpPr>
+      <p:grpSpPr/>
       <p:sp>
         <p:nvSpPr>
           <p:cNvPr id="2" name="Rectangle 1"/>
@@ -4502,7 +4490,6 @@
           <a:lstStyle/>
           <a:p>
             <a:pPr algn="ctr"/>
-            <a:endParaRPr/>
           </a:p>
         </p:txBody>
       </p:sp>
@@ -4523,7 +4510,7 @@
           <a:noFill/>
         </p:spPr>
         <p:txBody>
-          <a:bodyPr wrap="square" lIns="0" tIns="0" rIns="0" bIns="0" anchor="t">
+          <a:bodyPr wrap="square" anchor="t" lIns="0" rIns="0" tIns="0" bIns="0">
             <a:spAutoFit/>
           </a:bodyPr>
           <a:lstStyle/>
@@ -4557,7 +4544,7 @@
           <a:noFill/>
         </p:spPr>
         <p:txBody>
-          <a:bodyPr wrap="square" lIns="0" tIns="0" rIns="0" bIns="0" anchor="t">
+          <a:bodyPr wrap="square" anchor="t" lIns="0" rIns="0" tIns="0" bIns="0">
             <a:spAutoFit/>
           </a:bodyPr>
           <a:lstStyle/>
@@ -4647,7 +4634,6 @@
           <a:lstStyle/>
           <a:p>
             <a:pPr algn="ctr"/>
-            <a:endParaRPr/>
           </a:p>
         </p:txBody>
       </p:sp>
@@ -4668,7 +4654,7 @@
           <a:noFill/>
         </p:spPr>
         <p:txBody>
-          <a:bodyPr wrap="square" lIns="0" tIns="0" rIns="0" bIns="0" anchor="t">
+          <a:bodyPr wrap="square" anchor="t" lIns="0" rIns="0" tIns="0" bIns="0">
             <a:spAutoFit/>
           </a:bodyPr>
           <a:lstStyle/>
@@ -4711,13 +4697,21 @@
           <a:noFill/>
         </p:spPr>
         <p:txBody>
-          <a:bodyPr wrap="square" lIns="0" tIns="0" rIns="0" bIns="0" anchor="t">
+          <a:bodyPr wrap="square" anchor="t" lIns="0" rIns="0" tIns="0" bIns="0">
             <a:spAutoFit/>
           </a:bodyPr>
           <a:lstStyle/>
           <a:p>
             <a:pPr algn="r"/>
-            <a:endParaRPr/>
+            <a:r>
+              <a:rPr sz="1100" b="0" i="0">
+                <a:solidFill>
+                  <a:srgbClr val="7A7A7A"/>
+                </a:solidFill>
+                <a:latin typeface="Roboto"/>
+              </a:rPr>
+              <a:t/>
+            </a:r>
           </a:p>
         </p:txBody>
       </p:sp>
@@ -4730,7 +4724,7 @@
 </file>
 
 <file path=ppt/slides/slide14.xml><?xml version="1.0" encoding="utf-8"?>
-<p:sld xmlns:a="http://schemas.openxmlformats.org/drawingml/2006/main" xmlns:r="http://schemas.openxmlformats.org/officeDocument/2006/relationships" xmlns:p="http://schemas.openxmlformats.org/presentationml/2006/main">
+<p:sld xmlns:a="http://schemas.openxmlformats.org/drawingml/2006/main" xmlns:p="http://schemas.openxmlformats.org/presentationml/2006/main" xmlns:r="http://schemas.openxmlformats.org/officeDocument/2006/relationships">
   <p:cSld>
     <p:bg>
       <p:bgPr>
@@ -4746,14 +4740,7 @@
         <p:cNvGrpSpPr/>
         <p:nvPr/>
       </p:nvGrpSpPr>
-      <p:grpSpPr>
-        <a:xfrm>
-          <a:off x="0" y="0"/>
-          <a:ext cx="0" cy="0"/>
-          <a:chOff x="0" y="0"/>
-          <a:chExt cx="0" cy="0"/>
-        </a:xfrm>
-      </p:grpSpPr>
+      <p:grpSpPr/>
       <p:sp>
         <p:nvSpPr>
           <p:cNvPr id="2" name="TextBox 1"/>
@@ -4771,7 +4758,7 @@
           <a:noFill/>
         </p:spPr>
         <p:txBody>
-          <a:bodyPr wrap="square" lIns="0" tIns="0" rIns="0" bIns="0" anchor="t">
+          <a:bodyPr wrap="square" anchor="t" lIns="0" rIns="0" tIns="0" bIns="0">
             <a:spAutoFit/>
           </a:bodyPr>
           <a:lstStyle/>
@@ -4845,7 +4832,6 @@
           <a:lstStyle/>
           <a:p>
             <a:pPr algn="ctr"/>
-            <a:endParaRPr/>
           </a:p>
         </p:txBody>
       </p:sp>
@@ -4866,7 +4852,7 @@
           <a:noFill/>
         </p:spPr>
         <p:txBody>
-          <a:bodyPr wrap="square" lIns="0" tIns="0" rIns="0" bIns="0" anchor="t">
+          <a:bodyPr wrap="square" anchor="ctr" lIns="0" rIns="0" tIns="0" bIns="0">
             <a:spAutoFit/>
           </a:bodyPr>
           <a:lstStyle/>
@@ -4883,7 +4869,7 @@
               </a:spcAft>
             </a:pPr>
             <a:r>
-              <a:rPr sz="1800" b="1" i="0">
+              <a:rPr sz="2400" b="1" i="0">
                 <a:solidFill>
                   <a:srgbClr val="EDAB0C"/>
                 </a:solidFill>
@@ -4892,7 +4878,7 @@
               <a:t>■  </a:t>
             </a:r>
             <a:r>
-              <a:rPr sz="1800" b="0" i="0">
+              <a:rPr sz="2400" b="0" i="0">
                 <a:solidFill>
                   <a:srgbClr val="2A2929"/>
                 </a:solidFill>
@@ -4914,7 +4900,7 @@
               </a:spcAft>
             </a:pPr>
             <a:r>
-              <a:rPr sz="1800" b="1" i="0">
+              <a:rPr sz="2400" b="1" i="0">
                 <a:solidFill>
                   <a:srgbClr val="EDAB0C"/>
                 </a:solidFill>
@@ -4923,7 +4909,7 @@
               <a:t>■  </a:t>
             </a:r>
             <a:r>
-              <a:rPr sz="1800" b="0" i="0">
+              <a:rPr sz="2400" b="0" i="0">
                 <a:solidFill>
                   <a:srgbClr val="2A2929"/>
                 </a:solidFill>
@@ -4945,13 +4931,22 @@
               </a:spcAft>
             </a:pPr>
             <a:r>
-              <a:rPr sz="1800" b="1" i="0">
+              <a:rPr sz="2400" b="1" i="0">
                 <a:solidFill>
                   <a:srgbClr val="205F61"/>
                 </a:solidFill>
                 <a:latin typeface="Roboto"/>
               </a:rPr>
-              <a:t>■  Then obtain final sign-off from the project sponsor (or delegated authority) — generally the last step in closing a project.</a:t>
+              <a:t>■  </a:t>
+            </a:r>
+            <a:r>
+              <a:rPr sz="2400" b="1" i="0">
+                <a:solidFill>
+                  <a:srgbClr val="205F61"/>
+                </a:solidFill>
+                <a:latin typeface="Roboto"/>
+              </a:rPr>
+              <a:t>Then obtain final sign-off from the project sponsor (or delegated authority) — generally the last step in closing a project.</a:t>
             </a:r>
           </a:p>
         </p:txBody>
@@ -4997,7 +4992,6 @@
           <a:lstStyle/>
           <a:p>
             <a:pPr algn="ctr"/>
-            <a:endParaRPr/>
           </a:p>
         </p:txBody>
       </p:sp>
@@ -5018,7 +5012,7 @@
           <a:noFill/>
         </p:spPr>
         <p:txBody>
-          <a:bodyPr wrap="square" lIns="0" tIns="0" rIns="0" bIns="0" anchor="t">
+          <a:bodyPr wrap="square" anchor="t" lIns="0" rIns="0" tIns="0" bIns="0">
             <a:spAutoFit/>
           </a:bodyPr>
           <a:lstStyle/>
@@ -5061,7 +5055,7 @@
           <a:noFill/>
         </p:spPr>
         <p:txBody>
-          <a:bodyPr wrap="square" lIns="0" tIns="0" rIns="0" bIns="0" anchor="t">
+          <a:bodyPr wrap="square" anchor="t" lIns="0" rIns="0" tIns="0" bIns="0">
             <a:spAutoFit/>
           </a:bodyPr>
           <a:lstStyle/>
@@ -5088,7 +5082,7 @@
 </file>
 
 <file path=ppt/slides/slide15.xml><?xml version="1.0" encoding="utf-8"?>
-<p:sld xmlns:a="http://schemas.openxmlformats.org/drawingml/2006/main" xmlns:r="http://schemas.openxmlformats.org/officeDocument/2006/relationships" xmlns:p="http://schemas.openxmlformats.org/presentationml/2006/main">
+<p:sld xmlns:a="http://schemas.openxmlformats.org/drawingml/2006/main" xmlns:p="http://schemas.openxmlformats.org/presentationml/2006/main" xmlns:r="http://schemas.openxmlformats.org/officeDocument/2006/relationships">
   <p:cSld>
     <p:bg>
       <p:bgPr>
@@ -5104,14 +5098,7 @@
         <p:cNvGrpSpPr/>
         <p:nvPr/>
       </p:nvGrpSpPr>
-      <p:grpSpPr>
-        <a:xfrm>
-          <a:off x="0" y="0"/>
-          <a:ext cx="0" cy="0"/>
-          <a:chOff x="0" y="0"/>
-          <a:chExt cx="0" cy="0"/>
-        </a:xfrm>
-      </p:grpSpPr>
+      <p:grpSpPr/>
       <p:sp>
         <p:nvSpPr>
           <p:cNvPr id="2" name="TextBox 1"/>
@@ -5129,7 +5116,7 @@
           <a:noFill/>
         </p:spPr>
         <p:txBody>
-          <a:bodyPr wrap="square" lIns="0" tIns="0" rIns="0" bIns="0" anchor="t">
+          <a:bodyPr wrap="square" anchor="t" lIns="0" rIns="0" tIns="0" bIns="0">
             <a:spAutoFit/>
           </a:bodyPr>
           <a:lstStyle/>
@@ -5203,7 +5190,6 @@
           <a:lstStyle/>
           <a:p>
             <a:pPr algn="ctr"/>
-            <a:endParaRPr/>
           </a:p>
         </p:txBody>
       </p:sp>
@@ -5224,7 +5210,7 @@
           <a:noFill/>
         </p:spPr>
         <p:txBody>
-          <a:bodyPr wrap="square" lIns="0" tIns="0" rIns="0" bIns="0" anchor="t">
+          <a:bodyPr wrap="square" anchor="ctr" lIns="0" rIns="0" tIns="0" bIns="0">
             <a:spAutoFit/>
           </a:bodyPr>
           <a:lstStyle/>
@@ -5241,7 +5227,7 @@
               </a:spcAft>
             </a:pPr>
             <a:r>
-              <a:rPr sz="1800" b="1" i="0">
+              <a:rPr sz="2400" b="1" i="0">
                 <a:solidFill>
                   <a:srgbClr val="EDAB0C"/>
                 </a:solidFill>
@@ -5250,7 +5236,7 @@
               <a:t>■  </a:t>
             </a:r>
             <a:r>
-              <a:rPr sz="1800" b="0" i="0">
+              <a:rPr sz="2400" b="0" i="0">
                 <a:solidFill>
                   <a:srgbClr val="2A2929"/>
                 </a:solidFill>
@@ -5272,13 +5258,22 @@
               </a:spcAft>
             </a:pPr>
             <a:r>
-              <a:rPr sz="1800" b="1" i="0">
+              <a:rPr sz="2400" b="1" i="0">
                 <a:solidFill>
                   <a:srgbClr val="205F61"/>
                 </a:solidFill>
                 <a:latin typeface="Roboto"/>
               </a:rPr>
-              <a:t>■  A reflection is a review, not a summary of what you did.</a:t>
+              <a:t>■  </a:t>
+            </a:r>
+            <a:r>
+              <a:rPr sz="2400" b="1" i="0">
+                <a:solidFill>
+                  <a:srgbClr val="205F61"/>
+                </a:solidFill>
+                <a:latin typeface="Roboto"/>
+              </a:rPr>
+              <a:t>A reflection is a review, not a summary of what you did.</a:t>
             </a:r>
           </a:p>
           <a:p>
@@ -5294,7 +5289,7 @@
               </a:spcAft>
             </a:pPr>
             <a:r>
-              <a:rPr sz="1800" b="1" i="0">
+              <a:rPr sz="2400" b="1" i="0">
                 <a:solidFill>
                   <a:srgbClr val="EDAB0C"/>
                 </a:solidFill>
@@ -5303,7 +5298,7 @@
               <a:t>■  </a:t>
             </a:r>
             <a:r>
-              <a:rPr sz="1800" b="0" i="0">
+              <a:rPr sz="2400" b="0" i="0">
                 <a:solidFill>
                   <a:srgbClr val="2A2929"/>
                 </a:solidFill>
@@ -5355,7 +5350,6 @@
           <a:lstStyle/>
           <a:p>
             <a:pPr algn="ctr"/>
-            <a:endParaRPr/>
           </a:p>
         </p:txBody>
       </p:sp>
@@ -5376,7 +5370,7 @@
           <a:noFill/>
         </p:spPr>
         <p:txBody>
-          <a:bodyPr wrap="square" lIns="0" tIns="0" rIns="0" bIns="0" anchor="t">
+          <a:bodyPr wrap="square" anchor="t" lIns="0" rIns="0" tIns="0" bIns="0">
             <a:spAutoFit/>
           </a:bodyPr>
           <a:lstStyle/>
@@ -5419,7 +5413,7 @@
           <a:noFill/>
         </p:spPr>
         <p:txBody>
-          <a:bodyPr wrap="square" lIns="0" tIns="0" rIns="0" bIns="0" anchor="t">
+          <a:bodyPr wrap="square" anchor="t" lIns="0" rIns="0" tIns="0" bIns="0">
             <a:spAutoFit/>
           </a:bodyPr>
           <a:lstStyle/>
@@ -5446,7 +5440,7 @@
 </file>
 
 <file path=ppt/slides/slide16.xml><?xml version="1.0" encoding="utf-8"?>
-<p:sld xmlns:a="http://schemas.openxmlformats.org/drawingml/2006/main" xmlns:r="http://schemas.openxmlformats.org/officeDocument/2006/relationships" xmlns:p="http://schemas.openxmlformats.org/presentationml/2006/main">
+<p:sld xmlns:a="http://schemas.openxmlformats.org/drawingml/2006/main" xmlns:p="http://schemas.openxmlformats.org/presentationml/2006/main" xmlns:r="http://schemas.openxmlformats.org/officeDocument/2006/relationships">
   <p:cSld>
     <p:bg>
       <p:bgPr>
@@ -5462,14 +5456,7 @@
         <p:cNvGrpSpPr/>
         <p:nvPr/>
       </p:nvGrpSpPr>
-      <p:grpSpPr>
-        <a:xfrm>
-          <a:off x="0" y="0"/>
-          <a:ext cx="0" cy="0"/>
-          <a:chOff x="0" y="0"/>
-          <a:chExt cx="0" cy="0"/>
-        </a:xfrm>
-      </p:grpSpPr>
+      <p:grpSpPr/>
       <p:sp>
         <p:nvSpPr>
           <p:cNvPr id="2" name="Rectangle 1"/>
@@ -5511,7 +5498,6 @@
           <a:lstStyle/>
           <a:p>
             <a:pPr algn="ctr"/>
-            <a:endParaRPr/>
           </a:p>
         </p:txBody>
       </p:sp>
@@ -5585,7 +5571,7 @@
           <a:noFill/>
         </p:spPr>
         <p:txBody>
-          <a:bodyPr wrap="square" lIns="0" tIns="0" rIns="0" bIns="0" anchor="ctr">
+          <a:bodyPr wrap="square" anchor="ctr" lIns="0" rIns="0" tIns="0" bIns="0">
             <a:spAutoFit/>
           </a:bodyPr>
           <a:lstStyle/>
@@ -5619,7 +5605,7 @@
           <a:noFill/>
         </p:spPr>
         <p:txBody>
-          <a:bodyPr wrap="square" lIns="0" tIns="0" rIns="0" bIns="0" anchor="t">
+          <a:bodyPr wrap="square" anchor="t" lIns="0" rIns="0" tIns="0" bIns="0">
             <a:spAutoFit/>
           </a:bodyPr>
           <a:lstStyle/>
@@ -5792,7 +5778,6 @@
           <a:lstStyle/>
           <a:p>
             <a:pPr algn="ctr"/>
-            <a:endParaRPr/>
           </a:p>
         </p:txBody>
       </p:sp>
@@ -5813,7 +5798,7 @@
           <a:noFill/>
         </p:spPr>
         <p:txBody>
-          <a:bodyPr wrap="square" lIns="0" tIns="0" rIns="0" bIns="0" anchor="ctr">
+          <a:bodyPr wrap="square" anchor="ctr" lIns="0" rIns="0" tIns="0" bIns="0">
             <a:spAutoFit/>
           </a:bodyPr>
           <a:lstStyle/>
@@ -5871,7 +5856,6 @@
           <a:lstStyle/>
           <a:p>
             <a:pPr algn="ctr"/>
-            <a:endParaRPr/>
           </a:p>
         </p:txBody>
       </p:sp>
@@ -5892,7 +5876,7 @@
           <a:noFill/>
         </p:spPr>
         <p:txBody>
-          <a:bodyPr wrap="square" lIns="0" tIns="0" rIns="0" bIns="0" anchor="t">
+          <a:bodyPr wrap="square" anchor="t" lIns="0" rIns="0" tIns="0" bIns="0">
             <a:spAutoFit/>
           </a:bodyPr>
           <a:lstStyle/>
@@ -5935,7 +5919,7 @@
           <a:noFill/>
         </p:spPr>
         <p:txBody>
-          <a:bodyPr wrap="square" lIns="0" tIns="0" rIns="0" bIns="0" anchor="t">
+          <a:bodyPr wrap="square" anchor="t" lIns="0" rIns="0" tIns="0" bIns="0">
             <a:spAutoFit/>
           </a:bodyPr>
           <a:lstStyle/>
@@ -5962,7 +5946,7 @@
 </file>
 
 <file path=ppt/slides/slide17.xml><?xml version="1.0" encoding="utf-8"?>
-<p:sld xmlns:a="http://schemas.openxmlformats.org/drawingml/2006/main" xmlns:r="http://schemas.openxmlformats.org/officeDocument/2006/relationships" xmlns:p="http://schemas.openxmlformats.org/presentationml/2006/main">
+<p:sld xmlns:a="http://schemas.openxmlformats.org/drawingml/2006/main" xmlns:p="http://schemas.openxmlformats.org/presentationml/2006/main" xmlns:r="http://schemas.openxmlformats.org/officeDocument/2006/relationships">
   <p:cSld>
     <p:bg>
       <p:bgPr>
@@ -5978,14 +5962,7 @@
         <p:cNvGrpSpPr/>
         <p:nvPr/>
       </p:nvGrpSpPr>
-      <p:grpSpPr>
-        <a:xfrm>
-          <a:off x="0" y="0"/>
-          <a:ext cx="0" cy="0"/>
-          <a:chOff x="0" y="0"/>
-          <a:chExt cx="0" cy="0"/>
-        </a:xfrm>
-      </p:grpSpPr>
+      <p:grpSpPr/>
       <p:sp>
         <p:nvSpPr>
           <p:cNvPr id="2" name="TextBox 1"/>
@@ -6003,7 +5980,7 @@
           <a:noFill/>
         </p:spPr>
         <p:txBody>
-          <a:bodyPr wrap="square" lIns="0" tIns="0" rIns="0" bIns="0" anchor="t">
+          <a:bodyPr wrap="square" anchor="t" lIns="0" rIns="0" tIns="0" bIns="0">
             <a:spAutoFit/>
           </a:bodyPr>
           <a:lstStyle/>
@@ -6077,7 +6054,6 @@
           <a:lstStyle/>
           <a:p>
             <a:pPr algn="ctr"/>
-            <a:endParaRPr/>
           </a:p>
         </p:txBody>
       </p:sp>
@@ -6124,7 +6100,6 @@
           <a:lstStyle/>
           <a:p>
             <a:pPr algn="ctr"/>
-            <a:endParaRPr/>
           </a:p>
         </p:txBody>
       </p:sp>
@@ -6169,7 +6144,6 @@
           <a:lstStyle/>
           <a:p>
             <a:pPr algn="ctr"/>
-            <a:endParaRPr/>
           </a:p>
         </p:txBody>
       </p:sp>
@@ -6190,7 +6164,7 @@
           <a:noFill/>
         </p:spPr>
         <p:txBody>
-          <a:bodyPr wrap="square" lIns="0" tIns="0" rIns="0" bIns="0" anchor="ctr">
+          <a:bodyPr wrap="square" anchor="ctr" lIns="0" rIns="0" tIns="0" bIns="0">
             <a:spAutoFit/>
           </a:bodyPr>
           <a:lstStyle/>
@@ -6255,7 +6229,6 @@
           <a:lstStyle/>
           <a:p>
             <a:pPr algn="ctr"/>
-            <a:endParaRPr/>
           </a:p>
         </p:txBody>
       </p:sp>
@@ -6300,7 +6273,6 @@
           <a:lstStyle/>
           <a:p>
             <a:pPr algn="ctr"/>
-            <a:endParaRPr/>
           </a:p>
         </p:txBody>
       </p:sp>
@@ -6321,7 +6293,7 @@
           <a:noFill/>
         </p:spPr>
         <p:txBody>
-          <a:bodyPr wrap="square" lIns="0" tIns="0" rIns="0" bIns="0" anchor="ctr">
+          <a:bodyPr wrap="square" anchor="ctr" lIns="0" rIns="0" tIns="0" bIns="0">
             <a:spAutoFit/>
           </a:bodyPr>
           <a:lstStyle/>
@@ -6386,7 +6358,6 @@
           <a:lstStyle/>
           <a:p>
             <a:pPr algn="ctr"/>
-            <a:endParaRPr/>
           </a:p>
         </p:txBody>
       </p:sp>
@@ -6431,7 +6402,6 @@
           <a:lstStyle/>
           <a:p>
             <a:pPr algn="ctr"/>
-            <a:endParaRPr/>
           </a:p>
         </p:txBody>
       </p:sp>
@@ -6452,7 +6422,7 @@
           <a:noFill/>
         </p:spPr>
         <p:txBody>
-          <a:bodyPr wrap="square" lIns="0" tIns="0" rIns="0" bIns="0" anchor="ctr">
+          <a:bodyPr wrap="square" anchor="ctr" lIns="0" rIns="0" tIns="0" bIns="0">
             <a:spAutoFit/>
           </a:bodyPr>
           <a:lstStyle/>
@@ -6517,7 +6487,6 @@
           <a:lstStyle/>
           <a:p>
             <a:pPr algn="ctr"/>
-            <a:endParaRPr/>
           </a:p>
         </p:txBody>
       </p:sp>
@@ -6562,7 +6531,6 @@
           <a:lstStyle/>
           <a:p>
             <a:pPr algn="ctr"/>
-            <a:endParaRPr/>
           </a:p>
         </p:txBody>
       </p:sp>
@@ -6583,7 +6551,7 @@
           <a:noFill/>
         </p:spPr>
         <p:txBody>
-          <a:bodyPr wrap="square" lIns="0" tIns="0" rIns="0" bIns="0" anchor="ctr">
+          <a:bodyPr wrap="square" anchor="ctr" lIns="0" rIns="0" tIns="0" bIns="0">
             <a:spAutoFit/>
           </a:bodyPr>
           <a:lstStyle/>
@@ -6646,7 +6614,6 @@
           <a:lstStyle/>
           <a:p>
             <a:pPr algn="ctr"/>
-            <a:endParaRPr/>
           </a:p>
         </p:txBody>
       </p:sp>
@@ -6667,7 +6634,7 @@
           <a:noFill/>
         </p:spPr>
         <p:txBody>
-          <a:bodyPr wrap="square" lIns="0" tIns="0" rIns="0" bIns="0" anchor="t">
+          <a:bodyPr wrap="square" anchor="t" lIns="0" rIns="0" tIns="0" bIns="0">
             <a:spAutoFit/>
           </a:bodyPr>
           <a:lstStyle/>
@@ -6710,7 +6677,7 @@
           <a:noFill/>
         </p:spPr>
         <p:txBody>
-          <a:bodyPr wrap="square" lIns="0" tIns="0" rIns="0" bIns="0" anchor="t">
+          <a:bodyPr wrap="square" anchor="t" lIns="0" rIns="0" tIns="0" bIns="0">
             <a:spAutoFit/>
           </a:bodyPr>
           <a:lstStyle/>
@@ -6737,7 +6704,7 @@
 </file>
 
 <file path=ppt/slides/slide18.xml><?xml version="1.0" encoding="utf-8"?>
-<p:sld xmlns:a="http://schemas.openxmlformats.org/drawingml/2006/main" xmlns:r="http://schemas.openxmlformats.org/officeDocument/2006/relationships" xmlns:p="http://schemas.openxmlformats.org/presentationml/2006/main">
+<p:sld xmlns:a="http://schemas.openxmlformats.org/drawingml/2006/main" xmlns:p="http://schemas.openxmlformats.org/presentationml/2006/main" xmlns:r="http://schemas.openxmlformats.org/officeDocument/2006/relationships">
   <p:cSld>
     <p:bg>
       <p:bgPr>
@@ -6753,14 +6720,7 @@
         <p:cNvGrpSpPr/>
         <p:nvPr/>
       </p:nvGrpSpPr>
-      <p:grpSpPr>
-        <a:xfrm>
-          <a:off x="0" y="0"/>
-          <a:ext cx="0" cy="0"/>
-          <a:chOff x="0" y="0"/>
-          <a:chExt cx="0" cy="0"/>
-        </a:xfrm>
-      </p:grpSpPr>
+      <p:grpSpPr/>
       <p:sp>
         <p:nvSpPr>
           <p:cNvPr id="2" name="TextBox 1"/>
@@ -6778,7 +6738,7 @@
           <a:noFill/>
         </p:spPr>
         <p:txBody>
-          <a:bodyPr wrap="square" lIns="0" tIns="0" rIns="0" bIns="0" anchor="t">
+          <a:bodyPr wrap="square" anchor="t" lIns="0" rIns="0" tIns="0" bIns="0">
             <a:spAutoFit/>
           </a:bodyPr>
           <a:lstStyle/>
@@ -6852,7 +6812,6 @@
           <a:lstStyle/>
           <a:p>
             <a:pPr algn="ctr"/>
-            <a:endParaRPr/>
           </a:p>
         </p:txBody>
       </p:sp>
@@ -6899,7 +6858,6 @@
           <a:lstStyle/>
           <a:p>
             <a:pPr algn="ctr"/>
-            <a:endParaRPr/>
           </a:p>
         </p:txBody>
       </p:sp>
@@ -6944,7 +6902,6 @@
           <a:lstStyle/>
           <a:p>
             <a:pPr algn="ctr"/>
-            <a:endParaRPr/>
           </a:p>
         </p:txBody>
       </p:sp>
@@ -6965,7 +6922,7 @@
           <a:noFill/>
         </p:spPr>
         <p:txBody>
-          <a:bodyPr wrap="square" lIns="0" tIns="0" rIns="0" bIns="0" anchor="ctr">
+          <a:bodyPr wrap="square" anchor="ctr" lIns="0" rIns="0" tIns="0" bIns="0">
             <a:spAutoFit/>
           </a:bodyPr>
           <a:lstStyle/>
@@ -7030,7 +6987,6 @@
           <a:lstStyle/>
           <a:p>
             <a:pPr algn="ctr"/>
-            <a:endParaRPr/>
           </a:p>
         </p:txBody>
       </p:sp>
@@ -7075,7 +7031,6 @@
           <a:lstStyle/>
           <a:p>
             <a:pPr algn="ctr"/>
-            <a:endParaRPr/>
           </a:p>
         </p:txBody>
       </p:sp>
@@ -7096,7 +7051,7 @@
           <a:noFill/>
         </p:spPr>
         <p:txBody>
-          <a:bodyPr wrap="square" lIns="0" tIns="0" rIns="0" bIns="0" anchor="ctr">
+          <a:bodyPr wrap="square" anchor="ctr" lIns="0" rIns="0" tIns="0" bIns="0">
             <a:spAutoFit/>
           </a:bodyPr>
           <a:lstStyle/>
@@ -7161,7 +7116,6 @@
           <a:lstStyle/>
           <a:p>
             <a:pPr algn="ctr"/>
-            <a:endParaRPr/>
           </a:p>
         </p:txBody>
       </p:sp>
@@ -7206,7 +7160,6 @@
           <a:lstStyle/>
           <a:p>
             <a:pPr algn="ctr"/>
-            <a:endParaRPr/>
           </a:p>
         </p:txBody>
       </p:sp>
@@ -7227,7 +7180,7 @@
           <a:noFill/>
         </p:spPr>
         <p:txBody>
-          <a:bodyPr wrap="square" lIns="0" tIns="0" rIns="0" bIns="0" anchor="ctr">
+          <a:bodyPr wrap="square" anchor="ctr" lIns="0" rIns="0" tIns="0" bIns="0">
             <a:spAutoFit/>
           </a:bodyPr>
           <a:lstStyle/>
@@ -7292,7 +7245,6 @@
           <a:lstStyle/>
           <a:p>
             <a:pPr algn="ctr"/>
-            <a:endParaRPr/>
           </a:p>
         </p:txBody>
       </p:sp>
@@ -7337,7 +7289,6 @@
           <a:lstStyle/>
           <a:p>
             <a:pPr algn="ctr"/>
-            <a:endParaRPr/>
           </a:p>
         </p:txBody>
       </p:sp>
@@ -7358,7 +7309,7 @@
           <a:noFill/>
         </p:spPr>
         <p:txBody>
-          <a:bodyPr wrap="square" lIns="0" tIns="0" rIns="0" bIns="0" anchor="ctr">
+          <a:bodyPr wrap="square" anchor="ctr" lIns="0" rIns="0" tIns="0" bIns="0">
             <a:spAutoFit/>
           </a:bodyPr>
           <a:lstStyle/>
@@ -7423,7 +7374,6 @@
           <a:lstStyle/>
           <a:p>
             <a:pPr algn="ctr"/>
-            <a:endParaRPr/>
           </a:p>
         </p:txBody>
       </p:sp>
@@ -7468,7 +7418,6 @@
           <a:lstStyle/>
           <a:p>
             <a:pPr algn="ctr"/>
-            <a:endParaRPr/>
           </a:p>
         </p:txBody>
       </p:sp>
@@ -7489,7 +7438,7 @@
           <a:noFill/>
         </p:spPr>
         <p:txBody>
-          <a:bodyPr wrap="square" lIns="0" tIns="0" rIns="0" bIns="0" anchor="ctr">
+          <a:bodyPr wrap="square" anchor="ctr" lIns="0" rIns="0" tIns="0" bIns="0">
             <a:spAutoFit/>
           </a:bodyPr>
           <a:lstStyle/>
@@ -7552,7 +7501,6 @@
           <a:lstStyle/>
           <a:p>
             <a:pPr algn="ctr"/>
-            <a:endParaRPr/>
           </a:p>
         </p:txBody>
       </p:sp>
@@ -7573,7 +7521,7 @@
           <a:noFill/>
         </p:spPr>
         <p:txBody>
-          <a:bodyPr wrap="square" lIns="0" tIns="0" rIns="0" bIns="0" anchor="t">
+          <a:bodyPr wrap="square" anchor="t" lIns="0" rIns="0" tIns="0" bIns="0">
             <a:spAutoFit/>
           </a:bodyPr>
           <a:lstStyle/>
@@ -7616,7 +7564,7 @@
           <a:noFill/>
         </p:spPr>
         <p:txBody>
-          <a:bodyPr wrap="square" lIns="0" tIns="0" rIns="0" bIns="0" anchor="t">
+          <a:bodyPr wrap="square" anchor="t" lIns="0" rIns="0" tIns="0" bIns="0">
             <a:spAutoFit/>
           </a:bodyPr>
           <a:lstStyle/>
@@ -7643,7 +7591,7 @@
 </file>
 
 <file path=ppt/slides/slide19.xml><?xml version="1.0" encoding="utf-8"?>
-<p:sld xmlns:a="http://schemas.openxmlformats.org/drawingml/2006/main" xmlns:r="http://schemas.openxmlformats.org/officeDocument/2006/relationships" xmlns:p="http://schemas.openxmlformats.org/presentationml/2006/main">
+<p:sld xmlns:a="http://schemas.openxmlformats.org/drawingml/2006/main" xmlns:p="http://schemas.openxmlformats.org/presentationml/2006/main" xmlns:r="http://schemas.openxmlformats.org/officeDocument/2006/relationships">
   <p:cSld>
     <p:bg>
       <p:bgPr>
@@ -7659,14 +7607,7 @@
         <p:cNvGrpSpPr/>
         <p:nvPr/>
       </p:nvGrpSpPr>
-      <p:grpSpPr>
-        <a:xfrm>
-          <a:off x="0" y="0"/>
-          <a:ext cx="0" cy="0"/>
-          <a:chOff x="0" y="0"/>
-          <a:chExt cx="0" cy="0"/>
-        </a:xfrm>
-      </p:grpSpPr>
+      <p:grpSpPr/>
       <p:sp>
         <p:nvSpPr>
           <p:cNvPr id="2" name="Rectangle 1"/>
@@ -7708,7 +7649,6 @@
           <a:lstStyle/>
           <a:p>
             <a:pPr algn="ctr"/>
-            <a:endParaRPr/>
           </a:p>
         </p:txBody>
       </p:sp>
@@ -7729,7 +7669,7 @@
           <a:noFill/>
         </p:spPr>
         <p:txBody>
-          <a:bodyPr wrap="square" lIns="0" tIns="0" rIns="0" bIns="0" anchor="t">
+          <a:bodyPr wrap="square" anchor="t" lIns="0" rIns="0" tIns="0" bIns="0">
             <a:spAutoFit/>
           </a:bodyPr>
           <a:lstStyle/>
@@ -7793,7 +7733,7 @@
 </file>
 
 <file path=ppt/slides/slide2.xml><?xml version="1.0" encoding="utf-8"?>
-<p:sld xmlns:a="http://schemas.openxmlformats.org/drawingml/2006/main" xmlns:r="http://schemas.openxmlformats.org/officeDocument/2006/relationships" xmlns:p="http://schemas.openxmlformats.org/presentationml/2006/main">
+<p:sld xmlns:a="http://schemas.openxmlformats.org/drawingml/2006/main" xmlns:p="http://schemas.openxmlformats.org/presentationml/2006/main" xmlns:r="http://schemas.openxmlformats.org/officeDocument/2006/relationships">
   <p:cSld>
     <p:bg>
       <p:bgPr>
@@ -7809,14 +7749,7 @@
         <p:cNvGrpSpPr/>
         <p:nvPr/>
       </p:nvGrpSpPr>
-      <p:grpSpPr>
-        <a:xfrm>
-          <a:off x="0" y="0"/>
-          <a:ext cx="0" cy="0"/>
-          <a:chOff x="0" y="0"/>
-          <a:chExt cx="0" cy="0"/>
-        </a:xfrm>
-      </p:grpSpPr>
+      <p:grpSpPr/>
       <p:sp>
         <p:nvSpPr>
           <p:cNvPr id="2" name="TextBox 1"/>
@@ -7834,7 +7767,7 @@
           <a:noFill/>
         </p:spPr>
         <p:txBody>
-          <a:bodyPr wrap="square" lIns="0" tIns="0" rIns="0" bIns="0" anchor="t">
+          <a:bodyPr wrap="square" anchor="t" lIns="0" rIns="0" tIns="0" bIns="0">
             <a:spAutoFit/>
           </a:bodyPr>
           <a:lstStyle/>
@@ -7908,7 +7841,6 @@
           <a:lstStyle/>
           <a:p>
             <a:pPr algn="ctr"/>
-            <a:endParaRPr/>
           </a:p>
         </p:txBody>
       </p:sp>
@@ -7929,7 +7861,7 @@
           <a:noFill/>
         </p:spPr>
         <p:txBody>
-          <a:bodyPr wrap="square" lIns="0" tIns="0" rIns="0" bIns="0" anchor="t">
+          <a:bodyPr wrap="square" anchor="ctr" lIns="0" rIns="0" tIns="0" bIns="0">
             <a:spAutoFit/>
           </a:bodyPr>
           <a:lstStyle/>
@@ -7946,7 +7878,7 @@
               </a:spcAft>
             </a:pPr>
             <a:r>
-              <a:rPr sz="1800" b="1" i="0">
+              <a:rPr sz="2400" b="1" i="0">
                 <a:solidFill>
                   <a:srgbClr val="EDAB0C"/>
                 </a:solidFill>
@@ -7955,7 +7887,7 @@
               <a:t>■  </a:t>
             </a:r>
             <a:r>
-              <a:rPr sz="1800" b="0" i="0">
+              <a:rPr sz="2400" b="0" i="0">
                 <a:solidFill>
                   <a:srgbClr val="2A2929"/>
                 </a:solidFill>
@@ -7977,13 +7909,22 @@
               </a:spcAft>
             </a:pPr>
             <a:r>
-              <a:rPr sz="1800" b="1" i="0">
+              <a:rPr sz="2400" b="1" i="0">
                 <a:solidFill>
                   <a:srgbClr val="92268F"/>
                 </a:solidFill>
                 <a:latin typeface="Roboto"/>
               </a:rPr>
-              <a:t>■  Topic 14 turns that into the HA Deployment Report, evidences your knowledge, and closes the engagement.</a:t>
+              <a:t>■  </a:t>
+            </a:r>
+            <a:r>
+              <a:rPr sz="2400" b="1" i="0">
+                <a:solidFill>
+                  <a:srgbClr val="92268F"/>
+                </a:solidFill>
+                <a:latin typeface="Roboto"/>
+              </a:rPr>
+              <a:t>Topic 14 turns that into the HA Deployment Report, evidences your knowledge, and closes the engagement.</a:t>
             </a:r>
           </a:p>
           <a:p>
@@ -7999,7 +7940,7 @@
               </a:spcAft>
             </a:pPr>
             <a:r>
-              <a:rPr sz="1800" b="1" i="0">
+              <a:rPr sz="2400" b="1" i="0">
                 <a:solidFill>
                   <a:srgbClr val="EDAB0C"/>
                 </a:solidFill>
@@ -8008,7 +7949,7 @@
               <a:t>■  </a:t>
             </a:r>
             <a:r>
-              <a:rPr sz="1800" b="0" i="0">
+              <a:rPr sz="2400" b="0" i="0">
                 <a:solidFill>
                   <a:srgbClr val="2A2929"/>
                 </a:solidFill>
@@ -8030,7 +7971,7 @@
               </a:spcAft>
             </a:pPr>
             <a:r>
-              <a:rPr sz="1800" b="1" i="0">
+              <a:rPr sz="2400" b="1" i="0">
                 <a:solidFill>
                   <a:srgbClr val="EDAB0C"/>
                 </a:solidFill>
@@ -8039,7 +7980,7 @@
               <a:t>■  </a:t>
             </a:r>
             <a:r>
-              <a:rPr sz="1800" b="0" i="0">
+              <a:rPr sz="2400" b="0" i="0">
                 <a:solidFill>
                   <a:srgbClr val="2A2929"/>
                 </a:solidFill>
@@ -8091,7 +8032,6 @@
           <a:lstStyle/>
           <a:p>
             <a:pPr algn="ctr"/>
-            <a:endParaRPr/>
           </a:p>
         </p:txBody>
       </p:sp>
@@ -8112,7 +8052,7 @@
           <a:noFill/>
         </p:spPr>
         <p:txBody>
-          <a:bodyPr wrap="square" lIns="0" tIns="0" rIns="0" bIns="0" anchor="t">
+          <a:bodyPr wrap="square" anchor="t" lIns="0" rIns="0" tIns="0" bIns="0">
             <a:spAutoFit/>
           </a:bodyPr>
           <a:lstStyle/>
@@ -8155,7 +8095,7 @@
           <a:noFill/>
         </p:spPr>
         <p:txBody>
-          <a:bodyPr wrap="square" lIns="0" tIns="0" rIns="0" bIns="0" anchor="t">
+          <a:bodyPr wrap="square" anchor="t" lIns="0" rIns="0" tIns="0" bIns="0">
             <a:spAutoFit/>
           </a:bodyPr>
           <a:lstStyle/>
@@ -8182,7 +8122,7 @@
 </file>
 
 <file path=ppt/slides/slide3.xml><?xml version="1.0" encoding="utf-8"?>
-<p:sld xmlns:a="http://schemas.openxmlformats.org/drawingml/2006/main" xmlns:r="http://schemas.openxmlformats.org/officeDocument/2006/relationships" xmlns:p="http://schemas.openxmlformats.org/presentationml/2006/main">
+<p:sld xmlns:a="http://schemas.openxmlformats.org/drawingml/2006/main" xmlns:p="http://schemas.openxmlformats.org/presentationml/2006/main" xmlns:r="http://schemas.openxmlformats.org/officeDocument/2006/relationships">
   <p:cSld>
     <p:bg>
       <p:bgPr>
@@ -8198,14 +8138,7 @@
         <p:cNvGrpSpPr/>
         <p:nvPr/>
       </p:nvGrpSpPr>
-      <p:grpSpPr>
-        <a:xfrm>
-          <a:off x="0" y="0"/>
-          <a:ext cx="0" cy="0"/>
-          <a:chOff x="0" y="0"/>
-          <a:chExt cx="0" cy="0"/>
-        </a:xfrm>
-      </p:grpSpPr>
+      <p:grpSpPr/>
       <p:sp>
         <p:nvSpPr>
           <p:cNvPr id="2" name="Rectangle 1"/>
@@ -8247,7 +8180,6 @@
           <a:lstStyle/>
           <a:p>
             <a:pPr algn="ctr"/>
-            <a:endParaRPr/>
           </a:p>
         </p:txBody>
       </p:sp>
@@ -8268,7 +8200,7 @@
           <a:noFill/>
         </p:spPr>
         <p:txBody>
-          <a:bodyPr wrap="square" lIns="0" tIns="0" rIns="0" bIns="0" anchor="t">
+          <a:bodyPr wrap="square" anchor="t" lIns="0" rIns="0" tIns="0" bIns="0">
             <a:spAutoFit/>
           </a:bodyPr>
           <a:lstStyle/>
@@ -8302,7 +8234,7 @@
           <a:noFill/>
         </p:spPr>
         <p:txBody>
-          <a:bodyPr wrap="square" lIns="0" tIns="0" rIns="0" bIns="0" anchor="t">
+          <a:bodyPr wrap="square" anchor="t" lIns="0" rIns="0" tIns="0" bIns="0">
             <a:spAutoFit/>
           </a:bodyPr>
           <a:lstStyle/>
@@ -8392,7 +8324,6 @@
           <a:lstStyle/>
           <a:p>
             <a:pPr algn="ctr"/>
-            <a:endParaRPr/>
           </a:p>
         </p:txBody>
       </p:sp>
@@ -8413,7 +8344,7 @@
           <a:noFill/>
         </p:spPr>
         <p:txBody>
-          <a:bodyPr wrap="square" lIns="0" tIns="0" rIns="0" bIns="0" anchor="t">
+          <a:bodyPr wrap="square" anchor="t" lIns="0" rIns="0" tIns="0" bIns="0">
             <a:spAutoFit/>
           </a:bodyPr>
           <a:lstStyle/>
@@ -8456,13 +8387,21 @@
           <a:noFill/>
         </p:spPr>
         <p:txBody>
-          <a:bodyPr wrap="square" lIns="0" tIns="0" rIns="0" bIns="0" anchor="t">
+          <a:bodyPr wrap="square" anchor="t" lIns="0" rIns="0" tIns="0" bIns="0">
             <a:spAutoFit/>
           </a:bodyPr>
           <a:lstStyle/>
           <a:p>
             <a:pPr algn="r"/>
-            <a:endParaRPr/>
+            <a:r>
+              <a:rPr sz="1100" b="0" i="0">
+                <a:solidFill>
+                  <a:srgbClr val="7A7A7A"/>
+                </a:solidFill>
+                <a:latin typeface="Roboto"/>
+              </a:rPr>
+              <a:t/>
+            </a:r>
           </a:p>
         </p:txBody>
       </p:sp>
@@ -8475,7 +8414,7 @@
 </file>
 
 <file path=ppt/slides/slide4.xml><?xml version="1.0" encoding="utf-8"?>
-<p:sld xmlns:a="http://schemas.openxmlformats.org/drawingml/2006/main" xmlns:r="http://schemas.openxmlformats.org/officeDocument/2006/relationships" xmlns:p="http://schemas.openxmlformats.org/presentationml/2006/main">
+<p:sld xmlns:a="http://schemas.openxmlformats.org/drawingml/2006/main" xmlns:p="http://schemas.openxmlformats.org/presentationml/2006/main" xmlns:r="http://schemas.openxmlformats.org/officeDocument/2006/relationships">
   <p:cSld>
     <p:bg>
       <p:bgPr>
@@ -8491,14 +8430,7 @@
         <p:cNvGrpSpPr/>
         <p:nvPr/>
       </p:nvGrpSpPr>
-      <p:grpSpPr>
-        <a:xfrm>
-          <a:off x="0" y="0"/>
-          <a:ext cx="0" cy="0"/>
-          <a:chOff x="0" y="0"/>
-          <a:chExt cx="0" cy="0"/>
-        </a:xfrm>
-      </p:grpSpPr>
+      <p:grpSpPr/>
       <p:sp>
         <p:nvSpPr>
           <p:cNvPr id="2" name="TextBox 1"/>
@@ -8516,7 +8448,7 @@
           <a:noFill/>
         </p:spPr>
         <p:txBody>
-          <a:bodyPr wrap="square" lIns="0" tIns="0" rIns="0" bIns="0" anchor="t">
+          <a:bodyPr wrap="square" anchor="t" lIns="0" rIns="0" tIns="0" bIns="0">
             <a:spAutoFit/>
           </a:bodyPr>
           <a:lstStyle/>
@@ -8590,7 +8522,6 @@
           <a:lstStyle/>
           <a:p>
             <a:pPr algn="ctr"/>
-            <a:endParaRPr/>
           </a:p>
         </p:txBody>
       </p:sp>
@@ -8611,7 +8542,7 @@
           <a:noFill/>
         </p:spPr>
         <p:txBody>
-          <a:bodyPr wrap="square" lIns="0" tIns="0" rIns="0" bIns="0" anchor="t">
+          <a:bodyPr wrap="square" anchor="ctr" lIns="0" rIns="0" tIns="0" bIns="0">
             <a:spAutoFit/>
           </a:bodyPr>
           <a:lstStyle/>
@@ -8628,7 +8559,7 @@
               </a:spcAft>
             </a:pPr>
             <a:r>
-              <a:rPr sz="1800" b="1" i="0">
+              <a:rPr sz="2400" b="1" i="0">
                 <a:solidFill>
                   <a:srgbClr val="EDAB0C"/>
                 </a:solidFill>
@@ -8637,7 +8568,7 @@
               <a:t>■  </a:t>
             </a:r>
             <a:r>
-              <a:rPr sz="1800" b="0" i="0">
+              <a:rPr sz="2400" b="0" i="0">
                 <a:solidFill>
                   <a:srgbClr val="2A2929"/>
                 </a:solidFill>
@@ -8659,13 +8590,22 @@
               </a:spcAft>
             </a:pPr>
             <a:r>
-              <a:rPr sz="1800" b="1" i="0">
+              <a:rPr sz="2400" b="1" i="0">
                 <a:solidFill>
                   <a:srgbClr val="92268F"/>
                 </a:solidFill>
                 <a:latin typeface="Roboto"/>
               </a:rPr>
-              <a:t>■  Label and number each item so the narrative can cite it.</a:t>
+              <a:t>■  </a:t>
+            </a:r>
+            <a:r>
+              <a:rPr sz="2400" b="1" i="0">
+                <a:solidFill>
+                  <a:srgbClr val="92268F"/>
+                </a:solidFill>
+                <a:latin typeface="Roboto"/>
+              </a:rPr>
+              <a:t>Label and number each item so the narrative can cite it.</a:t>
             </a:r>
           </a:p>
           <a:p>
@@ -8681,7 +8621,7 @@
               </a:spcAft>
             </a:pPr>
             <a:r>
-              <a:rPr sz="1800" b="1" i="0">
+              <a:rPr sz="2400" b="1" i="0">
                 <a:solidFill>
                   <a:srgbClr val="EDAB0C"/>
                 </a:solidFill>
@@ -8690,7 +8630,7 @@
               <a:t>■  </a:t>
             </a:r>
             <a:r>
-              <a:rPr sz="1800" b="0" i="0">
+              <a:rPr sz="2400" b="0" i="0">
                 <a:solidFill>
                   <a:srgbClr val="2A2929"/>
                 </a:solidFill>
@@ -8742,7 +8682,6 @@
           <a:lstStyle/>
           <a:p>
             <a:pPr algn="ctr"/>
-            <a:endParaRPr/>
           </a:p>
         </p:txBody>
       </p:sp>
@@ -8763,7 +8702,7 @@
           <a:noFill/>
         </p:spPr>
         <p:txBody>
-          <a:bodyPr wrap="square" lIns="0" tIns="0" rIns="0" bIns="0" anchor="t">
+          <a:bodyPr wrap="square" anchor="t" lIns="0" rIns="0" tIns="0" bIns="0">
             <a:spAutoFit/>
           </a:bodyPr>
           <a:lstStyle/>
@@ -8806,7 +8745,7 @@
           <a:noFill/>
         </p:spPr>
         <p:txBody>
-          <a:bodyPr wrap="square" lIns="0" tIns="0" rIns="0" bIns="0" anchor="t">
+          <a:bodyPr wrap="square" anchor="t" lIns="0" rIns="0" tIns="0" bIns="0">
             <a:spAutoFit/>
           </a:bodyPr>
           <a:lstStyle/>
@@ -8833,7 +8772,7 @@
 </file>
 
 <file path=ppt/slides/slide5.xml><?xml version="1.0" encoding="utf-8"?>
-<p:sld xmlns:a="http://schemas.openxmlformats.org/drawingml/2006/main" xmlns:r="http://schemas.openxmlformats.org/officeDocument/2006/relationships" xmlns:p="http://schemas.openxmlformats.org/presentationml/2006/main">
+<p:sld xmlns:a="http://schemas.openxmlformats.org/drawingml/2006/main" xmlns:p="http://schemas.openxmlformats.org/presentationml/2006/main" xmlns:r="http://schemas.openxmlformats.org/officeDocument/2006/relationships">
   <p:cSld>
     <p:bg>
       <p:bgPr>
@@ -8849,14 +8788,7 @@
         <p:cNvGrpSpPr/>
         <p:nvPr/>
       </p:nvGrpSpPr>
-      <p:grpSpPr>
-        <a:xfrm>
-          <a:off x="0" y="0"/>
-          <a:ext cx="0" cy="0"/>
-          <a:chOff x="0" y="0"/>
-          <a:chExt cx="0" cy="0"/>
-        </a:xfrm>
-      </p:grpSpPr>
+      <p:grpSpPr/>
       <p:sp>
         <p:nvSpPr>
           <p:cNvPr id="2" name="TextBox 1"/>
@@ -8874,7 +8806,7 @@
           <a:noFill/>
         </p:spPr>
         <p:txBody>
-          <a:bodyPr wrap="square" lIns="0" tIns="0" rIns="0" bIns="0" anchor="t">
+          <a:bodyPr wrap="square" anchor="t" lIns="0" rIns="0" tIns="0" bIns="0">
             <a:spAutoFit/>
           </a:bodyPr>
           <a:lstStyle/>
@@ -8948,7 +8880,6 @@
           <a:lstStyle/>
           <a:p>
             <a:pPr algn="ctr"/>
-            <a:endParaRPr/>
           </a:p>
         </p:txBody>
       </p:sp>
@@ -8969,7 +8900,7 @@
           <a:noFill/>
         </p:spPr>
         <p:txBody>
-          <a:bodyPr wrap="square" lIns="0" tIns="0" rIns="0" bIns="0" anchor="t">
+          <a:bodyPr wrap="square" anchor="ctr" lIns="0" rIns="0" tIns="0" bIns="0">
             <a:spAutoFit/>
           </a:bodyPr>
           <a:lstStyle/>
@@ -8986,7 +8917,7 @@
               </a:spcAft>
             </a:pPr>
             <a:r>
-              <a:rPr sz="1800" b="1" i="0">
+              <a:rPr sz="2400" b="1" i="0">
                 <a:solidFill>
                   <a:srgbClr val="EDAB0C"/>
                 </a:solidFill>
@@ -8995,7 +8926,7 @@
               <a:t>■  </a:t>
             </a:r>
             <a:r>
-              <a:rPr sz="1800" b="0" i="0">
+              <a:rPr sz="2400" b="0" i="0">
                 <a:solidFill>
                   <a:srgbClr val="2A2929"/>
                 </a:solidFill>
@@ -9017,7 +8948,7 @@
               </a:spcAft>
             </a:pPr>
             <a:r>
-              <a:rPr sz="1800" b="1" i="0">
+              <a:rPr sz="2400" b="1" i="0">
                 <a:solidFill>
                   <a:srgbClr val="EDAB0C"/>
                 </a:solidFill>
@@ -9026,7 +8957,7 @@
               <a:t>■  </a:t>
             </a:r>
             <a:r>
-              <a:rPr sz="1800" b="0" i="0">
+              <a:rPr sz="2400" b="0" i="0">
                 <a:solidFill>
                   <a:srgbClr val="2A2929"/>
                 </a:solidFill>
@@ -9048,7 +8979,7 @@
               </a:spcAft>
             </a:pPr>
             <a:r>
-              <a:rPr sz="1800" b="1" i="0">
+              <a:rPr sz="2400" b="1" i="0">
                 <a:solidFill>
                   <a:srgbClr val="EDAB0C"/>
                 </a:solidFill>
@@ -9057,7 +8988,7 @@
               <a:t>■  </a:t>
             </a:r>
             <a:r>
-              <a:rPr sz="1800" b="0" i="0">
+              <a:rPr sz="2400" b="0" i="0">
                 <a:solidFill>
                   <a:srgbClr val="2A2929"/>
                 </a:solidFill>
@@ -9079,13 +9010,22 @@
               </a:spcAft>
             </a:pPr>
             <a:r>
-              <a:rPr sz="1800" b="1" i="0">
+              <a:rPr sz="2400" b="1" i="0">
                 <a:solidFill>
                   <a:srgbClr val="92268F"/>
                 </a:solidFill>
                 <a:latin typeface="Roboto"/>
               </a:rPr>
-              <a:t>■  Appendices A–D — A screenshots · B config exports · C test/simulation evidence · D reflections.</a:t>
+              <a:t>■  </a:t>
+            </a:r>
+            <a:r>
+              <a:rPr sz="2400" b="1" i="0">
+                <a:solidFill>
+                  <a:srgbClr val="92268F"/>
+                </a:solidFill>
+                <a:latin typeface="Roboto"/>
+              </a:rPr>
+              <a:t>Appendices A–D — A screenshots · B config exports · C test/simulation evidence · D reflections.</a:t>
             </a:r>
           </a:p>
         </p:txBody>
@@ -9131,7 +9071,6 @@
           <a:lstStyle/>
           <a:p>
             <a:pPr algn="ctr"/>
-            <a:endParaRPr/>
           </a:p>
         </p:txBody>
       </p:sp>
@@ -9152,7 +9091,7 @@
           <a:noFill/>
         </p:spPr>
         <p:txBody>
-          <a:bodyPr wrap="square" lIns="0" tIns="0" rIns="0" bIns="0" anchor="t">
+          <a:bodyPr wrap="square" anchor="t" lIns="0" rIns="0" tIns="0" bIns="0">
             <a:spAutoFit/>
           </a:bodyPr>
           <a:lstStyle/>
@@ -9195,7 +9134,7 @@
           <a:noFill/>
         </p:spPr>
         <p:txBody>
-          <a:bodyPr wrap="square" lIns="0" tIns="0" rIns="0" bIns="0" anchor="t">
+          <a:bodyPr wrap="square" anchor="t" lIns="0" rIns="0" tIns="0" bIns="0">
             <a:spAutoFit/>
           </a:bodyPr>
           <a:lstStyle/>
@@ -9222,7 +9161,7 @@
 </file>
 
 <file path=ppt/slides/slide6.xml><?xml version="1.0" encoding="utf-8"?>
-<p:sld xmlns:a="http://schemas.openxmlformats.org/drawingml/2006/main" xmlns:r="http://schemas.openxmlformats.org/officeDocument/2006/relationships" xmlns:p="http://schemas.openxmlformats.org/presentationml/2006/main">
+<p:sld xmlns:a="http://schemas.openxmlformats.org/drawingml/2006/main" xmlns:p="http://schemas.openxmlformats.org/presentationml/2006/main" xmlns:r="http://schemas.openxmlformats.org/officeDocument/2006/relationships">
   <p:cSld>
     <p:bg>
       <p:bgPr>
@@ -9238,14 +9177,7 @@
         <p:cNvGrpSpPr/>
         <p:nvPr/>
       </p:nvGrpSpPr>
-      <p:grpSpPr>
-        <a:xfrm>
-          <a:off x="0" y="0"/>
-          <a:ext cx="0" cy="0"/>
-          <a:chOff x="0" y="0"/>
-          <a:chExt cx="0" cy="0"/>
-        </a:xfrm>
-      </p:grpSpPr>
+      <p:grpSpPr/>
       <p:sp>
         <p:nvSpPr>
           <p:cNvPr id="2" name="TextBox 1"/>
@@ -9263,7 +9195,7 @@
           <a:noFill/>
         </p:spPr>
         <p:txBody>
-          <a:bodyPr wrap="square" lIns="0" tIns="0" rIns="0" bIns="0" anchor="t">
+          <a:bodyPr wrap="square" anchor="t" lIns="0" rIns="0" tIns="0" bIns="0">
             <a:spAutoFit/>
           </a:bodyPr>
           <a:lstStyle/>
@@ -9337,7 +9269,6 @@
           <a:lstStyle/>
           <a:p>
             <a:pPr algn="ctr"/>
-            <a:endParaRPr/>
           </a:p>
         </p:txBody>
       </p:sp>
@@ -9358,7 +9289,7 @@
           <a:noFill/>
         </p:spPr>
         <p:txBody>
-          <a:bodyPr wrap="square" lIns="0" tIns="0" rIns="0" bIns="0" anchor="t">
+          <a:bodyPr wrap="square" anchor="ctr" lIns="0" rIns="0" tIns="0" bIns="0">
             <a:spAutoFit/>
           </a:bodyPr>
           <a:lstStyle/>
@@ -9375,7 +9306,7 @@
               </a:spcAft>
             </a:pPr>
             <a:r>
-              <a:rPr sz="1800" b="1" i="0">
+              <a:rPr sz="2400" b="1" i="0">
                 <a:solidFill>
                   <a:srgbClr val="EDAB0C"/>
                 </a:solidFill>
@@ -9384,7 +9315,7 @@
               <a:t>■  </a:t>
             </a:r>
             <a:r>
-              <a:rPr sz="1800" b="0" i="0">
+              <a:rPr sz="2400" b="0" i="0">
                 <a:solidFill>
                   <a:srgbClr val="2A2929"/>
                 </a:solidFill>
@@ -9406,13 +9337,22 @@
               </a:spcAft>
             </a:pPr>
             <a:r>
-              <a:rPr sz="1800" b="1" i="0">
+              <a:rPr sz="2400" b="1" i="0">
                 <a:solidFill>
                   <a:srgbClr val="92268F"/>
                 </a:solidFill>
                 <a:latin typeface="Roboto"/>
               </a:rPr>
-              <a:t>■  Compare the findings to the design's recovery objectives, and record any adjustments you made.</a:t>
+              <a:t>■  </a:t>
+            </a:r>
+            <a:r>
+              <a:rPr sz="2400" b="1" i="0">
+                <a:solidFill>
+                  <a:srgbClr val="92268F"/>
+                </a:solidFill>
+                <a:latin typeface="Roboto"/>
+              </a:rPr>
+              <a:t>Compare the findings to the design's recovery objectives, and record any adjustments you made.</a:t>
             </a:r>
           </a:p>
           <a:p>
@@ -9428,7 +9368,7 @@
               </a:spcAft>
             </a:pPr>
             <a:r>
-              <a:rPr sz="1800" b="1" i="0">
+              <a:rPr sz="2400" b="1" i="0">
                 <a:solidFill>
                   <a:srgbClr val="EDAB0C"/>
                 </a:solidFill>
@@ -9437,7 +9377,7 @@
               <a:t>■  </a:t>
             </a:r>
             <a:r>
-              <a:rPr sz="1800" b="0" i="0">
+              <a:rPr sz="2400" b="0" i="0">
                 <a:solidFill>
                   <a:srgbClr val="2A2929"/>
                 </a:solidFill>
@@ -9489,7 +9429,6 @@
           <a:lstStyle/>
           <a:p>
             <a:pPr algn="ctr"/>
-            <a:endParaRPr/>
           </a:p>
         </p:txBody>
       </p:sp>
@@ -9510,7 +9449,7 @@
           <a:noFill/>
         </p:spPr>
         <p:txBody>
-          <a:bodyPr wrap="square" lIns="0" tIns="0" rIns="0" bIns="0" anchor="t">
+          <a:bodyPr wrap="square" anchor="t" lIns="0" rIns="0" tIns="0" bIns="0">
             <a:spAutoFit/>
           </a:bodyPr>
           <a:lstStyle/>
@@ -9553,7 +9492,7 @@
           <a:noFill/>
         </p:spPr>
         <p:txBody>
-          <a:bodyPr wrap="square" lIns="0" tIns="0" rIns="0" bIns="0" anchor="t">
+          <a:bodyPr wrap="square" anchor="t" lIns="0" rIns="0" tIns="0" bIns="0">
             <a:spAutoFit/>
           </a:bodyPr>
           <a:lstStyle/>
@@ -9580,7 +9519,7 @@
 </file>
 
 <file path=ppt/slides/slide7.xml><?xml version="1.0" encoding="utf-8"?>
-<p:sld xmlns:a="http://schemas.openxmlformats.org/drawingml/2006/main" xmlns:r="http://schemas.openxmlformats.org/officeDocument/2006/relationships" xmlns:p="http://schemas.openxmlformats.org/presentationml/2006/main">
+<p:sld xmlns:a="http://schemas.openxmlformats.org/drawingml/2006/main" xmlns:p="http://schemas.openxmlformats.org/presentationml/2006/main" xmlns:r="http://schemas.openxmlformats.org/officeDocument/2006/relationships">
   <p:cSld>
     <p:bg>
       <p:bgPr>
@@ -9596,14 +9535,7 @@
         <p:cNvGrpSpPr/>
         <p:nvPr/>
       </p:nvGrpSpPr>
-      <p:grpSpPr>
-        <a:xfrm>
-          <a:off x="0" y="0"/>
-          <a:ext cx="0" cy="0"/>
-          <a:chOff x="0" y="0"/>
-          <a:chExt cx="0" cy="0"/>
-        </a:xfrm>
-      </p:grpSpPr>
+      <p:grpSpPr/>
       <p:sp>
         <p:nvSpPr>
           <p:cNvPr id="2" name="TextBox 1"/>
@@ -9621,7 +9553,7 @@
           <a:noFill/>
         </p:spPr>
         <p:txBody>
-          <a:bodyPr wrap="square" lIns="0" tIns="0" rIns="0" bIns="0" anchor="t">
+          <a:bodyPr wrap="square" anchor="t" lIns="0" rIns="0" tIns="0" bIns="0">
             <a:spAutoFit/>
           </a:bodyPr>
           <a:lstStyle/>
@@ -9695,7 +9627,6 @@
           <a:lstStyle/>
           <a:p>
             <a:pPr algn="ctr"/>
-            <a:endParaRPr/>
           </a:p>
         </p:txBody>
       </p:sp>
@@ -9716,7 +9647,7 @@
           <a:noFill/>
         </p:spPr>
         <p:txBody>
-          <a:bodyPr wrap="square" lIns="0" tIns="0" rIns="0" bIns="0" anchor="t">
+          <a:bodyPr wrap="square" anchor="ctr" lIns="0" rIns="0" tIns="0" bIns="0">
             <a:spAutoFit/>
           </a:bodyPr>
           <a:lstStyle/>
@@ -9733,7 +9664,7 @@
               </a:spcAft>
             </a:pPr>
             <a:r>
-              <a:rPr sz="1800" b="1" i="0">
+              <a:rPr sz="2400" b="1" i="0">
                 <a:solidFill>
                   <a:srgbClr val="EDAB0C"/>
                 </a:solidFill>
@@ -9742,7 +9673,7 @@
               <a:t>■  </a:t>
             </a:r>
             <a:r>
-              <a:rPr sz="1800" b="0" i="0">
+              <a:rPr sz="2400" b="0" i="0">
                 <a:solidFill>
                   <a:srgbClr val="2A2929"/>
                 </a:solidFill>
@@ -9764,7 +9695,7 @@
               </a:spcAft>
             </a:pPr>
             <a:r>
-              <a:rPr sz="1800" b="1" i="0">
+              <a:rPr sz="2400" b="1" i="0">
                 <a:solidFill>
                   <a:srgbClr val="EDAB0C"/>
                 </a:solidFill>
@@ -9773,7 +9704,7 @@
               <a:t>■  </a:t>
             </a:r>
             <a:r>
-              <a:rPr sz="1800" b="0" i="0">
+              <a:rPr sz="2400" b="0" i="0">
                 <a:solidFill>
                   <a:srgbClr val="2A2929"/>
                 </a:solidFill>
@@ -9795,7 +9726,7 @@
               </a:spcAft>
             </a:pPr>
             <a:r>
-              <a:rPr sz="1800" b="1" i="0">
+              <a:rPr sz="2400" b="1" i="0">
                 <a:solidFill>
                   <a:srgbClr val="EDAB0C"/>
                 </a:solidFill>
@@ -9804,7 +9735,7 @@
               <a:t>■  </a:t>
             </a:r>
             <a:r>
-              <a:rPr sz="1800" b="0" i="0">
+              <a:rPr sz="2400" b="0" i="0">
                 <a:solidFill>
                   <a:srgbClr val="2A2929"/>
                 </a:solidFill>
@@ -9826,13 +9757,22 @@
               </a:spcAft>
             </a:pPr>
             <a:r>
-              <a:rPr sz="1800" b="1" i="0">
+              <a:rPr sz="2400" b="1" i="0">
                 <a:solidFill>
                   <a:srgbClr val="92268F"/>
                 </a:solidFill>
                 <a:latin typeface="Roboto"/>
               </a:rPr>
-              <a:t>■  §1 Executive Summary — write it last.</a:t>
+              <a:t>■  </a:t>
+            </a:r>
+            <a:r>
+              <a:rPr sz="2400" b="1" i="0">
+                <a:solidFill>
+                  <a:srgbClr val="92268F"/>
+                </a:solidFill>
+                <a:latin typeface="Roboto"/>
+              </a:rPr>
+              <a:t>§1 Executive Summary — write it last.</a:t>
             </a:r>
           </a:p>
         </p:txBody>
@@ -9878,7 +9818,6 @@
           <a:lstStyle/>
           <a:p>
             <a:pPr algn="ctr"/>
-            <a:endParaRPr/>
           </a:p>
         </p:txBody>
       </p:sp>
@@ -9899,7 +9838,7 @@
           <a:noFill/>
         </p:spPr>
         <p:txBody>
-          <a:bodyPr wrap="square" lIns="0" tIns="0" rIns="0" bIns="0" anchor="t">
+          <a:bodyPr wrap="square" anchor="t" lIns="0" rIns="0" tIns="0" bIns="0">
             <a:spAutoFit/>
           </a:bodyPr>
           <a:lstStyle/>
@@ -9942,7 +9881,7 @@
           <a:noFill/>
         </p:spPr>
         <p:txBody>
-          <a:bodyPr wrap="square" lIns="0" tIns="0" rIns="0" bIns="0" anchor="t">
+          <a:bodyPr wrap="square" anchor="t" lIns="0" rIns="0" tIns="0" bIns="0">
             <a:spAutoFit/>
           </a:bodyPr>
           <a:lstStyle/>
@@ -9969,7 +9908,7 @@
 </file>
 
 <file path=ppt/slides/slide8.xml><?xml version="1.0" encoding="utf-8"?>
-<p:sld xmlns:a="http://schemas.openxmlformats.org/drawingml/2006/main" xmlns:r="http://schemas.openxmlformats.org/officeDocument/2006/relationships" xmlns:p="http://schemas.openxmlformats.org/presentationml/2006/main">
+<p:sld xmlns:a="http://schemas.openxmlformats.org/drawingml/2006/main" xmlns:p="http://schemas.openxmlformats.org/presentationml/2006/main" xmlns:r="http://schemas.openxmlformats.org/officeDocument/2006/relationships">
   <p:cSld>
     <p:bg>
       <p:bgPr>
@@ -9985,14 +9924,7 @@
         <p:cNvGrpSpPr/>
         <p:nvPr/>
       </p:nvGrpSpPr>
-      <p:grpSpPr>
-        <a:xfrm>
-          <a:off x="0" y="0"/>
-          <a:ext cx="0" cy="0"/>
-          <a:chOff x="0" y="0"/>
-          <a:chExt cx="0" cy="0"/>
-        </a:xfrm>
-      </p:grpSpPr>
+      <p:grpSpPr/>
       <p:sp>
         <p:nvSpPr>
           <p:cNvPr id="2" name="Rectangle 1"/>
@@ -10034,7 +9966,6 @@
           <a:lstStyle/>
           <a:p>
             <a:pPr algn="ctr"/>
-            <a:endParaRPr/>
           </a:p>
         </p:txBody>
       </p:sp>
@@ -10108,7 +10039,7 @@
           <a:noFill/>
         </p:spPr>
         <p:txBody>
-          <a:bodyPr wrap="square" lIns="0" tIns="0" rIns="0" bIns="0" anchor="ctr">
+          <a:bodyPr wrap="square" anchor="ctr" lIns="0" rIns="0" tIns="0" bIns="0">
             <a:spAutoFit/>
           </a:bodyPr>
           <a:lstStyle/>
@@ -10142,7 +10073,7 @@
           <a:noFill/>
         </p:spPr>
         <p:txBody>
-          <a:bodyPr wrap="square" lIns="0" tIns="0" rIns="0" bIns="0" anchor="t">
+          <a:bodyPr wrap="square" anchor="t" lIns="0" rIns="0" tIns="0" bIns="0">
             <a:spAutoFit/>
           </a:bodyPr>
           <a:lstStyle/>
@@ -10258,7 +10189,16 @@
                 </a:solidFill>
                 <a:latin typeface="Roboto"/>
               </a:rPr>
-              <a:t>■  Every claim ties back to a labelled appendix item.</a:t>
+              <a:t>■  </a:t>
+            </a:r>
+            <a:r>
+              <a:rPr sz="1700" b="1" i="0">
+                <a:solidFill>
+                  <a:srgbClr val="92268F"/>
+                </a:solidFill>
+                <a:latin typeface="Roboto"/>
+              </a:rPr>
+              <a:t>Every claim ties back to a labelled appendix item.</a:t>
             </a:r>
           </a:p>
         </p:txBody>
@@ -10306,7 +10246,6 @@
           <a:lstStyle/>
           <a:p>
             <a:pPr algn="ctr"/>
-            <a:endParaRPr/>
           </a:p>
         </p:txBody>
       </p:sp>
@@ -10327,7 +10266,7 @@
           <a:noFill/>
         </p:spPr>
         <p:txBody>
-          <a:bodyPr wrap="square" lIns="0" tIns="0" rIns="0" bIns="0" anchor="ctr">
+          <a:bodyPr wrap="square" anchor="ctr" lIns="0" rIns="0" tIns="0" bIns="0">
             <a:spAutoFit/>
           </a:bodyPr>
           <a:lstStyle/>
@@ -10385,7 +10324,6 @@
           <a:lstStyle/>
           <a:p>
             <a:pPr algn="ctr"/>
-            <a:endParaRPr/>
           </a:p>
         </p:txBody>
       </p:sp>
@@ -10406,7 +10344,7 @@
           <a:noFill/>
         </p:spPr>
         <p:txBody>
-          <a:bodyPr wrap="square" lIns="0" tIns="0" rIns="0" bIns="0" anchor="t">
+          <a:bodyPr wrap="square" anchor="t" lIns="0" rIns="0" tIns="0" bIns="0">
             <a:spAutoFit/>
           </a:bodyPr>
           <a:lstStyle/>
@@ -10449,7 +10387,7 @@
           <a:noFill/>
         </p:spPr>
         <p:txBody>
-          <a:bodyPr wrap="square" lIns="0" tIns="0" rIns="0" bIns="0" anchor="t">
+          <a:bodyPr wrap="square" anchor="t" lIns="0" rIns="0" tIns="0" bIns="0">
             <a:spAutoFit/>
           </a:bodyPr>
           <a:lstStyle/>
@@ -10476,7 +10414,7 @@
 </file>
 
 <file path=ppt/slides/slide9.xml><?xml version="1.0" encoding="utf-8"?>
-<p:sld xmlns:a="http://schemas.openxmlformats.org/drawingml/2006/main" xmlns:r="http://schemas.openxmlformats.org/officeDocument/2006/relationships" xmlns:p="http://schemas.openxmlformats.org/presentationml/2006/main">
+<p:sld xmlns:a="http://schemas.openxmlformats.org/drawingml/2006/main" xmlns:p="http://schemas.openxmlformats.org/presentationml/2006/main" xmlns:r="http://schemas.openxmlformats.org/officeDocument/2006/relationships">
   <p:cSld>
     <p:bg>
       <p:bgPr>
@@ -10492,14 +10430,7 @@
         <p:cNvGrpSpPr/>
         <p:nvPr/>
       </p:nvGrpSpPr>
-      <p:grpSpPr>
-        <a:xfrm>
-          <a:off x="0" y="0"/>
-          <a:ext cx="0" cy="0"/>
-          <a:chOff x="0" y="0"/>
-          <a:chExt cx="0" cy="0"/>
-        </a:xfrm>
-      </p:grpSpPr>
+      <p:grpSpPr/>
       <p:sp>
         <p:nvSpPr>
           <p:cNvPr id="2" name="TextBox 1"/>
@@ -10517,7 +10448,7 @@
           <a:noFill/>
         </p:spPr>
         <p:txBody>
-          <a:bodyPr wrap="square" lIns="0" tIns="0" rIns="0" bIns="0" anchor="t">
+          <a:bodyPr wrap="square" anchor="t" lIns="0" rIns="0" tIns="0" bIns="0">
             <a:spAutoFit/>
           </a:bodyPr>
           <a:lstStyle/>
@@ -10591,7 +10522,6 @@
           <a:lstStyle/>
           <a:p>
             <a:pPr algn="ctr"/>
-            <a:endParaRPr/>
           </a:p>
         </p:txBody>
       </p:sp>
@@ -10638,7 +10568,6 @@
           <a:lstStyle/>
           <a:p>
             <a:pPr algn="ctr"/>
-            <a:endParaRPr/>
           </a:p>
         </p:txBody>
       </p:sp>
@@ -10683,7 +10612,6 @@
           <a:lstStyle/>
           <a:p>
             <a:pPr algn="ctr"/>
-            <a:endParaRPr/>
           </a:p>
         </p:txBody>
       </p:sp>
@@ -10704,7 +10632,7 @@
           <a:noFill/>
         </p:spPr>
         <p:txBody>
-          <a:bodyPr wrap="square" lIns="0" tIns="0" rIns="0" bIns="0" anchor="ctr">
+          <a:bodyPr wrap="square" anchor="ctr" lIns="0" rIns="0" tIns="0" bIns="0">
             <a:spAutoFit/>
           </a:bodyPr>
           <a:lstStyle/>
@@ -10769,7 +10697,6 @@
           <a:lstStyle/>
           <a:p>
             <a:pPr algn="ctr"/>
-            <a:endParaRPr/>
           </a:p>
         </p:txBody>
       </p:sp>
@@ -10814,7 +10741,6 @@
           <a:lstStyle/>
           <a:p>
             <a:pPr algn="ctr"/>
-            <a:endParaRPr/>
           </a:p>
         </p:txBody>
       </p:sp>
@@ -10835,7 +10761,7 @@
           <a:noFill/>
         </p:spPr>
         <p:txBody>
-          <a:bodyPr wrap="square" lIns="0" tIns="0" rIns="0" bIns="0" anchor="ctr">
+          <a:bodyPr wrap="square" anchor="ctr" lIns="0" rIns="0" tIns="0" bIns="0">
             <a:spAutoFit/>
           </a:bodyPr>
           <a:lstStyle/>
@@ -10900,7 +10826,6 @@
           <a:lstStyle/>
           <a:p>
             <a:pPr algn="ctr"/>
-            <a:endParaRPr/>
           </a:p>
         </p:txBody>
       </p:sp>
@@ -10945,7 +10870,6 @@
           <a:lstStyle/>
           <a:p>
             <a:pPr algn="ctr"/>
-            <a:endParaRPr/>
           </a:p>
         </p:txBody>
       </p:sp>
@@ -10966,7 +10890,7 @@
           <a:noFill/>
         </p:spPr>
         <p:txBody>
-          <a:bodyPr wrap="square" lIns="0" tIns="0" rIns="0" bIns="0" anchor="ctr">
+          <a:bodyPr wrap="square" anchor="ctr" lIns="0" rIns="0" tIns="0" bIns="0">
             <a:spAutoFit/>
           </a:bodyPr>
           <a:lstStyle/>
@@ -11031,7 +10955,6 @@
           <a:lstStyle/>
           <a:p>
             <a:pPr algn="ctr"/>
-            <a:endParaRPr/>
           </a:p>
         </p:txBody>
       </p:sp>
@@ -11076,7 +10999,6 @@
           <a:lstStyle/>
           <a:p>
             <a:pPr algn="ctr"/>
-            <a:endParaRPr/>
           </a:p>
         </p:txBody>
       </p:sp>
@@ -11097,7 +11019,7 @@
           <a:noFill/>
         </p:spPr>
         <p:txBody>
-          <a:bodyPr wrap="square" lIns="0" tIns="0" rIns="0" bIns="0" anchor="ctr">
+          <a:bodyPr wrap="square" anchor="ctr" lIns="0" rIns="0" tIns="0" bIns="0">
             <a:spAutoFit/>
           </a:bodyPr>
           <a:lstStyle/>
@@ -11160,7 +11082,6 @@
           <a:lstStyle/>
           <a:p>
             <a:pPr algn="ctr"/>
-            <a:endParaRPr/>
           </a:p>
         </p:txBody>
       </p:sp>
@@ -11181,7 +11102,7 @@
           <a:noFill/>
         </p:spPr>
         <p:txBody>
-          <a:bodyPr wrap="square" lIns="0" tIns="0" rIns="0" bIns="0" anchor="t">
+          <a:bodyPr wrap="square" anchor="t" lIns="0" rIns="0" tIns="0" bIns="0">
             <a:spAutoFit/>
           </a:bodyPr>
           <a:lstStyle/>
@@ -11224,7 +11145,7 @@
           <a:noFill/>
         </p:spPr>
         <p:txBody>
-          <a:bodyPr wrap="square" lIns="0" tIns="0" rIns="0" bIns="0" anchor="t">
+          <a:bodyPr wrap="square" anchor="t" lIns="0" rIns="0" tIns="0" bIns="0">
             <a:spAutoFit/>
           </a:bodyPr>
           <a:lstStyle/>

--- a/S1-CL1-Cloud-Design-Build/delivery/topic_14/Topic_14_Slides.pptx
+++ b/S1-CL1-Cloud-Design-Build/delivery/topic_14/Topic_14_Slides.pptx
@@ -7,23 +7,23 @@
   <p:sldIdLst>
     <p:sldId id="256" r:id="rId7"/>
     <p:sldId id="257" r:id="rId8"/>
-    <p:sldId id="258" r:id="rId9"/>
-    <p:sldId id="259" r:id="rId10"/>
-    <p:sldId id="260" r:id="rId11"/>
-    <p:sldId id="261" r:id="rId12"/>
-    <p:sldId id="262" r:id="rId13"/>
-    <p:sldId id="263" r:id="rId14"/>
-    <p:sldId id="264" r:id="rId15"/>
-    <p:sldId id="265" r:id="rId16"/>
-    <p:sldId id="266" r:id="rId17"/>
-    <p:sldId id="267" r:id="rId18"/>
-    <p:sldId id="268" r:id="rId19"/>
-    <p:sldId id="269" r:id="rId20"/>
-    <p:sldId id="270" r:id="rId21"/>
-    <p:sldId id="271" r:id="rId22"/>
-    <p:sldId id="272" r:id="rId23"/>
-    <p:sldId id="273" r:id="rId24"/>
-    <p:sldId id="274" r:id="rId25"/>
+    <p:sldId id="258" r:id="rId10"/>
+    <p:sldId id="259" r:id="rId11"/>
+    <p:sldId id="260" r:id="rId12"/>
+    <p:sldId id="261" r:id="rId13"/>
+    <p:sldId id="262" r:id="rId14"/>
+    <p:sldId id="263" r:id="rId15"/>
+    <p:sldId id="264" r:id="rId16"/>
+    <p:sldId id="265" r:id="rId17"/>
+    <p:sldId id="266" r:id="rId18"/>
+    <p:sldId id="267" r:id="rId19"/>
+    <p:sldId id="268" r:id="rId20"/>
+    <p:sldId id="269" r:id="rId21"/>
+    <p:sldId id="270" r:id="rId22"/>
+    <p:sldId id="271" r:id="rId23"/>
+    <p:sldId id="272" r:id="rId24"/>
+    <p:sldId id="273" r:id="rId25"/>
+    <p:sldId id="274" r:id="rId26"/>
   </p:sldIdLst>
   <p:sldSz cx="12191695" cy="6858000" type="screen4x3"/>
   <p:notesSz cx="6858000" cy="9144000"/>
@@ -123,6 +123,1921 @@
     </a:lvl9pPr>
   </p:defaultTextStyle>
 </p:presentation>
+</file>
+
+<file path=ppt/notesMasters/notesMaster1.xml><?xml version="1.0" encoding="utf-8"?>
+<p:notesMaster xmlns:a="http://schemas.openxmlformats.org/drawingml/2006/main" xmlns:p="http://schemas.openxmlformats.org/presentationml/2006/main" xmlns:r="http://schemas.openxmlformats.org/officeDocument/2006/relationships">
+  <p:cSld>
+    <p:bg>
+      <p:bgRef idx="1001">
+        <a:schemeClr val="bg1"/>
+      </p:bgRef>
+    </p:bg>
+    <p:spTree>
+      <p:nvGrpSpPr>
+        <p:cNvPr id="1" name=""/>
+        <p:cNvGrpSpPr/>
+        <p:nvPr/>
+      </p:nvGrpSpPr>
+      <p:grpSpPr>
+        <a:xfrm>
+          <a:off x="0" y="0"/>
+          <a:ext cx="0" cy="0"/>
+          <a:chOff x="0" y="0"/>
+          <a:chExt cx="0" cy="0"/>
+        </a:xfrm>
+      </p:grpSpPr>
+      <p:sp>
+        <p:nvSpPr>
+          <p:cNvPr id="2" name="Header Placeholder 1"/>
+          <p:cNvSpPr>
+            <a:spLocks noGrp="1"/>
+          </p:cNvSpPr>
+          <p:nvPr>
+            <p:ph type="hdr" sz="quarter"/>
+          </p:nvPr>
+        </p:nvSpPr>
+        <p:spPr>
+          <a:xfrm>
+            <a:off x="0" y="0"/>
+            <a:ext cx="2971800" cy="457200"/>
+          </a:xfrm>
+          <a:prstGeom prst="rect">
+            <a:avLst/>
+          </a:prstGeom>
+        </p:spPr>
+        <p:txBody>
+          <a:bodyPr vert="horz" lIns="91440" tIns="45720" rIns="91440" bIns="45720" rtlCol="0"/>
+          <a:lstStyle>
+            <a:lvl1pPr algn="l">
+              <a:defRPr sz="1200"/>
+            </a:lvl1pPr>
+          </a:lstStyle>
+          <a:p>
+            <a:endParaRPr lang="en-US"/>
+          </a:p>
+        </p:txBody>
+      </p:sp>
+      <p:sp>
+        <p:nvSpPr>
+          <p:cNvPr id="3" name="Date Placeholder 2"/>
+          <p:cNvSpPr>
+            <a:spLocks noGrp="1"/>
+          </p:cNvSpPr>
+          <p:nvPr>
+            <p:ph type="dt" idx="1"/>
+          </p:nvPr>
+        </p:nvSpPr>
+        <p:spPr>
+          <a:xfrm>
+            <a:off x="3884613" y="0"/>
+            <a:ext cx="2971800" cy="457200"/>
+          </a:xfrm>
+          <a:prstGeom prst="rect">
+            <a:avLst/>
+          </a:prstGeom>
+        </p:spPr>
+        <p:txBody>
+          <a:bodyPr vert="horz" lIns="91440" tIns="45720" rIns="91440" bIns="45720" rtlCol="0"/>
+          <a:lstStyle>
+            <a:lvl1pPr algn="r">
+              <a:defRPr sz="1200"/>
+            </a:lvl1pPr>
+          </a:lstStyle>
+          <a:p>
+            <a:fld id="{0F89C1C7-3DCD-1040-A9CF-14679D8B5DDD}" type="datetimeFigureOut">
+              <a:rPr lang="en-US" smtClean="0"/>
+              <a:t>10/17/16</a:t>
+            </a:fld>
+            <a:endParaRPr lang="en-US"/>
+          </a:p>
+        </p:txBody>
+      </p:sp>
+      <p:sp>
+        <p:nvSpPr>
+          <p:cNvPr id="4" name="Slide Image Placeholder 3"/>
+          <p:cNvSpPr>
+            <a:spLocks noGrp="1" noRot="1" noChangeAspect="1"/>
+          </p:cNvSpPr>
+          <p:nvPr>
+            <p:ph type="sldImg" idx="2"/>
+          </p:nvPr>
+        </p:nvSpPr>
+        <p:spPr>
+          <a:xfrm>
+            <a:off x="1143000" y="685800"/>
+            <a:ext cx="4572000" cy="3429000"/>
+          </a:xfrm>
+          <a:prstGeom prst="rect">
+            <a:avLst/>
+          </a:prstGeom>
+          <a:noFill/>
+          <a:ln w="12700">
+            <a:solidFill>
+              <a:prstClr val="black"/>
+            </a:solidFill>
+          </a:ln>
+        </p:spPr>
+        <p:txBody>
+          <a:bodyPr vert="horz" lIns="91440" tIns="45720" rIns="91440" bIns="45720" rtlCol="0" anchor="ctr"/>
+          <a:lstStyle/>
+          <a:p>
+            <a:endParaRPr lang="en-US"/>
+          </a:p>
+        </p:txBody>
+      </p:sp>
+      <p:sp>
+        <p:nvSpPr>
+          <p:cNvPr id="5" name="Notes Placeholder 4"/>
+          <p:cNvSpPr>
+            <a:spLocks noGrp="1"/>
+          </p:cNvSpPr>
+          <p:nvPr>
+            <p:ph type="body" sz="quarter" idx="3"/>
+          </p:nvPr>
+        </p:nvSpPr>
+        <p:spPr>
+          <a:xfrm>
+            <a:off x="685800" y="4343400"/>
+            <a:ext cx="5486400" cy="4114800"/>
+          </a:xfrm>
+          <a:prstGeom prst="rect">
+            <a:avLst/>
+          </a:prstGeom>
+        </p:spPr>
+        <p:txBody>
+          <a:bodyPr vert="horz" lIns="91440" tIns="45720" rIns="91440" bIns="45720" rtlCol="0"/>
+          <a:lstStyle/>
+          <a:p>
+            <a:pPr lvl="0"/>
+            <a:r>
+              <a:rPr lang="en-US" smtClean="0"/>
+              <a:t>Click to edit Master text styles</a:t>
+            </a:r>
+          </a:p>
+          <a:p>
+            <a:pPr lvl="1"/>
+            <a:r>
+              <a:rPr lang="en-US" smtClean="0"/>
+              <a:t>Second level</a:t>
+            </a:r>
+          </a:p>
+          <a:p>
+            <a:pPr lvl="2"/>
+            <a:r>
+              <a:rPr lang="en-US" smtClean="0"/>
+              <a:t>Third level</a:t>
+            </a:r>
+          </a:p>
+          <a:p>
+            <a:pPr lvl="3"/>
+            <a:r>
+              <a:rPr lang="en-US" smtClean="0"/>
+              <a:t>Fourth level</a:t>
+            </a:r>
+          </a:p>
+          <a:p>
+            <a:pPr lvl="4"/>
+            <a:r>
+              <a:rPr lang="en-US" smtClean="0"/>
+              <a:t>Fifth level</a:t>
+            </a:r>
+            <a:endParaRPr lang="en-US"/>
+          </a:p>
+        </p:txBody>
+      </p:sp>
+      <p:sp>
+        <p:nvSpPr>
+          <p:cNvPr id="6" name="Footer Placeholder 5"/>
+          <p:cNvSpPr>
+            <a:spLocks noGrp="1"/>
+          </p:cNvSpPr>
+          <p:nvPr>
+            <p:ph type="ftr" sz="quarter" idx="4"/>
+          </p:nvPr>
+        </p:nvSpPr>
+        <p:spPr>
+          <a:xfrm>
+            <a:off x="0" y="8685213"/>
+            <a:ext cx="2971800" cy="457200"/>
+          </a:xfrm>
+          <a:prstGeom prst="rect">
+            <a:avLst/>
+          </a:prstGeom>
+        </p:spPr>
+        <p:txBody>
+          <a:bodyPr vert="horz" lIns="91440" tIns="45720" rIns="91440" bIns="45720" rtlCol="0" anchor="b"/>
+          <a:lstStyle>
+            <a:lvl1pPr algn="l">
+              <a:defRPr sz="1200"/>
+            </a:lvl1pPr>
+          </a:lstStyle>
+          <a:p>
+            <a:endParaRPr lang="en-US"/>
+          </a:p>
+        </p:txBody>
+      </p:sp>
+      <p:sp>
+        <p:nvSpPr>
+          <p:cNvPr id="7" name="Slide Number Placeholder 6"/>
+          <p:cNvSpPr>
+            <a:spLocks noGrp="1"/>
+          </p:cNvSpPr>
+          <p:nvPr>
+            <p:ph type="sldNum" sz="quarter" idx="5"/>
+          </p:nvPr>
+        </p:nvSpPr>
+        <p:spPr>
+          <a:xfrm>
+            <a:off x="3884613" y="8685213"/>
+            <a:ext cx="2971800" cy="457200"/>
+          </a:xfrm>
+          <a:prstGeom prst="rect">
+            <a:avLst/>
+          </a:prstGeom>
+        </p:spPr>
+        <p:txBody>
+          <a:bodyPr vert="horz" lIns="91440" tIns="45720" rIns="91440" bIns="45720" rtlCol="0" anchor="b"/>
+          <a:lstStyle>
+            <a:lvl1pPr algn="r">
+              <a:defRPr sz="1200"/>
+            </a:lvl1pPr>
+          </a:lstStyle>
+          <a:p>
+            <a:fld id="{BB5E49A5-4136-284D-997B-48E1D791AD67}" type="slidenum">
+              <a:rPr lang="en-US" smtClean="0"/>
+              <a:t>‹#›</a:t>
+            </a:fld>
+            <a:endParaRPr lang="en-US"/>
+          </a:p>
+        </p:txBody>
+      </p:sp>
+    </p:spTree>
+    <p:extLst>
+      <p:ext uri="{BB962C8B-B14F-4D97-AF65-F5344CB8AC3E}">
+        <p14:creationId xmlns:p14="http://schemas.microsoft.com/office/powerpoint/2010/main" val="2623252185"/>
+      </p:ext>
+    </p:extLst>
+  </p:cSld>
+  <p:clrMap bg1="lt1" tx1="dk1" bg2="lt2" tx2="dk2" accent1="accent1" accent2="accent2" accent3="accent3" accent4="accent4" accent5="accent5" accent6="accent6" hlink="hlink" folHlink="folHlink"/>
+  <p:notesStyle>
+    <a:lvl1pPr marL="0" algn="l" defTabSz="457200" rtl="0" eaLnBrk="1" latinLnBrk="0" hangingPunct="1">
+      <a:defRPr sz="1200" kern="1200">
+        <a:solidFill>
+          <a:schemeClr val="tx1"/>
+        </a:solidFill>
+        <a:latin typeface="+mn-lt"/>
+        <a:ea typeface="+mn-ea"/>
+        <a:cs typeface="+mn-cs"/>
+      </a:defRPr>
+    </a:lvl1pPr>
+    <a:lvl2pPr marL="457200" algn="l" defTabSz="457200" rtl="0" eaLnBrk="1" latinLnBrk="0" hangingPunct="1">
+      <a:defRPr sz="1200" kern="1200">
+        <a:solidFill>
+          <a:schemeClr val="tx1"/>
+        </a:solidFill>
+        <a:latin typeface="+mn-lt"/>
+        <a:ea typeface="+mn-ea"/>
+        <a:cs typeface="+mn-cs"/>
+      </a:defRPr>
+    </a:lvl2pPr>
+    <a:lvl3pPr marL="914400" algn="l" defTabSz="457200" rtl="0" eaLnBrk="1" latinLnBrk="0" hangingPunct="1">
+      <a:defRPr sz="1200" kern="1200">
+        <a:solidFill>
+          <a:schemeClr val="tx1"/>
+        </a:solidFill>
+        <a:latin typeface="+mn-lt"/>
+        <a:ea typeface="+mn-ea"/>
+        <a:cs typeface="+mn-cs"/>
+      </a:defRPr>
+    </a:lvl3pPr>
+    <a:lvl4pPr marL="1371600" algn="l" defTabSz="457200" rtl="0" eaLnBrk="1" latinLnBrk="0" hangingPunct="1">
+      <a:defRPr sz="1200" kern="1200">
+        <a:solidFill>
+          <a:schemeClr val="tx1"/>
+        </a:solidFill>
+        <a:latin typeface="+mn-lt"/>
+        <a:ea typeface="+mn-ea"/>
+        <a:cs typeface="+mn-cs"/>
+      </a:defRPr>
+    </a:lvl4pPr>
+    <a:lvl5pPr marL="1828800" algn="l" defTabSz="457200" rtl="0" eaLnBrk="1" latinLnBrk="0" hangingPunct="1">
+      <a:defRPr sz="1200" kern="1200">
+        <a:solidFill>
+          <a:schemeClr val="tx1"/>
+        </a:solidFill>
+        <a:latin typeface="+mn-lt"/>
+        <a:ea typeface="+mn-ea"/>
+        <a:cs typeface="+mn-cs"/>
+      </a:defRPr>
+    </a:lvl5pPr>
+    <a:lvl6pPr marL="2286000" algn="l" defTabSz="457200" rtl="0" eaLnBrk="1" latinLnBrk="0" hangingPunct="1">
+      <a:defRPr sz="1200" kern="1200">
+        <a:solidFill>
+          <a:schemeClr val="tx1"/>
+        </a:solidFill>
+        <a:latin typeface="+mn-lt"/>
+        <a:ea typeface="+mn-ea"/>
+        <a:cs typeface="+mn-cs"/>
+      </a:defRPr>
+    </a:lvl6pPr>
+    <a:lvl7pPr marL="2743200" algn="l" defTabSz="457200" rtl="0" eaLnBrk="1" latinLnBrk="0" hangingPunct="1">
+      <a:defRPr sz="1200" kern="1200">
+        <a:solidFill>
+          <a:schemeClr val="tx1"/>
+        </a:solidFill>
+        <a:latin typeface="+mn-lt"/>
+        <a:ea typeface="+mn-ea"/>
+        <a:cs typeface="+mn-cs"/>
+      </a:defRPr>
+    </a:lvl7pPr>
+    <a:lvl8pPr marL="3200400" algn="l" defTabSz="457200" rtl="0" eaLnBrk="1" latinLnBrk="0" hangingPunct="1">
+      <a:defRPr sz="1200" kern="1200">
+        <a:solidFill>
+          <a:schemeClr val="tx1"/>
+        </a:solidFill>
+        <a:latin typeface="+mn-lt"/>
+        <a:ea typeface="+mn-ea"/>
+        <a:cs typeface="+mn-cs"/>
+      </a:defRPr>
+    </a:lvl8pPr>
+    <a:lvl9pPr marL="3657600" algn="l" defTabSz="457200" rtl="0" eaLnBrk="1" latinLnBrk="0" hangingPunct="1">
+      <a:defRPr sz="1200" kern="1200">
+        <a:solidFill>
+          <a:schemeClr val="tx1"/>
+        </a:solidFill>
+        <a:latin typeface="+mn-lt"/>
+        <a:ea typeface="+mn-ea"/>
+        <a:cs typeface="+mn-cs"/>
+      </a:defRPr>
+    </a:lvl9pPr>
+  </p:notesStyle>
+</p:notesMaster>
+</file>
+
+<file path=ppt/notesSlides/notesSlide1.xml><?xml version="1.0" encoding="utf-8"?>
+<p:notes xmlns:a="http://schemas.openxmlformats.org/drawingml/2006/main" xmlns:p="http://schemas.openxmlformats.org/presentationml/2006/main" xmlns:r="http://schemas.openxmlformats.org/officeDocument/2006/relationships">
+  <p:cSld>
+    <p:spTree>
+      <p:nvGrpSpPr>
+        <p:cNvPr id="1" name=""/>
+        <p:cNvGrpSpPr/>
+        <p:nvPr/>
+      </p:nvGrpSpPr>
+      <p:grpSpPr>
+        <a:xfrm>
+          <a:off x="0" y="0"/>
+          <a:ext cx="0" cy="0"/>
+          <a:chOff x="0" y="0"/>
+          <a:chExt cx="0" cy="0"/>
+        </a:xfrm>
+      </p:grpSpPr>
+      <p:sp>
+        <p:nvSpPr>
+          <p:cNvPr id="2" name="Slide Image Placeholder 1"/>
+          <p:cNvSpPr>
+            <a:spLocks noGrp="1"/>
+          </p:cNvSpPr>
+          <p:nvPr>
+            <p:ph type="sldImg" idx="2"/>
+          </p:nvPr>
+        </p:nvSpPr>
+        <p:spPr/>
+      </p:sp>
+      <p:sp>
+        <p:nvSpPr>
+          <p:cNvPr id="3" name="Notes Placeholder 2"/>
+          <p:cNvSpPr>
+            <a:spLocks noGrp="1"/>
+          </p:cNvSpPr>
+          <p:nvPr>
+            <p:ph type="body" idx="3" sz="quarter"/>
+          </p:nvPr>
+        </p:nvSpPr>
+        <p:spPr/>
+        <p:txBody>
+          <a:bodyPr/>
+          <a:lstStyle/>
+          <a:p>
+            <a:r>
+              <a:t>Frame this as the map for the whole Topic — and for the whole course. Set expectations;</a:t>
+            </a:r>
+          </a:p>
+          <a:p>
+            <a:r>
+              <a:t>don't write the report yet.</a:t>
+            </a:r>
+          </a:p>
+          <a:p>
+            <a:r>
+              <a:t>• Where this fits: Topic 13 implemented the HA design and proved it under simulated failure.</a:t>
+            </a:r>
+          </a:p>
+          <a:p>
+            <a:r>
+              <a:t>  Topic 14 turns that evidence into the deliverable and closes the engagement.</a:t>
+            </a:r>
+          </a:p>
+          <a:p>
+            <a:r>
+              <a:t>• The three moves: write the HA Deployment Report (the simulation findings are its heart),</a:t>
+            </a:r>
+          </a:p>
+          <a:p>
+            <a:r>
+              <a:t>  evidence knowledge in context, close out with feedback + sign-off.</a:t>
+            </a:r>
+          </a:p>
+          <a:p>
+            <a:r>
+              <a:t>• Stress the arc (the bolded line): this is the end of AT3 — and of advise → build → harden.</a:t>
+            </a:r>
+          </a:p>
+          <a:p>
+            <a:r>
+              <a:t>  They advised in AT1, built in AT2, hardened in AT3; today they document and sign off.</a:t>
+            </a:r>
+          </a:p>
+          <a:p>
+            <a:r>
+              <a:t>• How they practise: on the Accounting System (Ledgerline), from their own Topic 13 evidence.</a:t>
+            </a:r>
+          </a:p>
+          <a:p>
+            <a:r>
+              <a:t>Misconception to pre-empt: "the build is done, so we're finished." No — an engagement isn't</a:t>
+            </a:r>
+          </a:p>
+          <a:p>
+            <a:r>
+              <a:t>complete until it's documented, the knowledge is evidenced, and the client has signed off.</a:t>
+            </a:r>
+          </a:p>
+          <a:p>
+            <a:r>
+              <a:t>Question to pose: "You've proven the HA design works — why isn't the job done yet?" — draws</a:t>
+            </a:r>
+          </a:p>
+          <a:p>
+            <a:r>
+              <a:t>out that documentation + closure ARE the deliverable, not an afterthought.</a:t>
+            </a:r>
+          </a:p>
+          <a:p>
+            <a:r>
+              <a:t>UoC/AT3 tie: AT3 = ICTCLD502; this Topic evidences PC 3.5, 4.6, 5.2, 5.3, KE 4 and PE 1 — the</a:t>
+            </a:r>
+          </a:p>
+          <a:p>
+            <a:r>
+              <a:t>whole finalise-and-document end of the unit.</a:t>
+            </a:r>
+          </a:p>
+        </p:txBody>
+      </p:sp>
+      <p:sp>
+        <p:nvSpPr>
+          <p:cNvPr id="4" name="Slide Number Placeholder 3"/>
+          <p:cNvSpPr>
+            <a:spLocks noGrp="1"/>
+          </p:cNvSpPr>
+          <p:nvPr>
+            <p:ph type="sldNum" idx="5" sz="quarter"/>
+          </p:nvPr>
+        </p:nvSpPr>
+        <p:spPr/>
+      </p:sp>
+    </p:spTree>
+  </p:cSld>
+  <p:clrMapOvr>
+    <a:masterClrMapping/>
+  </p:clrMapOvr>
+</p:notes>
+</file>
+
+<file path=ppt/notesSlides/notesSlide10.xml><?xml version="1.0" encoding="utf-8"?>
+<p:notes xmlns:a="http://schemas.openxmlformats.org/drawingml/2006/main" xmlns:p="http://schemas.openxmlformats.org/presentationml/2006/main" xmlns:r="http://schemas.openxmlformats.org/officeDocument/2006/relationships">
+  <p:cSld>
+    <p:spTree>
+      <p:nvGrpSpPr>
+        <p:cNvPr id="1" name=""/>
+        <p:cNvGrpSpPr/>
+        <p:nvPr/>
+      </p:nvGrpSpPr>
+      <p:grpSpPr>
+        <a:xfrm>
+          <a:off x="0" y="0"/>
+          <a:ext cx="0" cy="0"/>
+          <a:chOff x="0" y="0"/>
+          <a:chExt cx="0" cy="0"/>
+        </a:xfrm>
+      </p:grpSpPr>
+      <p:sp>
+        <p:nvSpPr>
+          <p:cNvPr id="2" name="Slide Image Placeholder 1"/>
+          <p:cNvSpPr>
+            <a:spLocks noGrp="1"/>
+          </p:cNvSpPr>
+          <p:nvPr>
+            <p:ph type="sldImg" idx="2"/>
+          </p:nvPr>
+        </p:nvSpPr>
+        <p:spPr/>
+      </p:sp>
+      <p:sp>
+        <p:nvSpPr>
+          <p:cNvPr id="3" name="Notes Placeholder 2"/>
+          <p:cNvSpPr>
+            <a:spLocks noGrp="1"/>
+          </p:cNvSpPr>
+          <p:nvPr>
+            <p:ph type="body" idx="3" sz="quarter"/>
+          </p:nvPr>
+        </p:nvSpPr>
+        <p:spPr/>
+        <p:txBody>
+          <a:bodyPr/>
+          <a:lstStyle/>
+          <a:p>
+            <a:r>
+              <a:t>Teach reflection as a genuine review — short slide, but the distinction matters and it's</a:t>
+            </a:r>
+          </a:p>
+          <a:p>
+            <a:r>
+              <a:t>assessed.</a:t>
+            </a:r>
+          </a:p>
+          <a:p>
+            <a:r>
+              <a:t>• What it is: an honest reflection on the HA engagement — what worked, what you'd do</a:t>
+            </a:r>
+          </a:p>
+          <a:p>
+            <a:r>
+              <a:t>  differently, what you learned.</a:t>
+            </a:r>
+          </a:p>
+          <a:p>
+            <a:r>
+              <a:t>• The key move (bolded): a reflection is a REVIEW, not a summary of what you did. "I built a</a:t>
+            </a:r>
+          </a:p>
+          <a:p>
+            <a:r>
+              <a:t>  Multi-AZ database" is a summary; "Multi-AZ was the right call because… but I'd test failover</a:t>
+            </a:r>
+          </a:p>
+          <a:p>
+            <a:r>
+              <a:t>  earlier next time" is a reflection.</a:t>
+            </a:r>
+          </a:p>
+          <a:p>
+            <a:r>
+              <a:t>• Frame the value: it's how you improve the next engagement — and it's marked (Appendix D).</a:t>
+            </a:r>
+          </a:p>
+          <a:p>
+            <a:r>
+              <a:t>Misconception to pre-empt: "reflection = restate the tasks I completed." No — that's a summary;</a:t>
+            </a:r>
+          </a:p>
+          <a:p>
+            <a:r>
+              <a:t>reflection evaluates the choices and names what you'd change.</a:t>
+            </a:r>
+          </a:p>
+          <a:p>
+            <a:r>
+              <a:t>Question to pose: "What's one thing about your HA build you'd do differently — and why?" (models</a:t>
+            </a:r>
+          </a:p>
+          <a:p>
+            <a:r>
+              <a:t>the evaluative move the reflection wants).</a:t>
+            </a:r>
+          </a:p>
+          <a:p>
+            <a:r>
+              <a:t>UoC/AT3 tie: part of AT3's evidence (Appendix D); supports the finalise element and demonstrates</a:t>
+            </a:r>
+          </a:p>
+          <a:p>
+            <a:r>
+              <a:t>the reflective practice the unit expects.</a:t>
+            </a:r>
+          </a:p>
+        </p:txBody>
+      </p:sp>
+      <p:sp>
+        <p:nvSpPr>
+          <p:cNvPr id="4" name="Slide Number Placeholder 3"/>
+          <p:cNvSpPr>
+            <a:spLocks noGrp="1"/>
+          </p:cNvSpPr>
+          <p:nvPr>
+            <p:ph type="sldNum" idx="5" sz="quarter"/>
+          </p:nvPr>
+        </p:nvSpPr>
+        <p:spPr/>
+      </p:sp>
+    </p:spTree>
+  </p:cSld>
+  <p:clrMapOvr>
+    <a:masterClrMapping/>
+  </p:clrMapOvr>
+</p:notes>
+</file>
+
+<file path=ppt/notesSlides/notesSlide11.xml><?xml version="1.0" encoding="utf-8"?>
+<p:notes xmlns:a="http://schemas.openxmlformats.org/drawingml/2006/main" xmlns:p="http://schemas.openxmlformats.org/presentationml/2006/main" xmlns:r="http://schemas.openxmlformats.org/officeDocument/2006/relationships">
+  <p:cSld>
+    <p:spTree>
+      <p:nvGrpSpPr>
+        <p:cNvPr id="1" name=""/>
+        <p:cNvGrpSpPr/>
+        <p:nvPr/>
+      </p:nvGrpSpPr>
+      <p:grpSpPr>
+        <a:xfrm>
+          <a:off x="0" y="0"/>
+          <a:ext cx="0" cy="0"/>
+          <a:chOff x="0" y="0"/>
+          <a:chExt cx="0" cy="0"/>
+        </a:xfrm>
+      </p:grpSpPr>
+      <p:sp>
+        <p:nvSpPr>
+          <p:cNvPr id="2" name="Slide Image Placeholder 1"/>
+          <p:cNvSpPr>
+            <a:spLocks noGrp="1"/>
+          </p:cNvSpPr>
+          <p:nvPr>
+            <p:ph type="sldImg" idx="2"/>
+          </p:nvPr>
+        </p:nvSpPr>
+        <p:spPr/>
+      </p:sp>
+      <p:sp>
+        <p:nvSpPr>
+          <p:cNvPr id="3" name="Notes Placeholder 2"/>
+          <p:cNvSpPr>
+            <a:spLocks noGrp="1"/>
+          </p:cNvSpPr>
+          <p:nvPr>
+            <p:ph type="body" idx="3" sz="quarter"/>
+          </p:nvPr>
+        </p:nvSpPr>
+        <p:spPr/>
+        <p:txBody>
+          <a:bodyPr/>
+          <a:lstStyle/>
+          <a:p>
+            <a:r>
+              <a:t>Facilitation — the Section 3 practice; the final activity of the Topic and the course. They</a:t>
+            </a:r>
+          </a:p>
+          <a:p>
+            <a:r>
+              <a:t>formally close the practice engagement.</a:t>
+            </a:r>
+          </a:p>
+          <a:p>
+            <a:r>
+              <a:t>Tell students: "Finalise the practice engagement. Seek feedback on your report and record your</a:t>
+            </a:r>
+          </a:p>
+          <a:p>
+            <a:r>
+              <a:t>response, obtain and record final sign-off, then write your honest reflection."</a:t>
+            </a:r>
+          </a:p>
+          <a:p>
+            <a:r>
+              <a:t>Steps:</a:t>
+            </a:r>
+          </a:p>
+          <a:p>
+            <a:r>
+              <a:t>1. Seek feedback on your report and record your response (§7.5).</a:t>
+            </a:r>
+          </a:p>
+          <a:p>
+            <a:r>
+              <a:t>2. Obtain and record final sign-off (§7.6).</a:t>
+            </a:r>
+          </a:p>
+          <a:p>
+            <a:r>
+              <a:t>3. Write your reflection (Appendix D) — a review, not a summary.</a:t>
+            </a:r>
+          </a:p>
+          <a:p>
+            <a:r>
+              <a:t>Must produce: recorded feedback + response, a recorded sign-off, and a written reflection.</a:t>
+            </a:r>
+          </a:p>
+          <a:p>
+            <a:r>
+              <a:t>Timing: ~20 min. Where they get stuck: reflection reads as a task summary — circulate and ask</a:t>
+            </a:r>
+          </a:p>
+          <a:p>
+            <a:r>
+              <a:t>"what would you CHANGE?"; and sign-off with no feedback recorded first — remind them of the</a:t>
+            </a:r>
+          </a:p>
+          <a:p>
+            <a:r>
+              <a:t>5.2 → 5.3 order.</a:t>
+            </a:r>
+          </a:p>
+          <a:p>
+            <a:r>
+              <a:t>Share-back: take one reflection and ask whether it evaluates or just restates.</a:t>
+            </a:r>
+          </a:p>
+          <a:p>
+            <a:r>
+              <a:t>No-leakage note: practice closure on Ledgerline; AT3 assesses the same finalise skill on the</a:t>
+            </a:r>
+          </a:p>
+          <a:p>
+            <a:r>
+              <a:t>LMS engagement — comparable, not identical. This closes the practice arc that mirrors the</a:t>
+            </a:r>
+          </a:p>
+          <a:p>
+            <a:r>
+              <a:t>assessed one.</a:t>
+            </a:r>
+          </a:p>
+        </p:txBody>
+      </p:sp>
+      <p:sp>
+        <p:nvSpPr>
+          <p:cNvPr id="4" name="Slide Number Placeholder 3"/>
+          <p:cNvSpPr>
+            <a:spLocks noGrp="1"/>
+          </p:cNvSpPr>
+          <p:nvPr>
+            <p:ph type="sldNum" idx="5" sz="quarter"/>
+          </p:nvPr>
+        </p:nvSpPr>
+        <p:spPr/>
+      </p:sp>
+    </p:spTree>
+  </p:cSld>
+  <p:clrMapOvr>
+    <a:masterClrMapping/>
+  </p:clrMapOvr>
+</p:notes>
+</file>
+
+<file path=ppt/notesSlides/notesSlide2.xml><?xml version="1.0" encoding="utf-8"?>
+<p:notes xmlns:a="http://schemas.openxmlformats.org/drawingml/2006/main" xmlns:p="http://schemas.openxmlformats.org/presentationml/2006/main" xmlns:r="http://schemas.openxmlformats.org/officeDocument/2006/relationships">
+  <p:cSld>
+    <p:spTree>
+      <p:nvGrpSpPr>
+        <p:cNvPr id="1" name=""/>
+        <p:cNvGrpSpPr/>
+        <p:nvPr/>
+      </p:nvGrpSpPr>
+      <p:grpSpPr>
+        <a:xfrm>
+          <a:off x="0" y="0"/>
+          <a:ext cx="0" cy="0"/>
+          <a:chOff x="0" y="0"/>
+          <a:chExt cx="0" cy="0"/>
+        </a:xfrm>
+      </p:grpSpPr>
+      <p:sp>
+        <p:nvSpPr>
+          <p:cNvPr id="2" name="Slide Image Placeholder 1"/>
+          <p:cNvSpPr>
+            <a:spLocks noGrp="1"/>
+          </p:cNvSpPr>
+          <p:nvPr>
+            <p:ph type="sldImg" idx="2"/>
+          </p:nvPr>
+        </p:nvSpPr>
+        <p:spPr/>
+      </p:sp>
+      <p:sp>
+        <p:nvSpPr>
+          <p:cNvPr id="3" name="Notes Placeholder 2"/>
+          <p:cNvSpPr>
+            <a:spLocks noGrp="1"/>
+          </p:cNvSpPr>
+          <p:nvPr>
+            <p:ph type="body" idx="3" sz="quarter"/>
+          </p:nvPr>
+        </p:nvSpPr>
+        <p:spPr/>
+        <p:txBody>
+          <a:bodyPr/>
+          <a:lstStyle/>
+          <a:p>
+            <a:r>
+              <a:t>Teach evidence discipline first — it's the foundation the whole report cites. Callback hard</a:t>
+            </a:r>
+          </a:p>
+          <a:p>
+            <a:r>
+              <a:t>to Topic 10 (AT2): same skill, the HA deliverable.</a:t>
+            </a:r>
+          </a:p>
+          <a:p>
+            <a:r>
+              <a:t>• Walk the three appendices: A — build screenshots; B — configuration exports; C — test &amp;</a:t>
+            </a:r>
+          </a:p>
+          <a:p>
+            <a:r>
+              <a:t>  simulation evidence. Everything captured in Topic 13 gets organised here.</a:t>
+            </a:r>
+          </a:p>
+          <a:p>
+            <a:r>
+              <a:t>• The key move (bolded): label and number each item so the narrative can cite it. An</a:t>
+            </a:r>
+          </a:p>
+          <a:p>
+            <a:r>
+              <a:t>  unlabelled screenshot proves nothing; a cited one turns a claim into proof.</a:t>
+            </a:r>
+          </a:p>
+          <a:p>
+            <a:r>
+              <a:t>• Frame traceability as the assessor's job made easy — every §6 finding points to a numbered</a:t>
+            </a:r>
+          </a:p>
+          <a:p>
+            <a:r>
+              <a:t>  appendix item they can check.</a:t>
+            </a:r>
+          </a:p>
+          <a:p>
+            <a:r>
+              <a:t>Misconception to pre-empt: "the appendices are a dumping ground for screenshots." No — they're</a:t>
+            </a:r>
+          </a:p>
+          <a:p>
+            <a:r>
+              <a:t>a curated, labelled evidence set the narrative references by number; unorganised evidence is</a:t>
+            </a:r>
+          </a:p>
+          <a:p>
+            <a:r>
+              <a:t>unusable evidence.</a:t>
+            </a:r>
+          </a:p>
+          <a:p>
+            <a:r>
+              <a:t>Question to pose: "If you write 'the failover succeeded' in §6, what in the appendices has to</a:t>
+            </a:r>
+          </a:p>
+          <a:p>
+            <a:r>
+              <a:t>be there for an assessor to believe you?" (the labelled simulation evidence in Appendix C).</a:t>
+            </a:r>
+          </a:p>
+          <a:p>
+            <a:r>
+              <a:t>UoC/AT3 tie: supports PC 3.5 (document the implemented design) and PE 1 — the documented</a:t>
+            </a:r>
+          </a:p>
+          <a:p>
+            <a:r>
+              <a:t>fault-tolerant infrastructure rests on traceable evidence.</a:t>
+            </a:r>
+          </a:p>
+        </p:txBody>
+      </p:sp>
+      <p:sp>
+        <p:nvSpPr>
+          <p:cNvPr id="4" name="Slide Number Placeholder 3"/>
+          <p:cNvSpPr>
+            <a:spLocks noGrp="1"/>
+          </p:cNvSpPr>
+          <p:nvPr>
+            <p:ph type="sldNum" idx="5" sz="quarter"/>
+          </p:nvPr>
+        </p:nvSpPr>
+        <p:spPr/>
+      </p:sp>
+    </p:spTree>
+  </p:cSld>
+  <p:clrMapOvr>
+    <a:masterClrMapping/>
+  </p:clrMapOvr>
+</p:notes>
+</file>
+
+<file path=ppt/notesSlides/notesSlide3.xml><?xml version="1.0" encoding="utf-8"?>
+<p:notes xmlns:a="http://schemas.openxmlformats.org/drawingml/2006/main" xmlns:p="http://schemas.openxmlformats.org/presentationml/2006/main" xmlns:r="http://schemas.openxmlformats.org/officeDocument/2006/relationships">
+  <p:cSld>
+    <p:spTree>
+      <p:nvGrpSpPr>
+        <p:cNvPr id="1" name=""/>
+        <p:cNvGrpSpPr/>
+        <p:nvPr/>
+      </p:nvGrpSpPr>
+      <p:grpSpPr>
+        <a:xfrm>
+          <a:off x="0" y="0"/>
+          <a:ext cx="0" cy="0"/>
+          <a:chOff x="0" y="0"/>
+          <a:chExt cx="0" cy="0"/>
+        </a:xfrm>
+      </p:grpSpPr>
+      <p:sp>
+        <p:nvSpPr>
+          <p:cNvPr id="2" name="Slide Image Placeholder 1"/>
+          <p:cNvSpPr>
+            <a:spLocks noGrp="1"/>
+          </p:cNvSpPr>
+          <p:nvPr>
+            <p:ph type="sldImg" idx="2"/>
+          </p:nvPr>
+        </p:nvSpPr>
+        <p:spPr/>
+      </p:sp>
+      <p:sp>
+        <p:nvSpPr>
+          <p:cNvPr id="3" name="Notes Placeholder 2"/>
+          <p:cNvSpPr>
+            <a:spLocks noGrp="1"/>
+          </p:cNvSpPr>
+          <p:nvPr>
+            <p:ph type="body" idx="3" sz="quarter"/>
+          </p:nvPr>
+        </p:nvSpPr>
+        <p:spPr/>
+        <p:txBody>
+          <a:bodyPr/>
+          <a:lstStyle/>
+          <a:p>
+            <a:r>
+              <a:t>Teach the template as the deliverable's skeleton — students write to it, so walk it</a:t>
+            </a:r>
+          </a:p>
+          <a:p>
+            <a:r>
+              <a:t>deliberately.</a:t>
+            </a:r>
+          </a:p>
+          <a:p>
+            <a:r>
+              <a:t>• Walk the sections: §1 Executive Summary · §2 Engagement Context · §3 Scope (the maintenance</a:t>
+            </a:r>
+          </a:p>
+          <a:p>
+            <a:r>
+              <a:t>  window) · §4 Build/Change Narrative · §5 Configuration Decisions · §6 Testing, Simulation &amp;</a:t>
+            </a:r>
+          </a:p>
+          <a:p>
+            <a:r>
+              <a:t>  Validation · §7 Operational Handover · §8 Knowledge Evidence.</a:t>
+            </a:r>
+          </a:p>
+          <a:p>
+            <a:r>
+              <a:t>• Appendices A–D: A screenshots · B config exports · C test/simulation evidence · D reflections.</a:t>
+            </a:r>
+          </a:p>
+          <a:p>
+            <a:r>
+              <a:t>• Flag which sections carry the weight: §6 (the heart, next slide) and §8 (contextual KE, C2).</a:t>
+            </a:r>
+          </a:p>
+          <a:p>
+            <a:r>
+              <a:t>  §1 is written last.</a:t>
+            </a:r>
+          </a:p>
+          <a:p>
+            <a:r>
+              <a:t>Misconception to pre-empt: "this is a different report from AT2." It's the same template shape</a:t>
+            </a:r>
+          </a:p>
+          <a:p>
+            <a:r>
+              <a:t>as the AT2 Deployment Report — the content is the HA change, not the whole build. Reassure</a:t>
+            </a:r>
+          </a:p>
+          <a:p>
+            <a:r>
+              <a:t>them they've done this once already.</a:t>
+            </a:r>
+          </a:p>
+          <a:p>
+            <a:r>
+              <a:t>Question to pose: "Which section does an assessor turn to first to see the HA design actually</a:t>
+            </a:r>
+          </a:p>
+          <a:p>
+            <a:r>
+              <a:t>works?" (§6 — the proof).</a:t>
+            </a:r>
+          </a:p>
+          <a:p>
+            <a:r>
+              <a:t>UoC/AT3 tie: PC 3.5 — documenting the implemented HA design to the required structure; the</a:t>
+            </a:r>
+          </a:p>
+          <a:p>
+            <a:r>
+              <a:t>report as a whole is AT3's marking home.</a:t>
+            </a:r>
+          </a:p>
+        </p:txBody>
+      </p:sp>
+      <p:sp>
+        <p:nvSpPr>
+          <p:cNvPr id="4" name="Slide Number Placeholder 3"/>
+          <p:cNvSpPr>
+            <a:spLocks noGrp="1"/>
+          </p:cNvSpPr>
+          <p:nvPr>
+            <p:ph type="sldNum" idx="5" sz="quarter"/>
+          </p:nvPr>
+        </p:nvSpPr>
+        <p:spPr/>
+      </p:sp>
+    </p:spTree>
+  </p:cSld>
+  <p:clrMapOvr>
+    <a:masterClrMapping/>
+  </p:clrMapOvr>
+</p:notes>
+</file>
+
+<file path=ppt/notesSlides/notesSlide4.xml><?xml version="1.0" encoding="utf-8"?>
+<p:notes xmlns:a="http://schemas.openxmlformats.org/drawingml/2006/main" xmlns:p="http://schemas.openxmlformats.org/presentationml/2006/main" xmlns:r="http://schemas.openxmlformats.org/officeDocument/2006/relationships">
+  <p:cSld>
+    <p:spTree>
+      <p:nvGrpSpPr>
+        <p:cNvPr id="1" name=""/>
+        <p:cNvGrpSpPr/>
+        <p:nvPr/>
+      </p:nvGrpSpPr>
+      <p:grpSpPr>
+        <a:xfrm>
+          <a:off x="0" y="0"/>
+          <a:ext cx="0" cy="0"/>
+          <a:chOff x="0" y="0"/>
+          <a:chExt cx="0" cy="0"/>
+        </a:xfrm>
+      </p:grpSpPr>
+      <p:sp>
+        <p:nvSpPr>
+          <p:cNvPr id="2" name="Slide Image Placeholder 1"/>
+          <p:cNvSpPr>
+            <a:spLocks noGrp="1"/>
+          </p:cNvSpPr>
+          <p:nvPr>
+            <p:ph type="sldImg" idx="2"/>
+          </p:nvPr>
+        </p:nvSpPr>
+        <p:spPr/>
+      </p:sp>
+      <p:sp>
+        <p:nvSpPr>
+          <p:cNvPr id="3" name="Notes Placeholder 2"/>
+          <p:cNvSpPr>
+            <a:spLocks noGrp="1"/>
+          </p:cNvSpPr>
+          <p:nvPr>
+            <p:ph type="body" idx="3" sz="quarter"/>
+          </p:nvPr>
+        </p:nvSpPr>
+        <p:spPr/>
+        <p:txBody>
+          <a:bodyPr/>
+          <a:lstStyle/>
+          <a:p>
+            <a:r>
+              <a:t>This is the highest-value slide of the Topic — §6 is what AT3 is marked on. Give it the weight.</a:t>
+            </a:r>
+          </a:p>
+          <a:p>
+            <a:r>
+              <a:t>• Walk what §6 holds: the failure simulation, the resize simulation, and the availability you</a:t>
+            </a:r>
+          </a:p>
+          <a:p>
+            <a:r>
+              <a:t>  measured — all from the Topic 13 work.</a:t>
+            </a:r>
+          </a:p>
+          <a:p>
+            <a:r>
+              <a:t>• The key move (bolded): compare the findings to the design's recovery objectives, and record</a:t>
+            </a:r>
+          </a:p>
+          <a:p>
+            <a:r>
+              <a:t>  any adjustments you made. It's not "here's what happened" — it's "here's what happened,</a:t>
+            </a:r>
+          </a:p>
+          <a:p>
+            <a:r>
+              <a:t>  measured against what we designed for."</a:t>
+            </a:r>
+          </a:p>
+          <a:p>
+            <a:r>
+              <a:t>• Drive the point: this section is the evidence the HA design actually delivers fault</a:t>
+            </a:r>
+          </a:p>
+          <a:p>
+            <a:r>
+              <a:t>  tolerance; everything else in the report supports it.</a:t>
+            </a:r>
+          </a:p>
+          <a:p>
+            <a:r>
+              <a:t>Misconception to pre-empt: "§6 is a description of the tests I ran." No — it's an evaluation:</a:t>
+            </a:r>
+          </a:p>
+          <a:p>
+            <a:r>
+              <a:t>did the results MEET the recovery objectives, and if not, what did you change? Narration</a:t>
+            </a:r>
+          </a:p>
+          <a:p>
+            <a:r>
+              <a:t>without comparison earns little.</a:t>
+            </a:r>
+          </a:p>
+          <a:p>
+            <a:r>
+              <a:t>Question to pose: "Your failover took longer than the design's recovery target — does that go</a:t>
+            </a:r>
+          </a:p>
+          <a:p>
+            <a:r>
+              <a:t>in §6, and how do you write it up?" (yes — record the gap and the adjustment; honesty is</a:t>
+            </a:r>
+          </a:p>
+          <a:p>
+            <a:r>
+              <a:t>evidence).</a:t>
+            </a:r>
+          </a:p>
+          <a:p>
+            <a:r>
+              <a:t>UoC/AT3 tie: PC 4.6 (compare and document simulation findings against the documented design) —</a:t>
+            </a:r>
+          </a:p>
+          <a:p>
+            <a:r>
+              <a:t>produced in Topic 13, written up here; the centre of AT3's mark.</a:t>
+            </a:r>
+          </a:p>
+        </p:txBody>
+      </p:sp>
+      <p:sp>
+        <p:nvSpPr>
+          <p:cNvPr id="4" name="Slide Number Placeholder 3"/>
+          <p:cNvSpPr>
+            <a:spLocks noGrp="1"/>
+          </p:cNvSpPr>
+          <p:nvPr>
+            <p:ph type="sldNum" idx="5" sz="quarter"/>
+          </p:nvPr>
+        </p:nvSpPr>
+        <p:spPr/>
+      </p:sp>
+    </p:spTree>
+  </p:cSld>
+  <p:clrMapOvr>
+    <a:masterClrMapping/>
+  </p:clrMapOvr>
+</p:notes>
+</file>
+
+<file path=ppt/notesSlides/notesSlide5.xml><?xml version="1.0" encoding="utf-8"?>
+<p:notes xmlns:a="http://schemas.openxmlformats.org/drawingml/2006/main" xmlns:p="http://schemas.openxmlformats.org/presentationml/2006/main" xmlns:r="http://schemas.openxmlformats.org/officeDocument/2006/relationships">
+  <p:cSld>
+    <p:spTree>
+      <p:nvGrpSpPr>
+        <p:cNvPr id="1" name=""/>
+        <p:cNvGrpSpPr/>
+        <p:nvPr/>
+      </p:nvGrpSpPr>
+      <p:grpSpPr>
+        <a:xfrm>
+          <a:off x="0" y="0"/>
+          <a:ext cx="0" cy="0"/>
+          <a:chOff x="0" y="0"/>
+          <a:chExt cx="0" cy="0"/>
+        </a:xfrm>
+      </p:grpSpPr>
+      <p:sp>
+        <p:nvSpPr>
+          <p:cNvPr id="2" name="Slide Image Placeholder 1"/>
+          <p:cNvSpPr>
+            <a:spLocks noGrp="1"/>
+          </p:cNvSpPr>
+          <p:nvPr>
+            <p:ph type="sldImg" idx="2"/>
+          </p:nvPr>
+        </p:nvSpPr>
+        <p:spPr/>
+      </p:sp>
+      <p:sp>
+        <p:nvSpPr>
+          <p:cNvPr id="3" name="Notes Placeholder 2"/>
+          <p:cNvSpPr>
+            <a:spLocks noGrp="1"/>
+          </p:cNvSpPr>
+          <p:nvPr>
+            <p:ph type="body" idx="3" sz="quarter"/>
+          </p:nvPr>
+        </p:nvSpPr>
+        <p:spPr/>
+        <p:txBody>
+          <a:bodyPr/>
+          <a:lstStyle/>
+          <a:p>
+            <a:r>
+              <a:t>Teach the supporting sections — the report body around §6. Keep the pace up; these frame the</a:t>
+            </a:r>
+          </a:p>
+          <a:p>
+            <a:r>
+              <a:t>heart.</a:t>
+            </a:r>
+          </a:p>
+          <a:p>
+            <a:r>
+              <a:t>• §4 the Build/Change Narrative: the HA changes FROM the baseline — cross-AZ network, cross-AZ</a:t>
+            </a:r>
+          </a:p>
+          <a:p>
+            <a:r>
+              <a:t>  ASG + ALB, Multi-AZ database — cross-referencing the appendices as it goes.</a:t>
+            </a:r>
+          </a:p>
+          <a:p>
+            <a:r>
+              <a:t>• §5 the configuration decisions, each justified (why Multi-AZ, why cross-AZ scaling).</a:t>
+            </a:r>
+          </a:p>
+          <a:p>
+            <a:r>
+              <a:t>• §7 Operational Handover: what YAT ICT now runs — the HA-tuned alarms, the failover behaviour,</a:t>
+            </a:r>
+          </a:p>
+          <a:p>
+            <a:r>
+              <a:t>  what to watch. This is what the client operates after you leave.</a:t>
+            </a:r>
+          </a:p>
+          <a:p>
+            <a:r>
+              <a:t>• §1 Executive Summary (bolded): write it LAST — you can't summarise a report you haven't</a:t>
+            </a:r>
+          </a:p>
+          <a:p>
+            <a:r>
+              <a:t>  written.</a:t>
+            </a:r>
+          </a:p>
+          <a:p>
+            <a:r>
+              <a:t>Misconception to pre-empt: "§4 is the whole build from scratch." No — it's the HA CHANGES from</a:t>
+            </a:r>
+          </a:p>
+          <a:p>
+            <a:r>
+              <a:t>the AT2 baseline, not a rebuild narrative; the baseline is assumed, the delta is documented.</a:t>
+            </a:r>
+          </a:p>
+          <a:p>
+            <a:r>
+              <a:t>Question to pose: "§7 hands the system to YAT's ICT team — what do they need to know that they</a:t>
+            </a:r>
+          </a:p>
+          <a:p>
+            <a:r>
+              <a:t>didn't before the HA work?" (the failover behaviour and the new alarms to watch).</a:t>
+            </a:r>
+          </a:p>
+          <a:p>
+            <a:r>
+              <a:t>UoC/AT3 tie: PC 3.5 (as-built documentation) and PE 1 (the fault-tolerant infrastructure</a:t>
+            </a:r>
+          </a:p>
+          <a:p>
+            <a:r>
+              <a:t>documented in full).</a:t>
+            </a:r>
+          </a:p>
+        </p:txBody>
+      </p:sp>
+      <p:sp>
+        <p:nvSpPr>
+          <p:cNvPr id="4" name="Slide Number Placeholder 3"/>
+          <p:cNvSpPr>
+            <a:spLocks noGrp="1"/>
+          </p:cNvSpPr>
+          <p:nvPr>
+            <p:ph type="sldNum" idx="5" sz="quarter"/>
+          </p:nvPr>
+        </p:nvSpPr>
+        <p:spPr/>
+      </p:sp>
+    </p:spTree>
+  </p:cSld>
+  <p:clrMapOvr>
+    <a:masterClrMapping/>
+  </p:clrMapOvr>
+</p:notes>
+</file>
+
+<file path=ppt/notesSlides/notesSlide6.xml><?xml version="1.0" encoding="utf-8"?>
+<p:notes xmlns:a="http://schemas.openxmlformats.org/drawingml/2006/main" xmlns:p="http://schemas.openxmlformats.org/presentationml/2006/main" xmlns:r="http://schemas.openxmlformats.org/officeDocument/2006/relationships">
+  <p:cSld>
+    <p:spTree>
+      <p:nvGrpSpPr>
+        <p:cNvPr id="1" name=""/>
+        <p:cNvGrpSpPr/>
+        <p:nvPr/>
+      </p:nvGrpSpPr>
+      <p:grpSpPr>
+        <a:xfrm>
+          <a:off x="0" y="0"/>
+          <a:ext cx="0" cy="0"/>
+          <a:chOff x="0" y="0"/>
+          <a:chExt cx="0" cy="0"/>
+        </a:xfrm>
+      </p:grpSpPr>
+      <p:sp>
+        <p:nvSpPr>
+          <p:cNvPr id="2" name="Slide Image Placeholder 1"/>
+          <p:cNvSpPr>
+            <a:spLocks noGrp="1"/>
+          </p:cNvSpPr>
+          <p:nvPr>
+            <p:ph type="sldImg" idx="2"/>
+          </p:nvPr>
+        </p:nvSpPr>
+        <p:spPr/>
+      </p:sp>
+      <p:sp>
+        <p:nvSpPr>
+          <p:cNvPr id="3" name="Notes Placeholder 2"/>
+          <p:cNvSpPr>
+            <a:spLocks noGrp="1"/>
+          </p:cNvSpPr>
+          <p:nvPr>
+            <p:ph type="body" idx="3" sz="quarter"/>
+          </p:nvPr>
+        </p:nvSpPr>
+        <p:spPr/>
+        <p:txBody>
+          <a:bodyPr/>
+          <a:lstStyle/>
+          <a:p>
+            <a:r>
+              <a:t>Facilitation — the Section 1 build task; the main writing activity of the Topic. They assemble</a:t>
+            </a:r>
+          </a:p>
+          <a:p>
+            <a:r>
+              <a:t>the report from their own Topic 13 evidence.</a:t>
+            </a:r>
+          </a:p>
+          <a:p>
+            <a:r>
+              <a:t>Tell students: "Write the HA Deployment Report to the template for the practice engagement.</a:t>
+            </a:r>
+          </a:p>
+          <a:p>
+            <a:r>
+              <a:t>Your Topic 13 evidence and simulation findings are the raw material — organise them into the</a:t>
+            </a:r>
+          </a:p>
+          <a:p>
+            <a:r>
+              <a:t>appendices, then write the narrative that cites them."</a:t>
+            </a:r>
+          </a:p>
+          <a:p>
+            <a:r>
+              <a:t>Steps (put on the board):</a:t>
+            </a:r>
+          </a:p>
+          <a:p>
+            <a:r>
+              <a:t>1. §4 — the HA changes from the baseline.</a:t>
+            </a:r>
+          </a:p>
+          <a:p>
+            <a:r>
+              <a:t>2. §5 — the configuration decisions, justified.</a:t>
+            </a:r>
+          </a:p>
+          <a:p>
+            <a:r>
+              <a:t>3. §6 — your simulation findings, compared to the recovery objectives (the centrepiece).</a:t>
+            </a:r>
+          </a:p>
+          <a:p>
+            <a:r>
+              <a:t>4. Cross-reference Appendices A/B/C; write §7 the handover.</a:t>
+            </a:r>
+          </a:p>
+          <a:p>
+            <a:r>
+              <a:t>Must produce: a drafted report (§4–§7 + organised appendices) where every claim ties back to a</a:t>
+            </a:r>
+          </a:p>
+          <a:p>
+            <a:r>
+              <a:t>labelled appendix item.</a:t>
+            </a:r>
+          </a:p>
+          <a:p>
+            <a:r>
+              <a:t>Timing: ~40 min. Where they get stuck: they narrate §6 without comparing to the design</a:t>
+            </a:r>
+          </a:p>
+          <a:p>
+            <a:r>
+              <a:t>objectives — circulate and push "measured against what?"; and unlabelled evidence — send them</a:t>
+            </a:r>
+          </a:p>
+          <a:p>
+            <a:r>
+              <a:t>back to number it.</a:t>
+            </a:r>
+          </a:p>
+          <a:p>
+            <a:r>
+              <a:t>Share-back: take one §6 write-up and ask the room whether the finding is evidenced by a cited</a:t>
+            </a:r>
+          </a:p>
+          <a:p>
+            <a:r>
+              <a:t>item.</a:t>
+            </a:r>
+          </a:p>
+          <a:p>
+            <a:r>
+              <a:t>No-leakage note: this is the PRACTICE report on Ledgerline; the assessed HA report is built on</a:t>
+            </a:r>
+          </a:p>
+          <a:p>
+            <a:r>
+              <a:t>the LMS in AT3 — comparable, not identical. Keep them on the scenario system here.</a:t>
+            </a:r>
+          </a:p>
+        </p:txBody>
+      </p:sp>
+      <p:sp>
+        <p:nvSpPr>
+          <p:cNvPr id="4" name="Slide Number Placeholder 3"/>
+          <p:cNvSpPr>
+            <a:spLocks noGrp="1"/>
+          </p:cNvSpPr>
+          <p:nvPr>
+            <p:ph type="sldNum" idx="5" sz="quarter"/>
+          </p:nvPr>
+        </p:nvSpPr>
+        <p:spPr/>
+      </p:sp>
+    </p:spTree>
+  </p:cSld>
+  <p:clrMapOvr>
+    <a:masterClrMapping/>
+  </p:clrMapOvr>
+</p:notes>
+</file>
+
+<file path=ppt/notesSlides/notesSlide7.xml><?xml version="1.0" encoding="utf-8"?>
+<p:notes xmlns:a="http://schemas.openxmlformats.org/drawingml/2006/main" xmlns:p="http://schemas.openxmlformats.org/presentationml/2006/main" xmlns:r="http://schemas.openxmlformats.org/officeDocument/2006/relationships">
+  <p:cSld>
+    <p:spTree>
+      <p:nvGrpSpPr>
+        <p:cNvPr id="1" name=""/>
+        <p:cNvGrpSpPr/>
+        <p:nvPr/>
+      </p:nvGrpSpPr>
+      <p:grpSpPr>
+        <a:xfrm>
+          <a:off x="0" y="0"/>
+          <a:ext cx="0" cy="0"/>
+          <a:chOff x="0" y="0"/>
+          <a:chExt cx="0" cy="0"/>
+        </a:xfrm>
+      </p:grpSpPr>
+      <p:sp>
+        <p:nvSpPr>
+          <p:cNvPr id="2" name="Slide Image Placeholder 1"/>
+          <p:cNvSpPr>
+            <a:spLocks noGrp="1"/>
+          </p:cNvSpPr>
+          <p:nvPr>
+            <p:ph type="sldImg" idx="2"/>
+          </p:nvPr>
+        </p:nvSpPr>
+        <p:spPr/>
+      </p:sp>
+      <p:sp>
+        <p:nvSpPr>
+          <p:cNvPr id="3" name="Notes Placeholder 2"/>
+          <p:cNvSpPr>
+            <a:spLocks noGrp="1"/>
+          </p:cNvSpPr>
+          <p:nvPr>
+            <p:ph type="body" idx="3" sz="quarter"/>
+          </p:nvPr>
+        </p:nvSpPr>
+        <p:spPr/>
+        <p:txBody>
+          <a:bodyPr/>
+          <a:lstStyle/>
+          <a:p>
+            <a:r>
+              <a:t>Teach contextual KE — the distinctive move of §8. The knowledge must be grounded, not abstract.</a:t>
+            </a:r>
+          </a:p>
+          <a:p>
+            <a:r>
+              <a:t>• What §8 asks: answer the knowledge questions about high availability — fault tolerance,</a:t>
+            </a:r>
+          </a:p>
+          <a:p>
+            <a:r>
+              <a:t>  recovery objectives, redundancy, the trade-offs.</a:t>
+            </a:r>
+          </a:p>
+          <a:p>
+            <a:r>
+              <a:t>• The key move (bolded): ground every answer in your OWN HA work — cite your design and your</a:t>
+            </a:r>
+          </a:p>
+          <a:p>
+            <a:r>
+              <a:t>  simulation findings, not a textbook definition.</a:t>
+            </a:r>
+          </a:p>
+          <a:p>
+            <a:r>
+              <a:t>• Make it concrete: "Why Multi-AZ for the database?" → "because of this workload and what my</a:t>
+            </a:r>
+          </a:p>
+          <a:p>
+            <a:r>
+              <a:t>  failover simulation showed" — the answer points back at their evidence.</a:t>
+            </a:r>
+          </a:p>
+          <a:p>
+            <a:r>
+              <a:t>Misconception to pre-empt: "knowledge evidence means writing textbook definitions." No —</a:t>
+            </a:r>
+          </a:p>
+          <a:p>
+            <a:r>
+              <a:t>contextual KE means proving you understand HA BY explaining your own design choices; a generic</a:t>
+            </a:r>
+          </a:p>
+          <a:p>
+            <a:r>
+              <a:t>definition shows recall, not applied understanding.</a:t>
+            </a:r>
+          </a:p>
+          <a:p>
+            <a:r>
+              <a:t>Question to pose: "How is 'define fault tolerance' different from 'explain the fault tolerance</a:t>
+            </a:r>
+          </a:p>
+          <a:p>
+            <a:r>
+              <a:t>in YOUR design'?" (the second cites their build; that's what §8 wants).</a:t>
+            </a:r>
+          </a:p>
+          <a:p>
+            <a:r>
+              <a:t>UoC/AT3 tie: KE 4, evidenced contextually — the unit's knowledge evidence proven through the</a:t>
+            </a:r>
+          </a:p>
+          <a:p>
+            <a:r>
+              <a:t>learner's own HA work rather than abstractly.</a:t>
+            </a:r>
+          </a:p>
+        </p:txBody>
+      </p:sp>
+      <p:sp>
+        <p:nvSpPr>
+          <p:cNvPr id="4" name="Slide Number Placeholder 3"/>
+          <p:cNvSpPr>
+            <a:spLocks noGrp="1"/>
+          </p:cNvSpPr>
+          <p:nvPr>
+            <p:ph type="sldNum" idx="5" sz="quarter"/>
+          </p:nvPr>
+        </p:nvSpPr>
+        <p:spPr/>
+      </p:sp>
+    </p:spTree>
+  </p:cSld>
+  <p:clrMapOvr>
+    <a:masterClrMapping/>
+  </p:clrMapOvr>
+</p:notes>
+</file>
+
+<file path=ppt/notesSlides/notesSlide8.xml><?xml version="1.0" encoding="utf-8"?>
+<p:notes xmlns:a="http://schemas.openxmlformats.org/drawingml/2006/main" xmlns:p="http://schemas.openxmlformats.org/presentationml/2006/main" xmlns:r="http://schemas.openxmlformats.org/officeDocument/2006/relationships">
+  <p:cSld>
+    <p:spTree>
+      <p:nvGrpSpPr>
+        <p:cNvPr id="1" name=""/>
+        <p:cNvGrpSpPr/>
+        <p:nvPr/>
+      </p:nvGrpSpPr>
+      <p:grpSpPr>
+        <a:xfrm>
+          <a:off x="0" y="0"/>
+          <a:ext cx="0" cy="0"/>
+          <a:chOff x="0" y="0"/>
+          <a:chExt cx="0" cy="0"/>
+        </a:xfrm>
+      </p:grpSpPr>
+      <p:sp>
+        <p:nvSpPr>
+          <p:cNvPr id="2" name="Slide Image Placeholder 1"/>
+          <p:cNvSpPr>
+            <a:spLocks noGrp="1"/>
+          </p:cNvSpPr>
+          <p:nvPr>
+            <p:ph type="sldImg" idx="2"/>
+          </p:nvPr>
+        </p:nvSpPr>
+        <p:spPr/>
+      </p:sp>
+      <p:sp>
+        <p:nvSpPr>
+          <p:cNvPr id="3" name="Notes Placeholder 2"/>
+          <p:cNvSpPr>
+            <a:spLocks noGrp="1"/>
+          </p:cNvSpPr>
+          <p:nvPr>
+            <p:ph type="body" idx="3" sz="quarter"/>
+          </p:nvPr>
+        </p:nvSpPr>
+        <p:spPr/>
+        <p:txBody>
+          <a:bodyPr/>
+          <a:lstStyle/>
+          <a:p>
+            <a:r>
+              <a:t>Facilitation — the Section 2 practice; short, grounded KE writing.</a:t>
+            </a:r>
+          </a:p>
+          <a:p>
+            <a:r>
+              <a:t>Tell students: "Complete §8 for the practice engagement. For each knowledge question, don't</a:t>
+            </a:r>
+          </a:p>
+          <a:p>
+            <a:r>
+              <a:t>define the term — explain it through YOUR design, YOUR decisions and YOUR simulation results."</a:t>
+            </a:r>
+          </a:p>
+          <a:p>
+            <a:r>
+              <a:t>Steps:</a:t>
+            </a:r>
+          </a:p>
+          <a:p>
+            <a:r>
+              <a:t>1. Take each question — availability · fault tolerance · recovery objectives · redundancy</a:t>
+            </a:r>
+          </a:p>
+          <a:p>
+            <a:r>
+              <a:t>   mechanisms.</a:t>
+            </a:r>
+          </a:p>
+          <a:p>
+            <a:r>
+              <a:t>2. Answer it referencing your actual HA design and what your simulation showed.</a:t>
+            </a:r>
+          </a:p>
+          <a:p>
+            <a:r>
+              <a:t>Must produce: §8 answers, each tied to a specific part of their own system — not generic best</a:t>
+            </a:r>
+          </a:p>
+          <a:p>
+            <a:r>
+              <a:t>practice.</a:t>
+            </a:r>
+          </a:p>
+          <a:p>
+            <a:r>
+              <a:t>Timing: ~20 min then compare. Where they get stuck: they slip into textbook definitions —</a:t>
+            </a:r>
+          </a:p>
+          <a:p>
+            <a:r>
+              <a:t>circulate and ask "which part of YOUR design shows that?" to pull the answer back to their</a:t>
+            </a:r>
+          </a:p>
+          <a:p>
+            <a:r>
+              <a:t>evidence.</a:t>
+            </a:r>
+          </a:p>
+          <a:p>
+            <a:r>
+              <a:t>Share-back: read one generic answer and one grounded answer; ask the room which evidences</a:t>
+            </a:r>
+          </a:p>
+          <a:p>
+            <a:r>
+              <a:t>understanding.</a:t>
+            </a:r>
+          </a:p>
+          <a:p>
+            <a:r>
+              <a:t>No-leakage note: practice KE on Ledgerline here; AT3 assesses the same contextual-KE skill on</a:t>
+            </a:r>
+          </a:p>
+          <a:p>
+            <a:r>
+              <a:t>the LMS build — comparable, not identical.</a:t>
+            </a:r>
+          </a:p>
+        </p:txBody>
+      </p:sp>
+      <p:sp>
+        <p:nvSpPr>
+          <p:cNvPr id="4" name="Slide Number Placeholder 3"/>
+          <p:cNvSpPr>
+            <a:spLocks noGrp="1"/>
+          </p:cNvSpPr>
+          <p:nvPr>
+            <p:ph type="sldNum" idx="5" sz="quarter"/>
+          </p:nvPr>
+        </p:nvSpPr>
+        <p:spPr/>
+      </p:sp>
+    </p:spTree>
+  </p:cSld>
+  <p:clrMapOvr>
+    <a:masterClrMapping/>
+  </p:clrMapOvr>
+</p:notes>
+</file>
+
+<file path=ppt/notesSlides/notesSlide9.xml><?xml version="1.0" encoding="utf-8"?>
+<p:notes xmlns:a="http://schemas.openxmlformats.org/drawingml/2006/main" xmlns:p="http://schemas.openxmlformats.org/presentationml/2006/main" xmlns:r="http://schemas.openxmlformats.org/officeDocument/2006/relationships">
+  <p:cSld>
+    <p:spTree>
+      <p:nvGrpSpPr>
+        <p:cNvPr id="1" name=""/>
+        <p:cNvGrpSpPr/>
+        <p:nvPr/>
+      </p:nvGrpSpPr>
+      <p:grpSpPr>
+        <a:xfrm>
+          <a:off x="0" y="0"/>
+          <a:ext cx="0" cy="0"/>
+          <a:chOff x="0" y="0"/>
+          <a:chExt cx="0" cy="0"/>
+        </a:xfrm>
+      </p:grpSpPr>
+      <p:sp>
+        <p:nvSpPr>
+          <p:cNvPr id="2" name="Slide Image Placeholder 1"/>
+          <p:cNvSpPr>
+            <a:spLocks noGrp="1"/>
+          </p:cNvSpPr>
+          <p:nvPr>
+            <p:ph type="sldImg" idx="2"/>
+          </p:nvPr>
+        </p:nvSpPr>
+        <p:spPr/>
+      </p:sp>
+      <p:sp>
+        <p:nvSpPr>
+          <p:cNvPr id="3" name="Notes Placeholder 2"/>
+          <p:cNvSpPr>
+            <a:spLocks noGrp="1"/>
+          </p:cNvSpPr>
+          <p:nvPr>
+            <p:ph type="body" idx="3" sz="quarter"/>
+          </p:nvPr>
+        </p:nvSpPr>
+        <p:spPr/>
+        <p:txBody>
+          <a:bodyPr/>
+          <a:lstStyle/>
+          <a:p>
+            <a:r>
+              <a:t>Teach the finalise element — the formal close of an engagement, reused from 502 Topic 4</a:t>
+            </a:r>
+          </a:p>
+          <a:p>
+            <a:r>
+              <a:t>S11–S12.</a:t>
+            </a:r>
+          </a:p>
+          <a:p>
+            <a:r>
+              <a:t>• Walk it: at completion, collect UNBIASED feedback to confirm the design meets requirements —</a:t>
+            </a:r>
+          </a:p>
+          <a:p>
+            <a:r>
+              <a:t>  surveys, one-on-one interviews, focus groups.</a:t>
+            </a:r>
+          </a:p>
+          <a:p>
+            <a:r>
+              <a:t>• Confirm, seek and RESPOND to feedback from the required personnel — feedback you ignore isn't</a:t>
+            </a:r>
+          </a:p>
+          <a:p>
+            <a:r>
+              <a:t>  closure.</a:t>
+            </a:r>
+          </a:p>
+          <a:p>
+            <a:r>
+              <a:t>• Then obtain final SIGN-OFF from the project sponsor or delegated authority (bolded) —</a:t>
+            </a:r>
+          </a:p>
+          <a:p>
+            <a:r>
+              <a:t>  generally the last step in closing a project.</a:t>
+            </a:r>
+          </a:p>
+          <a:p>
+            <a:r>
+              <a:t>Misconception to pre-empt: "sign-off is just a signature at the end." No — it follows seeking</a:t>
+            </a:r>
+          </a:p>
+          <a:p>
+            <a:r>
+              <a:t>and responding to feedback; the client signs off because their requirements were confirmed met,</a:t>
+            </a:r>
+          </a:p>
+          <a:p>
+            <a:r>
+              <a:t>not as a formality.</a:t>
+            </a:r>
+          </a:p>
+          <a:p>
+            <a:r>
+              <a:t>Question to pose: "Why collect feedback from someone OTHER than yourself before sign-off?"</a:t>
+            </a:r>
+          </a:p>
+          <a:p>
+            <a:r>
+              <a:t>(unbiased confirmation the design meets requirements — you can't sign off your own work).</a:t>
+            </a:r>
+          </a:p>
+          <a:p>
+            <a:r>
+              <a:t>UoC/AT3 tie: PC 5.2 (confirm, seek and respond to feedback) and PC 5.3 (obtain final sign-off)</a:t>
+            </a:r>
+          </a:p>
+          <a:p>
+            <a:r>
+              <a:t>— the finalise element that distinguishes closure from documentation.</a:t>
+            </a:r>
+          </a:p>
+        </p:txBody>
+      </p:sp>
+      <p:sp>
+        <p:nvSpPr>
+          <p:cNvPr id="4" name="Slide Number Placeholder 3"/>
+          <p:cNvSpPr>
+            <a:spLocks noGrp="1"/>
+          </p:cNvSpPr>
+          <p:nvPr>
+            <p:ph type="sldNum" idx="5" sz="quarter"/>
+          </p:nvPr>
+        </p:nvSpPr>
+        <p:spPr/>
+      </p:sp>
+    </p:spTree>
+  </p:cSld>
+  <p:clrMapOvr>
+    <a:masterClrMapping/>
+  </p:clrMapOvr>
+</p:notes>
 </file>
 
 <file path=ppt/slideLayouts/slideLayout1.xml><?xml version="1.0" encoding="utf-8"?>
@@ -11489,4 +13404,324 @@
   </a:objectDefaults>
   <a:extraClrSchemeLst/>
 </a:theme>
+</file>
+
+<file path=ppt/theme/theme2.xml><?xml version="1.0" encoding="utf-8"?>
+<a:theme xmlns:a="http://schemas.openxmlformats.org/drawingml/2006/main" name="Office Theme">
+  <a:themeElements>
+    <a:clrScheme name="Office">
+      <a:dk1>
+        <a:sysClr val="windowText" lastClr="000000"/>
+      </a:dk1>
+      <a:lt1>
+        <a:sysClr val="window" lastClr="FFFFFF"/>
+      </a:lt1>
+      <a:dk2>
+        <a:srgbClr val="1F497D"/>
+      </a:dk2>
+      <a:lt2>
+        <a:srgbClr val="EEECE1"/>
+      </a:lt2>
+      <a:accent1>
+        <a:srgbClr val="4F81BD"/>
+      </a:accent1>
+      <a:accent2>
+        <a:srgbClr val="C0504D"/>
+      </a:accent2>
+      <a:accent3>
+        <a:srgbClr val="9BBB59"/>
+      </a:accent3>
+      <a:accent4>
+        <a:srgbClr val="8064A2"/>
+      </a:accent4>
+      <a:accent5>
+        <a:srgbClr val="4BACC6"/>
+      </a:accent5>
+      <a:accent6>
+        <a:srgbClr val="F79646"/>
+      </a:accent6>
+      <a:hlink>
+        <a:srgbClr val="0000FF"/>
+      </a:hlink>
+      <a:folHlink>
+        <a:srgbClr val="800080"/>
+      </a:folHlink>
+    </a:clrScheme>
+    <a:fontScheme name="Office">
+      <a:majorFont>
+        <a:latin typeface="Calibri"/>
+        <a:ea typeface=""/>
+        <a:cs typeface=""/>
+        <a:font script="Jpan" typeface="ＭＳ Ｐゴシック"/>
+        <a:font script="Hang" typeface="맑은 고딕"/>
+        <a:font script="Hans" typeface="宋体"/>
+        <a:font script="Hant" typeface="新細明體"/>
+        <a:font script="Arab" typeface="Times New Roman"/>
+        <a:font script="Hebr" typeface="Times New Roman"/>
+        <a:font script="Thai" typeface="Angsana New"/>
+        <a:font script="Ethi" typeface="Nyala"/>
+        <a:font script="Beng" typeface="Vrinda"/>
+        <a:font script="Gujr" typeface="Shruti"/>
+        <a:font script="Khmr" typeface="MoolBoran"/>
+        <a:font script="Knda" typeface="Tunga"/>
+        <a:font script="Guru" typeface="Raavi"/>
+        <a:font script="Cans" typeface="Euphemia"/>
+        <a:font script="Cher" typeface="Plantagenet Cherokee"/>
+        <a:font script="Yiii" typeface="Microsoft Yi Baiti"/>
+        <a:font script="Tibt" typeface="Microsoft Himalaya"/>
+        <a:font script="Thaa" typeface="MV Boli"/>
+        <a:font script="Deva" typeface="Mangal"/>
+        <a:font script="Telu" typeface="Gautami"/>
+        <a:font script="Taml" typeface="Latha"/>
+        <a:font script="Syrc" typeface="Estrangelo Edessa"/>
+        <a:font script="Orya" typeface="Kalinga"/>
+        <a:font script="Mlym" typeface="Kartika"/>
+        <a:font script="Laoo" typeface="DokChampa"/>
+        <a:font script="Sinh" typeface="Iskoola Pota"/>
+        <a:font script="Mong" typeface="Mongolian Baiti"/>
+        <a:font script="Viet" typeface="Times New Roman"/>
+        <a:font script="Uigh" typeface="Microsoft Uighur"/>
+        <a:font script="Geor" typeface="Sylfaen"/>
+      </a:majorFont>
+      <a:minorFont>
+        <a:latin typeface="Calibri"/>
+        <a:ea typeface=""/>
+        <a:cs typeface=""/>
+        <a:font script="Jpan" typeface="ＭＳ Ｐゴシック"/>
+        <a:font script="Hang" typeface="맑은 고딕"/>
+        <a:font script="Hans" typeface="宋体"/>
+        <a:font script="Hant" typeface="新細明體"/>
+        <a:font script="Arab" typeface="Arial"/>
+        <a:font script="Hebr" typeface="Arial"/>
+        <a:font script="Thai" typeface="Cordia New"/>
+        <a:font script="Ethi" typeface="Nyala"/>
+        <a:font script="Beng" typeface="Vrinda"/>
+        <a:font script="Gujr" typeface="Shruti"/>
+        <a:font script="Khmr" typeface="DaunPenh"/>
+        <a:font script="Knda" typeface="Tunga"/>
+        <a:font script="Guru" typeface="Raavi"/>
+        <a:font script="Cans" typeface="Euphemia"/>
+        <a:font script="Cher" typeface="Plantagenet Cherokee"/>
+        <a:font script="Yiii" typeface="Microsoft Yi Baiti"/>
+        <a:font script="Tibt" typeface="Microsoft Himalaya"/>
+        <a:font script="Thaa" typeface="MV Boli"/>
+        <a:font script="Deva" typeface="Mangal"/>
+        <a:font script="Telu" typeface="Gautami"/>
+        <a:font script="Taml" typeface="Latha"/>
+        <a:font script="Syrc" typeface="Estrangelo Edessa"/>
+        <a:font script="Orya" typeface="Kalinga"/>
+        <a:font script="Mlym" typeface="Kartika"/>
+        <a:font script="Laoo" typeface="DokChampa"/>
+        <a:font script="Sinh" typeface="Iskoola Pota"/>
+        <a:font script="Mong" typeface="Mongolian Baiti"/>
+        <a:font script="Viet" typeface="Arial"/>
+        <a:font script="Uigh" typeface="Microsoft Uighur"/>
+        <a:font script="Geor" typeface="Sylfaen"/>
+      </a:minorFont>
+    </a:fontScheme>
+    <a:fmtScheme name="Office">
+      <a:fillStyleLst>
+        <a:solidFill>
+          <a:schemeClr val="phClr"/>
+        </a:solidFill>
+        <a:gradFill rotWithShape="1">
+          <a:gsLst>
+            <a:gs pos="0">
+              <a:schemeClr val="phClr">
+                <a:tint val="50000"/>
+                <a:satMod val="300000"/>
+              </a:schemeClr>
+            </a:gs>
+            <a:gs pos="35000">
+              <a:schemeClr val="phClr">
+                <a:tint val="37000"/>
+                <a:satMod val="300000"/>
+              </a:schemeClr>
+            </a:gs>
+            <a:gs pos="100000">
+              <a:schemeClr val="phClr">
+                <a:tint val="15000"/>
+                <a:satMod val="350000"/>
+              </a:schemeClr>
+            </a:gs>
+          </a:gsLst>
+          <a:lin ang="16200000" scaled="1"/>
+        </a:gradFill>
+        <a:gradFill rotWithShape="1">
+          <a:gsLst>
+            <a:gs pos="0">
+              <a:schemeClr val="phClr">
+                <a:tint val="100000"/>
+                <a:shade val="100000"/>
+                <a:satMod val="130000"/>
+              </a:schemeClr>
+            </a:gs>
+            <a:gs pos="100000">
+              <a:schemeClr val="phClr">
+                <a:tint val="50000"/>
+                <a:shade val="100000"/>
+                <a:satMod val="350000"/>
+              </a:schemeClr>
+            </a:gs>
+          </a:gsLst>
+          <a:lin ang="16200000" scaled="0"/>
+        </a:gradFill>
+      </a:fillStyleLst>
+      <a:lnStyleLst>
+        <a:ln w="9525" cap="flat" cmpd="sng" algn="ctr">
+          <a:solidFill>
+            <a:schemeClr val="phClr">
+              <a:shade val="95000"/>
+              <a:satMod val="105000"/>
+            </a:schemeClr>
+          </a:solidFill>
+          <a:prstDash val="solid"/>
+        </a:ln>
+        <a:ln w="25400" cap="flat" cmpd="sng" algn="ctr">
+          <a:solidFill>
+            <a:schemeClr val="phClr"/>
+          </a:solidFill>
+          <a:prstDash val="solid"/>
+        </a:ln>
+        <a:ln w="38100" cap="flat" cmpd="sng" algn="ctr">
+          <a:solidFill>
+            <a:schemeClr val="phClr"/>
+          </a:solidFill>
+          <a:prstDash val="solid"/>
+        </a:ln>
+      </a:lnStyleLst>
+      <a:effectStyleLst>
+        <a:effectStyle>
+          <a:effectLst>
+            <a:outerShdw blurRad="40000" dist="20000" dir="5400000" rotWithShape="0">
+              <a:srgbClr val="000000">
+                <a:alpha val="38000"/>
+              </a:srgbClr>
+            </a:outerShdw>
+          </a:effectLst>
+        </a:effectStyle>
+        <a:effectStyle>
+          <a:effectLst>
+            <a:outerShdw blurRad="40000" dist="23000" dir="5400000" rotWithShape="0">
+              <a:srgbClr val="000000">
+                <a:alpha val="35000"/>
+              </a:srgbClr>
+            </a:outerShdw>
+          </a:effectLst>
+        </a:effectStyle>
+        <a:effectStyle>
+          <a:effectLst>
+            <a:outerShdw blurRad="40000" dist="23000" dir="5400000" rotWithShape="0">
+              <a:srgbClr val="000000">
+                <a:alpha val="35000"/>
+              </a:srgbClr>
+            </a:outerShdw>
+          </a:effectLst>
+          <a:scene3d>
+            <a:camera prst="orthographicFront">
+              <a:rot lat="0" lon="0" rev="0"/>
+            </a:camera>
+            <a:lightRig rig="threePt" dir="t">
+              <a:rot lat="0" lon="0" rev="1200000"/>
+            </a:lightRig>
+          </a:scene3d>
+          <a:sp3d>
+            <a:bevelT w="63500" h="25400"/>
+          </a:sp3d>
+        </a:effectStyle>
+      </a:effectStyleLst>
+      <a:bgFillStyleLst>
+        <a:solidFill>
+          <a:schemeClr val="phClr"/>
+        </a:solidFill>
+        <a:gradFill rotWithShape="1">
+          <a:gsLst>
+            <a:gs pos="0">
+              <a:schemeClr val="phClr">
+                <a:tint val="40000"/>
+                <a:satMod val="350000"/>
+              </a:schemeClr>
+            </a:gs>
+            <a:gs pos="40000">
+              <a:schemeClr val="phClr">
+                <a:tint val="45000"/>
+                <a:shade val="99000"/>
+                <a:satMod val="350000"/>
+              </a:schemeClr>
+            </a:gs>
+            <a:gs pos="100000">
+              <a:schemeClr val="phClr">
+                <a:shade val="20000"/>
+                <a:satMod val="255000"/>
+              </a:schemeClr>
+            </a:gs>
+          </a:gsLst>
+          <a:path path="circle">
+            <a:fillToRect l="50000" t="-80000" r="50000" b="180000"/>
+          </a:path>
+        </a:gradFill>
+        <a:gradFill rotWithShape="1">
+          <a:gsLst>
+            <a:gs pos="0">
+              <a:schemeClr val="phClr">
+                <a:tint val="80000"/>
+                <a:satMod val="300000"/>
+              </a:schemeClr>
+            </a:gs>
+            <a:gs pos="100000">
+              <a:schemeClr val="phClr">
+                <a:shade val="30000"/>
+                <a:satMod val="200000"/>
+              </a:schemeClr>
+            </a:gs>
+          </a:gsLst>
+          <a:path path="circle">
+            <a:fillToRect l="50000" t="50000" r="50000" b="50000"/>
+          </a:path>
+        </a:gradFill>
+      </a:bgFillStyleLst>
+    </a:fmtScheme>
+  </a:themeElements>
+  <a:objectDefaults>
+    <a:spDef>
+      <a:spPr/>
+      <a:bodyPr/>
+      <a:lstStyle/>
+      <a:style>
+        <a:lnRef idx="1">
+          <a:schemeClr val="accent1"/>
+        </a:lnRef>
+        <a:fillRef idx="3">
+          <a:schemeClr val="accent1"/>
+        </a:fillRef>
+        <a:effectRef idx="2">
+          <a:schemeClr val="accent1"/>
+        </a:effectRef>
+        <a:fontRef idx="minor">
+          <a:schemeClr val="lt1"/>
+        </a:fontRef>
+      </a:style>
+    </a:spDef>
+    <a:lnDef>
+      <a:spPr/>
+      <a:bodyPr/>
+      <a:lstStyle/>
+      <a:style>
+        <a:lnRef idx="2">
+          <a:schemeClr val="accent1"/>
+        </a:lnRef>
+        <a:fillRef idx="0">
+          <a:schemeClr val="accent1"/>
+        </a:fillRef>
+        <a:effectRef idx="1">
+          <a:schemeClr val="accent1"/>
+        </a:effectRef>
+        <a:fontRef idx="minor">
+          <a:schemeClr val="tx1"/>
+        </a:fontRef>
+      </a:style>
+    </a:lnDef>
+  </a:objectDefaults>
+  <a:extraClrSchemeLst/>
+</a:theme>
 </file>
--- a/S1-CL1-Cloud-Design-Build/delivery/topic_14/Topic_14_Slides.pptx
+++ b/S1-CL1-Cloud-Design-Build/delivery/topic_14/Topic_14_Slides.pptx
@@ -535,7 +535,7 @@
           </a:p>
           <a:p>
             <a:r>
-              <a:t>  Topic 14 turns that evidence into the deliverable and closes the engagement.</a:t>
+              <a:t>Topic 14 turns that evidence into the deliverable and closes the engagement.</a:t>
             </a:r>
           </a:p>
           <a:p>
@@ -545,7 +545,7 @@
           </a:p>
           <a:p>
             <a:r>
-              <a:t>  evidence knowledge in context, close out with feedback + sign-off.</a:t>
+              <a:t>evidence knowledge in context, close out with feedback + sign-off.</a:t>
             </a:r>
           </a:p>
           <a:p>
@@ -555,7 +555,7 @@
           </a:p>
           <a:p>
             <a:r>
-              <a:t>  They advised in AT1, built in AT2, hardened in AT3; today they document and sign off.</a:t>
+              <a:t>They advised in AT1, built in AT2, hardened in AT3; today they document and sign off.</a:t>
             </a:r>
           </a:p>
           <a:p>
@@ -675,7 +675,7 @@
           </a:p>
           <a:p>
             <a:r>
-              <a:t>  differently, what you learned.</a:t>
+              <a:t>differently, what you learned.</a:t>
             </a:r>
           </a:p>
           <a:p>
@@ -685,12 +685,12 @@
           </a:p>
           <a:p>
             <a:r>
-              <a:t>  Multi-AZ database" is a summary; "Multi-AZ was the right call because… but I'd test failover</a:t>
-            </a:r>
-          </a:p>
-          <a:p>
-            <a:r>
-              <a:t>  earlier next time" is a reflection.</a:t>
+              <a:t>Multi-AZ database" is a summary; "Multi-AZ was the right call because… but I'd test failover</a:t>
+            </a:r>
+          </a:p>
+          <a:p>
+            <a:r>
+              <a:t>earlier next time" is a reflection.</a:t>
             </a:r>
           </a:p>
           <a:p>
@@ -955,7 +955,7 @@
           </a:p>
           <a:p>
             <a:r>
-              <a:t>  simulation evidence. Everything captured in Topic 13 gets organised here.</a:t>
+              <a:t>simulation evidence. Everything captured in Topic 13 gets organised here.</a:t>
             </a:r>
           </a:p>
           <a:p>
@@ -965,7 +965,7 @@
           </a:p>
           <a:p>
             <a:r>
-              <a:t>  unlabelled screenshot proves nothing; a cited one turns a claim into proof.</a:t>
+              <a:t>unlabelled screenshot proves nothing; a cited one turns a claim into proof.</a:t>
             </a:r>
           </a:p>
           <a:p>
@@ -975,7 +975,7 @@
           </a:p>
           <a:p>
             <a:r>
-              <a:t>  appendix item they can check.</a:t>
+              <a:t>appendix item they can check.</a:t>
             </a:r>
           </a:p>
           <a:p>
@@ -1095,12 +1095,12 @@
           </a:p>
           <a:p>
             <a:r>
-              <a:t>  window) · §4 Build/Change Narrative · §5 Configuration Decisions · §6 Testing, Simulation &amp;</a:t>
-            </a:r>
-          </a:p>
-          <a:p>
-            <a:r>
-              <a:t>  Validation · §7 Operational Handover · §8 Knowledge Evidence.</a:t>
+              <a:t>window) · §4 Build/Change Narrative · §5 Configuration Decisions · §6 Testing, Simulation &amp;</a:t>
+            </a:r>
+          </a:p>
+          <a:p>
+            <a:r>
+              <a:t>Validation · §7 Operational Handover · §8 Knowledge Evidence.</a:t>
             </a:r>
           </a:p>
           <a:p>
@@ -1115,7 +1115,7 @@
           </a:p>
           <a:p>
             <a:r>
-              <a:t>  §1 is written last.</a:t>
+              <a:t>§1 is written last.</a:t>
             </a:r>
           </a:p>
           <a:p>
@@ -1230,7 +1230,7 @@
           </a:p>
           <a:p>
             <a:r>
-              <a:t>  measured — all from the Topic 13 work.</a:t>
+              <a:t>measured — all from the Topic 13 work.</a:t>
             </a:r>
           </a:p>
           <a:p>
@@ -1240,12 +1240,12 @@
           </a:p>
           <a:p>
             <a:r>
-              <a:t>  any adjustments you made. It's not "here's what happened" — it's "here's what happened,</a:t>
-            </a:r>
-          </a:p>
-          <a:p>
-            <a:r>
-              <a:t>  measured against what we designed for."</a:t>
+              <a:t>any adjustments you made. It's not "here's what happened" — it's "here's what happened,</a:t>
+            </a:r>
+          </a:p>
+          <a:p>
+            <a:r>
+              <a:t>measured against what we designed for."</a:t>
             </a:r>
           </a:p>
           <a:p>
@@ -1255,7 +1255,7 @@
           </a:p>
           <a:p>
             <a:r>
-              <a:t>  tolerance; everything else in the report supports it.</a:t>
+              <a:t>tolerance; everything else in the report supports it.</a:t>
             </a:r>
           </a:p>
           <a:p>
@@ -1380,7 +1380,7 @@
           </a:p>
           <a:p>
             <a:r>
-              <a:t>  ASG + ALB, Multi-AZ database — cross-referencing the appendices as it goes.</a:t>
+              <a:t>ASG + ALB, Multi-AZ database — cross-referencing the appendices as it goes.</a:t>
             </a:r>
           </a:p>
           <a:p>
@@ -1395,7 +1395,7 @@
           </a:p>
           <a:p>
             <a:r>
-              <a:t>  what to watch. This is what the client operates after you leave.</a:t>
+              <a:t>what to watch. This is what the client operates after you leave.</a:t>
             </a:r>
           </a:p>
           <a:p>
@@ -1405,7 +1405,7 @@
           </a:p>
           <a:p>
             <a:r>
-              <a:t>  written.</a:t>
+              <a:t>written.</a:t>
             </a:r>
           </a:p>
           <a:p>
@@ -1675,7 +1675,7 @@
           </a:p>
           <a:p>
             <a:r>
-              <a:t>  recovery objectives, redundancy, the trade-offs.</a:t>
+              <a:t>recovery objectives, redundancy, the trade-offs.</a:t>
             </a:r>
           </a:p>
           <a:p>
@@ -1685,7 +1685,7 @@
           </a:p>
           <a:p>
             <a:r>
-              <a:t>  simulation findings, not a textbook definition.</a:t>
+              <a:t>simulation findings, not a textbook definition.</a:t>
             </a:r>
           </a:p>
           <a:p>
@@ -1695,7 +1695,7 @@
           </a:p>
           <a:p>
             <a:r>
-              <a:t>  failover simulation showed" — the answer points back at their evidence.</a:t>
+              <a:t>failover simulation showed" — the answer points back at their evidence.</a:t>
             </a:r>
           </a:p>
           <a:p>
@@ -1825,7 +1825,7 @@
           </a:p>
           <a:p>
             <a:r>
-              <a:t>   mechanisms.</a:t>
+              <a:t>mechanisms.</a:t>
             </a:r>
           </a:p>
           <a:p>
@@ -1960,7 +1960,7 @@
           </a:p>
           <a:p>
             <a:r>
-              <a:t>  surveys, one-on-one interviews, focus groups.</a:t>
+              <a:t>surveys, one-on-one interviews, focus groups.</a:t>
             </a:r>
           </a:p>
           <a:p>
@@ -1970,7 +1970,7 @@
           </a:p>
           <a:p>
             <a:r>
-              <a:t>  closure.</a:t>
+              <a:t>closure.</a:t>
             </a:r>
           </a:p>
           <a:p>
@@ -1980,7 +1980,7 @@
           </a:p>
           <a:p>
             <a:r>
-              <a:t>  generally the last step in closing a project.</a:t>
+              <a:t>generally the last step in closing a project.</a:t>
             </a:r>
           </a:p>
           <a:p>
@@ -5661,16 +5661,16 @@
             <a:r>
               <a:rPr sz="2400" b="1" i="0">
                 <a:solidFill>
-                  <a:srgbClr val="27B5CE"/>
+                  <a:srgbClr val="EDAB0C"/>
                 </a:solidFill>
                 <a:latin typeface="Roboto"/>
               </a:rPr>
               <a:t>■  </a:t>
             </a:r>
             <a:r>
-              <a:rPr sz="2400" b="1" i="0">
-                <a:solidFill>
-                  <a:srgbClr val="27B5CE"/>
+              <a:rPr sz="2400" b="0" i="0">
+                <a:solidFill>
+                  <a:srgbClr val="2A2929"/>
                 </a:solidFill>
                 <a:latin typeface="Roboto"/>
               </a:rPr>
@@ -6032,7 +6032,7 @@
               <a:t>■  </a:t>
             </a:r>
             <a:r>
-              <a:rPr sz="1700" b="1" i="0">
+              <a:rPr sz="1700" b="0" i="0">
                 <a:solidFill>
                   <a:srgbClr val="2A2929"/>
                 </a:solidFill>
@@ -6118,16 +6118,16 @@
             <a:r>
               <a:rPr sz="1700" b="1" i="0">
                 <a:solidFill>
-                  <a:srgbClr val="27B5CE"/>
+                  <a:srgbClr val="EDAB0C"/>
                 </a:solidFill>
                 <a:latin typeface="Roboto"/>
               </a:rPr>
               <a:t>■  </a:t>
             </a:r>
             <a:r>
-              <a:rPr sz="1700" b="1" i="0">
-                <a:solidFill>
-                  <a:srgbClr val="27B5CE"/>
+              <a:rPr sz="1700" b="0" i="0">
+                <a:solidFill>
+                  <a:srgbClr val="2A2929"/>
                 </a:solidFill>
                 <a:latin typeface="Roboto"/>
               </a:rPr>
@@ -6848,16 +6848,16 @@
             <a:r>
               <a:rPr sz="2400" b="1" i="0">
                 <a:solidFill>
-                  <a:srgbClr val="205F61"/>
+                  <a:srgbClr val="EDAB0C"/>
                 </a:solidFill>
                 <a:latin typeface="Roboto"/>
               </a:rPr>
               <a:t>■  </a:t>
             </a:r>
             <a:r>
-              <a:rPr sz="2400" b="1" i="0">
-                <a:solidFill>
-                  <a:srgbClr val="205F61"/>
+              <a:rPr sz="2400" b="0" i="0">
+                <a:solidFill>
+                  <a:srgbClr val="2A2929"/>
                 </a:solidFill>
                 <a:latin typeface="Roboto"/>
               </a:rPr>
@@ -7175,16 +7175,16 @@
             <a:r>
               <a:rPr sz="2400" b="1" i="0">
                 <a:solidFill>
-                  <a:srgbClr val="205F61"/>
+                  <a:srgbClr val="EDAB0C"/>
                 </a:solidFill>
                 <a:latin typeface="Roboto"/>
               </a:rPr>
               <a:t>■  </a:t>
             </a:r>
             <a:r>
-              <a:rPr sz="2400" b="1" i="0">
-                <a:solidFill>
-                  <a:srgbClr val="205F61"/>
+              <a:rPr sz="2400" b="0" i="0">
+                <a:solidFill>
+                  <a:srgbClr val="2A2929"/>
                 </a:solidFill>
                 <a:latin typeface="Roboto"/>
               </a:rPr>
@@ -7546,7 +7546,7 @@
               <a:t>■  </a:t>
             </a:r>
             <a:r>
-              <a:rPr sz="1700" b="1" i="0">
+              <a:rPr sz="1700" b="0" i="0">
                 <a:solidFill>
                   <a:srgbClr val="2A2929"/>
                 </a:solidFill>
@@ -8677,7 +8677,7 @@
             <a:r>
               <a:rPr sz="1800" b="1" i="0">
                 <a:solidFill>
-                  <a:srgbClr val="EDAB0C"/>
+                  <a:srgbClr val="205F61"/>
                 </a:solidFill>
                 <a:latin typeface="Roboto"/>
               </a:rPr>
@@ -8701,7 +8701,7 @@
             <a:avLst/>
           </a:prstGeom>
           <a:solidFill>
-            <a:srgbClr val="EDAB0C"/>
+            <a:srgbClr val="205F61"/>
           </a:solidFill>
           <a:ln>
             <a:noFill/>
@@ -8791,7 +8791,7 @@
             <a:avLst/>
           </a:prstGeom>
           <a:solidFill>
-            <a:srgbClr val="EDAB0C"/>
+            <a:srgbClr val="205F61"/>
           </a:solidFill>
           <a:ln>
             <a:noFill/>
@@ -8920,7 +8920,7 @@
             <a:avLst/>
           </a:prstGeom>
           <a:solidFill>
-            <a:srgbClr val="EDAB0C"/>
+            <a:srgbClr val="205F61"/>
           </a:solidFill>
           <a:ln>
             <a:noFill/>
@@ -9049,7 +9049,7 @@
             <a:avLst/>
           </a:prstGeom>
           <a:solidFill>
-            <a:srgbClr val="EDAB0C"/>
+            <a:srgbClr val="205F61"/>
           </a:solidFill>
           <a:ln>
             <a:noFill/>
@@ -9178,7 +9178,7 @@
             <a:avLst/>
           </a:prstGeom>
           <a:solidFill>
-            <a:srgbClr val="EDAB0C"/>
+            <a:srgbClr val="205F61"/>
           </a:solidFill>
           <a:ln>
             <a:noFill/>
@@ -9307,7 +9307,7 @@
             <a:avLst/>
           </a:prstGeom>
           <a:solidFill>
-            <a:srgbClr val="EDAB0C"/>
+            <a:srgbClr val="205F61"/>
           </a:solidFill>
           <a:ln>
             <a:noFill/>
@@ -9390,7 +9390,7 @@
             <a:avLst/>
           </a:prstGeom>
           <a:solidFill>
-            <a:srgbClr val="EDAB0C"/>
+            <a:srgbClr val="205F61"/>
           </a:solidFill>
           <a:ln>
             <a:noFill/>
@@ -9826,16 +9826,16 @@
             <a:r>
               <a:rPr sz="2400" b="1" i="0">
                 <a:solidFill>
-                  <a:srgbClr val="92268F"/>
+                  <a:srgbClr val="EDAB0C"/>
                 </a:solidFill>
                 <a:latin typeface="Roboto"/>
               </a:rPr>
               <a:t>■  </a:t>
             </a:r>
             <a:r>
-              <a:rPr sz="2400" b="1" i="0">
-                <a:solidFill>
-                  <a:srgbClr val="92268F"/>
+              <a:rPr sz="2400" b="0" i="0">
+                <a:solidFill>
+                  <a:srgbClr val="2A2929"/>
                 </a:solidFill>
                 <a:latin typeface="Roboto"/>
               </a:rPr>
@@ -10507,16 +10507,16 @@
             <a:r>
               <a:rPr sz="2400" b="1" i="0">
                 <a:solidFill>
-                  <a:srgbClr val="92268F"/>
+                  <a:srgbClr val="EDAB0C"/>
                 </a:solidFill>
                 <a:latin typeface="Roboto"/>
               </a:rPr>
               <a:t>■  </a:t>
             </a:r>
             <a:r>
-              <a:rPr sz="2400" b="1" i="0">
-                <a:solidFill>
-                  <a:srgbClr val="92268F"/>
+              <a:rPr sz="2400" b="0" i="0">
+                <a:solidFill>
+                  <a:srgbClr val="2A2929"/>
                 </a:solidFill>
                 <a:latin typeface="Roboto"/>
               </a:rPr>
@@ -10927,16 +10927,16 @@
             <a:r>
               <a:rPr sz="2400" b="1" i="0">
                 <a:solidFill>
-                  <a:srgbClr val="92268F"/>
+                  <a:srgbClr val="EDAB0C"/>
                 </a:solidFill>
                 <a:latin typeface="Roboto"/>
               </a:rPr>
               <a:t>■  </a:t>
             </a:r>
             <a:r>
-              <a:rPr sz="2400" b="1" i="0">
-                <a:solidFill>
-                  <a:srgbClr val="92268F"/>
+              <a:rPr sz="2400" b="0" i="0">
+                <a:solidFill>
+                  <a:srgbClr val="2A2929"/>
                 </a:solidFill>
                 <a:latin typeface="Roboto"/>
               </a:rPr>
@@ -11254,16 +11254,16 @@
             <a:r>
               <a:rPr sz="2400" b="1" i="0">
                 <a:solidFill>
-                  <a:srgbClr val="92268F"/>
+                  <a:srgbClr val="EDAB0C"/>
                 </a:solidFill>
                 <a:latin typeface="Roboto"/>
               </a:rPr>
               <a:t>■  </a:t>
             </a:r>
             <a:r>
-              <a:rPr sz="2400" b="1" i="0">
-                <a:solidFill>
-                  <a:srgbClr val="92268F"/>
+              <a:rPr sz="2400" b="0" i="0">
+                <a:solidFill>
+                  <a:srgbClr val="2A2929"/>
                 </a:solidFill>
                 <a:latin typeface="Roboto"/>
               </a:rPr>
@@ -11674,16 +11674,16 @@
             <a:r>
               <a:rPr sz="2400" b="1" i="0">
                 <a:solidFill>
-                  <a:srgbClr val="92268F"/>
+                  <a:srgbClr val="EDAB0C"/>
                 </a:solidFill>
                 <a:latin typeface="Roboto"/>
               </a:rPr>
               <a:t>■  </a:t>
             </a:r>
             <a:r>
-              <a:rPr sz="2400" b="1" i="0">
-                <a:solidFill>
-                  <a:srgbClr val="92268F"/>
+              <a:rPr sz="2400" b="0" i="0">
+                <a:solidFill>
+                  <a:srgbClr val="2A2929"/>
                 </a:solidFill>
                 <a:latin typeface="Roboto"/>
               </a:rPr>
@@ -12014,7 +12014,7 @@
               <a:t>■  </a:t>
             </a:r>
             <a:r>
-              <a:rPr sz="1700" b="1" i="0">
+              <a:rPr sz="1700" b="0" i="0">
                 <a:solidFill>
                   <a:srgbClr val="2A2929"/>
                 </a:solidFill>
@@ -12100,16 +12100,16 @@
             <a:r>
               <a:rPr sz="1700" b="1" i="0">
                 <a:solidFill>
-                  <a:srgbClr val="92268F"/>
+                  <a:srgbClr val="EDAB0C"/>
                 </a:solidFill>
                 <a:latin typeface="Roboto"/>
               </a:rPr>
               <a:t>■  </a:t>
             </a:r>
             <a:r>
-              <a:rPr sz="1700" b="1" i="0">
-                <a:solidFill>
-                  <a:srgbClr val="92268F"/>
+              <a:rPr sz="1700" b="0" i="0">
+                <a:solidFill>
+                  <a:srgbClr val="2A2929"/>
                 </a:solidFill>
                 <a:latin typeface="Roboto"/>
               </a:rPr>
